--- a/lecture_pptx/session17_assets/ワーク02_バイブコーディング.pptx
+++ b/lecture_pptx/session17_assets/ワーク02_バイブコーディング.pptx
@@ -13,9 +13,11 @@
     <p:sldId id="261" r:id="rId7"/>
     <p:sldId id="262" r:id="rId8"/>
     <p:sldId id="263" r:id="rId9"/>
+    <p:sldId id="264" r:id="rId10"/>
+    <p:sldId id="265" r:id="rId11"/>
   </p:sldIdLst>
   <p:notesMasterIdLst>
-    <p:notesMasterId r:id="rId10"/>
+    <p:notesMasterId r:id="rId12"/>
   </p:notesMasterIdLst>
   <p:sldSz cx="9144000" cy="5143500"/>
   <p:notesSz cx="5143500" cy="9144000"/>
@@ -551,6 +553,94 @@
 </p:notes>
 </file>
 
+<file path=ppt/notesSlides/notesSlide10.xml><?xml version="1.0" encoding="utf-8"?>
+<p:notes xmlns:a="http://schemas.openxmlformats.org/drawingml/2006/main" xmlns:r="http://schemas.openxmlformats.org/officeDocument/2006/relationships" xmlns:p="http://schemas.openxmlformats.org/presentationml/2006/main">
+  <p:cSld>
+    <p:spTree>
+      <p:nvGrpSpPr>
+        <p:cNvPr id="1" name=""/>
+        <p:cNvGrpSpPr/>
+        <p:nvPr/>
+      </p:nvGrpSpPr>
+      <p:grpSpPr>
+        <a:xfrm>
+          <a:off x="0" y="0"/>
+          <a:ext cx="0" cy="0"/>
+          <a:chOff x="0" y="0"/>
+          <a:chExt cx="0" cy="0"/>
+        </a:xfrm>
+      </p:grpSpPr>
+      <p:sp>
+        <p:nvSpPr>
+          <p:cNvPr id="2" name="Slide Image Placeholder 1"/>
+          <p:cNvSpPr>
+            <a:spLocks noGrp="1" noRot="1" noChangeAspect="1"/>
+          </p:cNvSpPr>
+          <p:nvPr>
+            <p:ph type="sldImg"/>
+          </p:nvPr>
+        </p:nvSpPr>
+        <p:spPr/>
+      </p:sp>
+      <p:sp>
+        <p:nvSpPr>
+          <p:cNvPr id="3" name="Notes Placeholder 2"/>
+          <p:cNvSpPr>
+            <a:spLocks noGrp="1"/>
+          </p:cNvSpPr>
+          <p:nvPr>
+            <p:ph type="body" idx="1"/>
+          </p:nvPr>
+        </p:nvSpPr>
+        <p:spPr/>
+        <p:txBody>
+          <a:bodyPr/>
+          <a:lstStyle/>
+          <a:p>
+            <a:r>
+              <a:rPr lang="en-US" dirty="0"/>
+              <a:t/>
+            </a:r>
+            <a:endParaRPr lang="en-US" dirty="0"/>
+          </a:p>
+        </p:txBody>
+      </p:sp>
+      <p:sp>
+        <p:nvSpPr>
+          <p:cNvPr id="4" name="Slide Number Placeholder 3"/>
+          <p:cNvSpPr>
+            <a:spLocks noGrp="1"/>
+          </p:cNvSpPr>
+          <p:nvPr>
+            <p:ph type="sldNum" sz="quarter" idx="10"/>
+          </p:nvPr>
+        </p:nvSpPr>
+        <p:spPr/>
+        <p:txBody>
+          <a:bodyPr/>
+          <a:lstStyle/>
+          <a:p>
+            <a:fld id="{F7021451-1387-4CA6-816F-3879F97B5CBC}" type="slidenum">
+              <a:rPr lang="en-US"/>
+              <a:t>10</a:t>
+            </a:fld>
+            <a:endParaRPr lang="en-US"/>
+          </a:p>
+        </p:txBody>
+      </p:sp>
+    </p:spTree>
+    <p:extLst>
+      <p:ext uri="{BB962C8B-B14F-4D97-AF65-F5344CB8AC3E}">
+        <p14:creationId xmlns:p14="http://schemas.microsoft.com/office/powerpoint/2010/main" val="1024086991"/>
+      </p:ext>
+    </p:extLst>
+  </p:cSld>
+  <p:clrMapOvr>
+    <a:masterClrMapping/>
+  </p:clrMapOvr>
+</p:notes>
+</file>
+
 <file path=ppt/notesSlides/notesSlide2.xml><?xml version="1.0" encoding="utf-8"?>
 <p:notes xmlns:a="http://schemas.openxmlformats.org/drawingml/2006/main" xmlns:r="http://schemas.openxmlformats.org/officeDocument/2006/relationships" xmlns:p="http://schemas.openxmlformats.org/presentationml/2006/main">
   <p:cSld>
@@ -1149,6 +1239,94 @@
             <a:fld id="{F7021451-1387-4CA6-816F-3879F97B5CBC}" type="slidenum">
               <a:rPr lang="en-US"/>
               <a:t>8</a:t>
+            </a:fld>
+            <a:endParaRPr lang="en-US"/>
+          </a:p>
+        </p:txBody>
+      </p:sp>
+    </p:spTree>
+    <p:extLst>
+      <p:ext uri="{BB962C8B-B14F-4D97-AF65-F5344CB8AC3E}">
+        <p14:creationId xmlns:p14="http://schemas.microsoft.com/office/powerpoint/2010/main" val="1024086991"/>
+      </p:ext>
+    </p:extLst>
+  </p:cSld>
+  <p:clrMapOvr>
+    <a:masterClrMapping/>
+  </p:clrMapOvr>
+</p:notes>
+</file>
+
+<file path=ppt/notesSlides/notesSlide9.xml><?xml version="1.0" encoding="utf-8"?>
+<p:notes xmlns:a="http://schemas.openxmlformats.org/drawingml/2006/main" xmlns:r="http://schemas.openxmlformats.org/officeDocument/2006/relationships" xmlns:p="http://schemas.openxmlformats.org/presentationml/2006/main">
+  <p:cSld>
+    <p:spTree>
+      <p:nvGrpSpPr>
+        <p:cNvPr id="1" name=""/>
+        <p:cNvGrpSpPr/>
+        <p:nvPr/>
+      </p:nvGrpSpPr>
+      <p:grpSpPr>
+        <a:xfrm>
+          <a:off x="0" y="0"/>
+          <a:ext cx="0" cy="0"/>
+          <a:chOff x="0" y="0"/>
+          <a:chExt cx="0" cy="0"/>
+        </a:xfrm>
+      </p:grpSpPr>
+      <p:sp>
+        <p:nvSpPr>
+          <p:cNvPr id="2" name="Slide Image Placeholder 1"/>
+          <p:cNvSpPr>
+            <a:spLocks noGrp="1" noRot="1" noChangeAspect="1"/>
+          </p:cNvSpPr>
+          <p:nvPr>
+            <p:ph type="sldImg"/>
+          </p:nvPr>
+        </p:nvSpPr>
+        <p:spPr/>
+      </p:sp>
+      <p:sp>
+        <p:nvSpPr>
+          <p:cNvPr id="3" name="Notes Placeholder 2"/>
+          <p:cNvSpPr>
+            <a:spLocks noGrp="1"/>
+          </p:cNvSpPr>
+          <p:nvPr>
+            <p:ph type="body" idx="1"/>
+          </p:nvPr>
+        </p:nvSpPr>
+        <p:spPr/>
+        <p:txBody>
+          <a:bodyPr/>
+          <a:lstStyle/>
+          <a:p>
+            <a:r>
+              <a:rPr lang="en-US" dirty="0"/>
+              <a:t/>
+            </a:r>
+            <a:endParaRPr lang="en-US" dirty="0"/>
+          </a:p>
+        </p:txBody>
+      </p:sp>
+      <p:sp>
+        <p:nvSpPr>
+          <p:cNvPr id="4" name="Slide Number Placeholder 3"/>
+          <p:cNvSpPr>
+            <a:spLocks noGrp="1"/>
+          </p:cNvSpPr>
+          <p:nvPr>
+            <p:ph type="sldNum" sz="quarter" idx="10"/>
+          </p:nvPr>
+        </p:nvSpPr>
+        <p:spPr/>
+        <p:txBody>
+          <a:bodyPr/>
+          <a:lstStyle/>
+          <a:p>
+            <a:fld id="{F7021451-1387-4CA6-816F-3879F97B5CBC}" type="slidenum">
+              <a:rPr lang="en-US"/>
+              <a:t>9</a:t>
             </a:fld>
             <a:endParaRPr lang="en-US"/>
           </a:p>
@@ -1520,14 +1698,36 @@
       </p:sp>
       <p:sp>
         <p:nvSpPr>
-          <p:cNvPr id="3" name="Text 1"/>
-          <p:cNvSpPr/>
-          <p:nvPr/>
-        </p:nvSpPr>
-        <p:spPr>
-          <a:xfrm>
-            <a:off x="548640" y="1188720"/>
-            <a:ext cx="8046720" cy="960120"/>
+          <p:cNvPr id="3" name="Shape 1"/>
+          <p:cNvSpPr/>
+          <p:nvPr/>
+        </p:nvSpPr>
+        <p:spPr>
+          <a:xfrm>
+            <a:off x="548640" y="640080"/>
+            <a:ext cx="1463040" cy="457200"/>
+          </a:xfrm>
+          <a:prstGeom prst="roundRect">
+            <a:avLst>
+              <a:gd name="adj" fmla="val 12000"/>
+            </a:avLst>
+          </a:prstGeom>
+          <a:solidFill>
+            <a:srgbClr val="E8A33D"/>
+          </a:solidFill>
+          <a:ln/>
+        </p:spPr>
+      </p:sp>
+      <p:sp>
+        <p:nvSpPr>
+          <p:cNvPr id="4" name="Text 2"/>
+          <p:cNvSpPr/>
+          <p:nvPr/>
+        </p:nvSpPr>
+        <p:spPr>
+          <a:xfrm>
+            <a:off x="548640" y="640080"/>
+            <a:ext cx="1463040" cy="457200"/>
           </a:xfrm>
           <a:prstGeom prst="rect">
             <a:avLst/>
@@ -1539,33 +1739,72 @@
           <a:bodyPr wrap="square" rtlCol="0" anchor="ctr"/>
           <a:lstStyle/>
           <a:p>
-            <a:pPr algn="l" indent="0" marL="0">
-              <a:buNone/>
-            </a:pPr>
-            <a:r>
-              <a:rPr lang="en-US" sz="3800" b="1" dirty="0">
-                <a:solidFill>
-                  <a:srgbClr val="FFFFFF"/>
+            <a:pPr algn="ctr" indent="0" marL="0">
+              <a:buNone/>
+            </a:pPr>
+            <a:r>
+              <a:rPr lang="en-US" sz="1500" b="1" dirty="0">
+                <a:solidFill>
+                  <a:srgbClr val="1F3A5F"/>
                 </a:solidFill>
                 <a:latin typeface="Yu Gothic UI Semibold" pitchFamily="34" charset="0"/>
                 <a:ea typeface="Yu Gothic UI Semibold" pitchFamily="34" charset="-122"/>
                 <a:cs typeface="Yu Gothic UI Semibold" pitchFamily="34" charset="-120"/>
               </a:rPr>
-              <a:t>ワーク② バイブコーディング (GAS + Gemini)</a:t>
-            </a:r>
-            <a:endParaRPr lang="en-US" sz="3800" dirty="0"/>
-          </a:p>
-        </p:txBody>
-      </p:sp>
-      <p:sp>
-        <p:nvSpPr>
-          <p:cNvPr id="4" name="Text 2"/>
-          <p:cNvSpPr/>
-          <p:nvPr/>
-        </p:nvSpPr>
-        <p:spPr>
-          <a:xfrm>
-            <a:off x="548640" y="2331720"/>
+              <a:t>ステップ ②</a:t>
+            </a:r>
+            <a:endParaRPr lang="en-US" sz="1500" dirty="0"/>
+          </a:p>
+        </p:txBody>
+      </p:sp>
+      <p:sp>
+        <p:nvSpPr>
+          <p:cNvPr id="5" name="Text 3"/>
+          <p:cNvSpPr/>
+          <p:nvPr/>
+        </p:nvSpPr>
+        <p:spPr>
+          <a:xfrm>
+            <a:off x="548640" y="1280160"/>
+            <a:ext cx="8046720" cy="914400"/>
+          </a:xfrm>
+          <a:prstGeom prst="rect">
+            <a:avLst/>
+          </a:prstGeom>
+          <a:noFill/>
+          <a:ln/>
+        </p:spPr>
+        <p:txBody>
+          <a:bodyPr wrap="square" rtlCol="0" anchor="ctr"/>
+          <a:lstStyle/>
+          <a:p>
+            <a:pPr algn="l" indent="0" marL="0">
+              <a:buNone/>
+            </a:pPr>
+            <a:r>
+              <a:rPr lang="en-US" sz="3400" b="1" dirty="0">
+                <a:solidFill>
+                  <a:srgbClr val="FFFFFF"/>
+                </a:solidFill>
+                <a:latin typeface="Yu Gothic UI Semibold" pitchFamily="34" charset="0"/>
+                <a:ea typeface="Yu Gothic UI Semibold" pitchFamily="34" charset="-122"/>
+                <a:cs typeface="Yu Gothic UI Semibold" pitchFamily="34" charset="-120"/>
+              </a:rPr>
+              <a:t>バイブコーディング</a:t>
+            </a:r>
+            <a:endParaRPr lang="en-US" sz="3400" dirty="0"/>
+          </a:p>
+        </p:txBody>
+      </p:sp>
+      <p:sp>
+        <p:nvSpPr>
+          <p:cNvPr id="6" name="Text 4"/>
+          <p:cNvSpPr/>
+          <p:nvPr/>
+        </p:nvSpPr>
+        <p:spPr>
+          <a:xfrm>
+            <a:off x="548640" y="2423160"/>
             <a:ext cx="8046720" cy="640080"/>
           </a:xfrm>
           <a:prstGeom prst="rect">
@@ -1582,7 +1821,7 @@
               <a:buNone/>
             </a:pPr>
             <a:r>
-              <a:rPr lang="en-US" sz="1900" dirty="0">
+              <a:rPr lang="en-US" sz="1700" dirty="0">
                 <a:solidFill>
                   <a:srgbClr val="E8A33D"/>
                 </a:solidFill>
@@ -1590,9 +1829,514 @@
                 <a:ea typeface="Yu Gothic UI" pitchFamily="34" charset="-122"/>
                 <a:cs typeface="Yu Gothic UI" pitchFamily="34" charset="-120"/>
               </a:rPr>
-              <a:t>設計書を Gemini に見せて "この通りに GAS 書いて" と頼み、動かして体験する</a:t>
-            </a:r>
-            <a:endParaRPr lang="en-US" sz="1900" dirty="0"/>
+              <a:t>設計書を AI に渡して、動くアプリを一気に作る</a:t>
+            </a:r>
+            <a:endParaRPr lang="en-US" sz="1700" dirty="0"/>
+          </a:p>
+        </p:txBody>
+      </p:sp>
+    </p:spTree>
+  </p:cSld>
+  <p:clrMapOvr>
+    <a:masterClrMapping/>
+  </p:clrMapOvr>
+</p:sld>
+</file>
+
+<file path=ppt/slides/slide10.xml><?xml version="1.0" encoding="utf-8"?>
+<p:sld xmlns:a="http://schemas.openxmlformats.org/drawingml/2006/main" xmlns:r="http://schemas.openxmlformats.org/officeDocument/2006/relationships" xmlns:p="http://schemas.openxmlformats.org/presentationml/2006/main">
+  <p:cSld name="Slide 10">
+    <p:bg>
+      <p:bgPr>
+        <a:solidFill>
+          <a:srgbClr val="FFFFFF"/>
+        </a:solidFill>
+      </p:bgPr>
+    </p:bg>
+    <p:spTree>
+      <p:nvGrpSpPr>
+        <p:cNvPr id="1" name=""/>
+        <p:cNvGrpSpPr/>
+        <p:nvPr/>
+      </p:nvGrpSpPr>
+      <p:grpSpPr>
+        <a:xfrm>
+          <a:off x="0" y="0"/>
+          <a:ext cx="0" cy="0"/>
+          <a:chOff x="0" y="0"/>
+          <a:chExt cx="0" cy="0"/>
+        </a:xfrm>
+      </p:grpSpPr>
+      <p:sp>
+        <p:nvSpPr>
+          <p:cNvPr id="2" name="Shape 0"/>
+          <p:cNvSpPr/>
+          <p:nvPr/>
+        </p:nvSpPr>
+        <p:spPr>
+          <a:xfrm>
+            <a:off x="0" y="0"/>
+            <a:ext cx="164592" cy="5143500"/>
+          </a:xfrm>
+          <a:prstGeom prst="rect">
+            <a:avLst/>
+          </a:prstGeom>
+          <a:solidFill>
+            <a:srgbClr val="0E7C86"/>
+          </a:solidFill>
+          <a:ln/>
+        </p:spPr>
+      </p:sp>
+      <p:sp>
+        <p:nvSpPr>
+          <p:cNvPr id="3" name="Text 1"/>
+          <p:cNvSpPr/>
+          <p:nvPr/>
+        </p:nvSpPr>
+        <p:spPr>
+          <a:xfrm>
+            <a:off x="411480" y="182880"/>
+            <a:ext cx="8412480" cy="548640"/>
+          </a:xfrm>
+          <a:prstGeom prst="rect">
+            <a:avLst/>
+          </a:prstGeom>
+          <a:noFill/>
+          <a:ln/>
+        </p:spPr>
+        <p:txBody>
+          <a:bodyPr wrap="square" rtlCol="0" anchor="ctr"/>
+          <a:lstStyle/>
+          <a:p>
+            <a:pPr indent="0" marL="0">
+              <a:buNone/>
+            </a:pPr>
+            <a:r>
+              <a:rPr lang="en-US" sz="2400" b="1" dirty="0">
+                <a:solidFill>
+                  <a:srgbClr val="1F3A5F"/>
+                </a:solidFill>
+                <a:latin typeface="Yu Gothic UI Semibold" pitchFamily="34" charset="0"/>
+                <a:ea typeface="Yu Gothic UI Semibold" pitchFamily="34" charset="-122"/>
+                <a:cs typeface="Yu Gothic UI Semibold" pitchFamily="34" charset="-120"/>
+              </a:rPr>
+              <a:t>今日の持ち帰り</a:t>
+            </a:r>
+            <a:endParaRPr lang="en-US" sz="2400" dirty="0"/>
+          </a:p>
+        </p:txBody>
+      </p:sp>
+      <p:sp>
+        <p:nvSpPr>
+          <p:cNvPr id="4" name="Text 2"/>
+          <p:cNvSpPr/>
+          <p:nvPr/>
+        </p:nvSpPr>
+        <p:spPr>
+          <a:xfrm>
+            <a:off x="411480" y="749808"/>
+            <a:ext cx="8412480" cy="365760"/>
+          </a:xfrm>
+          <a:prstGeom prst="rect">
+            <a:avLst/>
+          </a:prstGeom>
+          <a:noFill/>
+          <a:ln/>
+        </p:spPr>
+        <p:txBody>
+          <a:bodyPr wrap="square" rtlCol="0" anchor="ctr"/>
+          <a:lstStyle/>
+          <a:p>
+            <a:pPr indent="0" marL="0">
+              <a:buNone/>
+            </a:pPr>
+            <a:r>
+              <a:rPr lang="en-US" sz="1300" i="1" dirty="0">
+                <a:solidFill>
+                  <a:srgbClr val="555555"/>
+                </a:solidFill>
+                <a:latin typeface="Yu Gothic UI" pitchFamily="34" charset="0"/>
+                <a:ea typeface="Yu Gothic UI" pitchFamily="34" charset="-122"/>
+                <a:cs typeface="Yu Gothic UI" pitchFamily="34" charset="-120"/>
+              </a:rPr>
+              <a:t>ステップ② 完了 = 動くアプリが手に入りました</a:t>
+            </a:r>
+            <a:endParaRPr lang="en-US" sz="1300" dirty="0"/>
+          </a:p>
+        </p:txBody>
+      </p:sp>
+      <p:sp>
+        <p:nvSpPr>
+          <p:cNvPr id="5" name="Shape 3"/>
+          <p:cNvSpPr/>
+          <p:nvPr/>
+        </p:nvSpPr>
+        <p:spPr>
+          <a:xfrm>
+            <a:off x="411480" y="1234440"/>
+            <a:ext cx="8321040" cy="1097280"/>
+          </a:xfrm>
+          <a:prstGeom prst="roundRect">
+            <a:avLst>
+              <a:gd name="adj" fmla="val 6667"/>
+            </a:avLst>
+          </a:prstGeom>
+          <a:solidFill>
+            <a:srgbClr val="F4F6F9"/>
+          </a:solidFill>
+          <a:ln w="19050">
+            <a:solidFill>
+              <a:srgbClr val="0E7C86"/>
+            </a:solidFill>
+            <a:prstDash val="solid"/>
+          </a:ln>
+        </p:spPr>
+      </p:sp>
+      <p:sp>
+        <p:nvSpPr>
+          <p:cNvPr id="6" name="Shape 4"/>
+          <p:cNvSpPr/>
+          <p:nvPr/>
+        </p:nvSpPr>
+        <p:spPr>
+          <a:xfrm>
+            <a:off x="411480" y="1234440"/>
+            <a:ext cx="109728" cy="1097280"/>
+          </a:xfrm>
+          <a:prstGeom prst="rect">
+            <a:avLst/>
+          </a:prstGeom>
+          <a:solidFill>
+            <a:srgbClr val="0E7C86"/>
+          </a:solidFill>
+          <a:ln/>
+        </p:spPr>
+      </p:sp>
+      <p:sp>
+        <p:nvSpPr>
+          <p:cNvPr id="7" name="Text 5"/>
+          <p:cNvSpPr/>
+          <p:nvPr/>
+        </p:nvSpPr>
+        <p:spPr>
+          <a:xfrm>
+            <a:off x="685800" y="1344168"/>
+            <a:ext cx="8001000" cy="365760"/>
+          </a:xfrm>
+          <a:prstGeom prst="rect">
+            <a:avLst/>
+          </a:prstGeom>
+          <a:noFill/>
+          <a:ln/>
+        </p:spPr>
+        <p:txBody>
+          <a:bodyPr wrap="square" rtlCol="0" anchor="ctr"/>
+          <a:lstStyle/>
+          <a:p>
+            <a:pPr indent="0" marL="0">
+              <a:buNone/>
+            </a:pPr>
+            <a:r>
+              <a:rPr lang="en-US" sz="1600" b="1" dirty="0">
+                <a:solidFill>
+                  <a:srgbClr val="1F3A5F"/>
+                </a:solidFill>
+                <a:latin typeface="Yu Gothic UI Semibold" pitchFamily="34" charset="0"/>
+                <a:ea typeface="Yu Gothic UI Semibold" pitchFamily="34" charset="-122"/>
+                <a:cs typeface="Yu Gothic UI Semibold" pitchFamily="34" charset="-120"/>
+              </a:rPr>
+              <a:t>動くツールが完成</a:t>
+            </a:r>
+            <a:endParaRPr lang="en-US" sz="1600" dirty="0"/>
+          </a:p>
+        </p:txBody>
+      </p:sp>
+      <p:sp>
+        <p:nvSpPr>
+          <p:cNvPr id="8" name="Text 6"/>
+          <p:cNvSpPr/>
+          <p:nvPr/>
+        </p:nvSpPr>
+        <p:spPr>
+          <a:xfrm>
+            <a:off x="685800" y="1737360"/>
+            <a:ext cx="8001000" cy="502920"/>
+          </a:xfrm>
+          <a:prstGeom prst="rect">
+            <a:avLst/>
+          </a:prstGeom>
+          <a:noFill/>
+          <a:ln/>
+        </p:spPr>
+        <p:txBody>
+          <a:bodyPr wrap="square" rtlCol="0" anchor="t"/>
+          <a:lstStyle/>
+          <a:p>
+            <a:pPr indent="0" marL="0">
+              <a:buNone/>
+            </a:pPr>
+            <a:r>
+              <a:rPr lang="en-US" sz="1200" dirty="0">
+                <a:solidFill>
+                  <a:srgbClr val="1A1A1A"/>
+                </a:solidFill>
+                <a:latin typeface="Yu Gothic UI" pitchFamily="34" charset="0"/>
+                <a:ea typeface="Yu Gothic UI" pitchFamily="34" charset="-122"/>
+                <a:cs typeface="Yu Gothic UI" pitchFamily="34" charset="-120"/>
+              </a:rPr>
+              <a:t>30秒で 40年家計表と保険提案が出て、PDFで顧客に渡せる状態になりました。</a:t>
+            </a:r>
+            <a:endParaRPr lang="en-US" sz="1200" dirty="0"/>
+          </a:p>
+        </p:txBody>
+      </p:sp>
+      <p:sp>
+        <p:nvSpPr>
+          <p:cNvPr id="9" name="Shape 7"/>
+          <p:cNvSpPr/>
+          <p:nvPr/>
+        </p:nvSpPr>
+        <p:spPr>
+          <a:xfrm>
+            <a:off x="411480" y="2468880"/>
+            <a:ext cx="8321040" cy="1097280"/>
+          </a:xfrm>
+          <a:prstGeom prst="roundRect">
+            <a:avLst>
+              <a:gd name="adj" fmla="val 6667"/>
+            </a:avLst>
+          </a:prstGeom>
+          <a:solidFill>
+            <a:srgbClr val="F4F6F9"/>
+          </a:solidFill>
+          <a:ln w="19050">
+            <a:solidFill>
+              <a:srgbClr val="E8A33D"/>
+            </a:solidFill>
+            <a:prstDash val="solid"/>
+          </a:ln>
+        </p:spPr>
+      </p:sp>
+      <p:sp>
+        <p:nvSpPr>
+          <p:cNvPr id="10" name="Shape 8"/>
+          <p:cNvSpPr/>
+          <p:nvPr/>
+        </p:nvSpPr>
+        <p:spPr>
+          <a:xfrm>
+            <a:off x="411480" y="2468880"/>
+            <a:ext cx="109728" cy="1097280"/>
+          </a:xfrm>
+          <a:prstGeom prst="rect">
+            <a:avLst/>
+          </a:prstGeom>
+          <a:solidFill>
+            <a:srgbClr val="E8A33D"/>
+          </a:solidFill>
+          <a:ln/>
+        </p:spPr>
+      </p:sp>
+      <p:sp>
+        <p:nvSpPr>
+          <p:cNvPr id="11" name="Text 9"/>
+          <p:cNvSpPr/>
+          <p:nvPr/>
+        </p:nvSpPr>
+        <p:spPr>
+          <a:xfrm>
+            <a:off x="685800" y="2578608"/>
+            <a:ext cx="8001000" cy="365760"/>
+          </a:xfrm>
+          <a:prstGeom prst="rect">
+            <a:avLst/>
+          </a:prstGeom>
+          <a:noFill/>
+          <a:ln/>
+        </p:spPr>
+        <p:txBody>
+          <a:bodyPr wrap="square" rtlCol="0" anchor="ctr"/>
+          <a:lstStyle/>
+          <a:p>
+            <a:pPr indent="0" marL="0">
+              <a:buNone/>
+            </a:pPr>
+            <a:r>
+              <a:rPr lang="en-US" sz="1600" b="1" dirty="0">
+                <a:solidFill>
+                  <a:srgbClr val="1F3A5F"/>
+                </a:solidFill>
+                <a:latin typeface="Yu Gothic UI Semibold" pitchFamily="34" charset="0"/>
+                <a:ea typeface="Yu Gothic UI Semibold" pitchFamily="34" charset="-122"/>
+                <a:cs typeface="Yu Gothic UI Semibold" pitchFamily="34" charset="-120"/>
+              </a:rPr>
+              <a:t>バイブコーディングの体験</a:t>
+            </a:r>
+            <a:endParaRPr lang="en-US" sz="1600" dirty="0"/>
+          </a:p>
+        </p:txBody>
+      </p:sp>
+      <p:sp>
+        <p:nvSpPr>
+          <p:cNvPr id="12" name="Text 10"/>
+          <p:cNvSpPr/>
+          <p:nvPr/>
+        </p:nvSpPr>
+        <p:spPr>
+          <a:xfrm>
+            <a:off x="685800" y="2971800"/>
+            <a:ext cx="8001000" cy="502920"/>
+          </a:xfrm>
+          <a:prstGeom prst="rect">
+            <a:avLst/>
+          </a:prstGeom>
+          <a:noFill/>
+          <a:ln/>
+        </p:spPr>
+        <p:txBody>
+          <a:bodyPr wrap="square" rtlCol="0" anchor="t"/>
+          <a:lstStyle/>
+          <a:p>
+            <a:pPr indent="0" marL="0">
+              <a:buNone/>
+            </a:pPr>
+            <a:r>
+              <a:rPr lang="en-US" sz="1200" dirty="0">
+                <a:solidFill>
+                  <a:srgbClr val="1A1A1A"/>
+                </a:solidFill>
+                <a:latin typeface="Yu Gothic UI" pitchFamily="34" charset="0"/>
+                <a:ea typeface="Yu Gothic UI" pitchFamily="34" charset="-122"/>
+                <a:cs typeface="Yu Gothic UI" pitchFamily="34" charset="-120"/>
+              </a:rPr>
+              <a:t>「AIに頼んで貼付」でアプリが作れる、この作り方に慣れました。他業務にも応用できます。</a:t>
+            </a:r>
+            <a:endParaRPr lang="en-US" sz="1200" dirty="0"/>
+          </a:p>
+        </p:txBody>
+      </p:sp>
+      <p:sp>
+        <p:nvSpPr>
+          <p:cNvPr id="13" name="Shape 11"/>
+          <p:cNvSpPr/>
+          <p:nvPr/>
+        </p:nvSpPr>
+        <p:spPr>
+          <a:xfrm>
+            <a:off x="411480" y="3703320"/>
+            <a:ext cx="8321040" cy="1097280"/>
+          </a:xfrm>
+          <a:prstGeom prst="roundRect">
+            <a:avLst>
+              <a:gd name="adj" fmla="val 6667"/>
+            </a:avLst>
+          </a:prstGeom>
+          <a:solidFill>
+            <a:srgbClr val="F4F6F9"/>
+          </a:solidFill>
+          <a:ln w="19050">
+            <a:solidFill>
+              <a:srgbClr val="7C5F8A"/>
+            </a:solidFill>
+            <a:prstDash val="solid"/>
+          </a:ln>
+        </p:spPr>
+      </p:sp>
+      <p:sp>
+        <p:nvSpPr>
+          <p:cNvPr id="14" name="Shape 12"/>
+          <p:cNvSpPr/>
+          <p:nvPr/>
+        </p:nvSpPr>
+        <p:spPr>
+          <a:xfrm>
+            <a:off x="411480" y="3703320"/>
+            <a:ext cx="109728" cy="1097280"/>
+          </a:xfrm>
+          <a:prstGeom prst="rect">
+            <a:avLst/>
+          </a:prstGeom>
+          <a:solidFill>
+            <a:srgbClr val="7C5F8A"/>
+          </a:solidFill>
+          <a:ln/>
+        </p:spPr>
+      </p:sp>
+      <p:sp>
+        <p:nvSpPr>
+          <p:cNvPr id="15" name="Text 13"/>
+          <p:cNvSpPr/>
+          <p:nvPr/>
+        </p:nvSpPr>
+        <p:spPr>
+          <a:xfrm>
+            <a:off x="685800" y="3813048"/>
+            <a:ext cx="8001000" cy="365760"/>
+          </a:xfrm>
+          <a:prstGeom prst="rect">
+            <a:avLst/>
+          </a:prstGeom>
+          <a:noFill/>
+          <a:ln/>
+        </p:spPr>
+        <p:txBody>
+          <a:bodyPr wrap="square" rtlCol="0" anchor="ctr"/>
+          <a:lstStyle/>
+          <a:p>
+            <a:pPr indent="0" marL="0">
+              <a:buNone/>
+            </a:pPr>
+            <a:r>
+              <a:rPr lang="en-US" sz="1600" b="1" dirty="0">
+                <a:solidFill>
+                  <a:srgbClr val="1F3A5F"/>
+                </a:solidFill>
+                <a:latin typeface="Yu Gothic UI Semibold" pitchFamily="34" charset="0"/>
+                <a:ea typeface="Yu Gothic UI Semibold" pitchFamily="34" charset="-122"/>
+                <a:cs typeface="Yu Gothic UI Semibold" pitchFamily="34" charset="-120"/>
+              </a:rPr>
+              <a:t>次は「ステップ③ デプロイとテスト」</a:t>
+            </a:r>
+            <a:endParaRPr lang="en-US" sz="1600" dirty="0"/>
+          </a:p>
+        </p:txBody>
+      </p:sp>
+      <p:sp>
+        <p:nvSpPr>
+          <p:cNvPr id="16" name="Text 14"/>
+          <p:cNvSpPr/>
+          <p:nvPr/>
+        </p:nvSpPr>
+        <p:spPr>
+          <a:xfrm>
+            <a:off x="685800" y="4206240"/>
+            <a:ext cx="8001000" cy="502920"/>
+          </a:xfrm>
+          <a:prstGeom prst="rect">
+            <a:avLst/>
+          </a:prstGeom>
+          <a:noFill/>
+          <a:ln/>
+        </p:spPr>
+        <p:txBody>
+          <a:bodyPr wrap="square" rtlCol="0" anchor="t"/>
+          <a:lstStyle/>
+          <a:p>
+            <a:pPr indent="0" marL="0">
+              <a:buNone/>
+            </a:pPr>
+            <a:r>
+              <a:rPr lang="en-US" sz="1200" dirty="0">
+                <a:solidFill>
+                  <a:srgbClr val="1A1A1A"/>
+                </a:solidFill>
+                <a:latin typeface="Yu Gothic UI" pitchFamily="34" charset="0"/>
+                <a:ea typeface="Yu Gothic UI" pitchFamily="34" charset="-122"/>
+                <a:cs typeface="Yu Gothic UI" pitchFamily="34" charset="-120"/>
+              </a:rPr>
+              <a:t>動くアプリをチーム全員で使える形にして、5パターンでテストします。</a:t>
+            </a:r>
+            <a:endParaRPr lang="en-US" sz="1200" dirty="0"/>
           </a:p>
         </p:txBody>
       </p:sp>
@@ -1656,8 +2400,8 @@
         </p:nvSpPr>
         <p:spPr>
           <a:xfrm>
-            <a:off x="411480" y="201168"/>
-            <a:ext cx="8412480" cy="594360"/>
+            <a:off x="411480" y="182880"/>
+            <a:ext cx="8412480" cy="548640"/>
           </a:xfrm>
           <a:prstGeom prst="rect">
             <a:avLst/>
@@ -1673,7 +2417,7 @@
               <a:buNone/>
             </a:pPr>
             <a:r>
-              <a:rPr lang="en-US" sz="2600" b="1" dirty="0">
+              <a:rPr lang="en-US" sz="2400" b="1" dirty="0">
                 <a:solidFill>
                   <a:srgbClr val="1F3A5F"/>
                 </a:solidFill>
@@ -1681,34 +2425,73 @@
                 <a:ea typeface="Yu Gothic UI Semibold" pitchFamily="34" charset="-122"/>
                 <a:cs typeface="Yu Gothic UI Semibold" pitchFamily="34" charset="-120"/>
               </a:rPr>
-              <a:t>学習目標</a:t>
-            </a:r>
-            <a:endParaRPr lang="en-US" sz="2600" dirty="0"/>
-          </a:p>
-        </p:txBody>
-      </p:sp>
-      <p:sp>
-        <p:nvSpPr>
-          <p:cNvPr id="4" name="Shape 2"/>
+              <a:t>全体の道のり</a:t>
+            </a:r>
+            <a:endParaRPr lang="en-US" sz="2400" dirty="0"/>
+          </a:p>
+        </p:txBody>
+      </p:sp>
+      <p:sp>
+        <p:nvSpPr>
+          <p:cNvPr id="4" name="Text 2"/>
+          <p:cNvSpPr/>
+          <p:nvPr/>
+        </p:nvSpPr>
+        <p:spPr>
+          <a:xfrm>
+            <a:off x="411480" y="749808"/>
+            <a:ext cx="8412480" cy="365760"/>
+          </a:xfrm>
+          <a:prstGeom prst="rect">
+            <a:avLst/>
+          </a:prstGeom>
+          <a:noFill/>
+          <a:ln/>
+        </p:spPr>
+        <p:txBody>
+          <a:bodyPr wrap="square" rtlCol="0" anchor="ctr"/>
+          <a:lstStyle/>
+          <a:p>
+            <a:pPr indent="0" marL="0">
+              <a:buNone/>
+            </a:pPr>
+            <a:r>
+              <a:rPr lang="en-US" sz="1300" i="1" dirty="0">
+                <a:solidFill>
+                  <a:srgbClr val="555555"/>
+                </a:solidFill>
+                <a:latin typeface="Yu Gothic UI" pitchFamily="34" charset="0"/>
+                <a:ea typeface="Yu Gothic UI" pitchFamily="34" charset="-122"/>
+                <a:cs typeface="Yu Gothic UI" pitchFamily="34" charset="-120"/>
+              </a:rPr>
+              <a:t>3つのステップで、ライフプランAI を完成させます</a:t>
+            </a:r>
+            <a:endParaRPr lang="en-US" sz="1300" dirty="0"/>
+          </a:p>
+        </p:txBody>
+      </p:sp>
+      <p:sp>
+        <p:nvSpPr>
+          <p:cNvPr id="5" name="Shape 3"/>
           <p:cNvSpPr/>
           <p:nvPr/>
         </p:nvSpPr>
         <p:spPr>
           <a:xfrm>
             <a:off x="411480" y="1417320"/>
-            <a:ext cx="2651760" cy="2926080"/>
+            <a:ext cx="2590800" cy="2194560"/>
           </a:xfrm>
           <a:prstGeom prst="roundRect">
             <a:avLst>
-              <a:gd name="adj" fmla="val 3448"/>
+              <a:gd name="adj" fmla="val 5000"/>
             </a:avLst>
           </a:prstGeom>
           <a:solidFill>
             <a:srgbClr val="F4F6F9"/>
           </a:solidFill>
-          <a:ln w="19050">
+          <a:ln w="12700">
             <a:solidFill>
-              <a:srgbClr val="0E7C86"/>
+              <a:srgbClr val="D7DCE3"/>
             </a:solidFill>
             <a:prstDash val="solid"/>
           </a:ln>
@@ -1716,17 +2499,19 @@
       </p:sp>
       <p:sp>
         <p:nvSpPr>
-          <p:cNvPr id="5" name="Shape 3"/>
-          <p:cNvSpPr/>
-          <p:nvPr/>
-        </p:nvSpPr>
-        <p:spPr>
-          <a:xfrm>
-            <a:off x="502920" y="1417320"/>
-            <a:ext cx="2468880" cy="73152"/>
-          </a:xfrm>
-          <a:prstGeom prst="rect">
-            <a:avLst/>
+          <p:cNvPr id="6" name="Shape 4"/>
+          <p:cNvSpPr/>
+          <p:nvPr/>
+        </p:nvSpPr>
+        <p:spPr>
+          <a:xfrm>
+            <a:off x="731520" y="1737360"/>
+            <a:ext cx="1950720" cy="457200"/>
+          </a:xfrm>
+          <a:prstGeom prst="roundRect">
+            <a:avLst>
+              <a:gd name="adj" fmla="val 12000"/>
+            </a:avLst>
           </a:prstGeom>
           <a:solidFill>
             <a:srgbClr val="0E7C86"/>
@@ -1736,14 +2521,14 @@
       </p:sp>
       <p:sp>
         <p:nvSpPr>
-          <p:cNvPr id="6" name="Text 4"/>
-          <p:cNvSpPr/>
-          <p:nvPr/>
-        </p:nvSpPr>
-        <p:spPr>
-          <a:xfrm>
-            <a:off x="612648" y="1600200"/>
-            <a:ext cx="914400" cy="640080"/>
+          <p:cNvPr id="7" name="Text 5"/>
+          <p:cNvSpPr/>
+          <p:nvPr/>
+        </p:nvSpPr>
+        <p:spPr>
+          <a:xfrm>
+            <a:off x="731520" y="1737360"/>
+            <a:ext cx="1950720" cy="457200"/>
           </a:xfrm>
           <a:prstGeom prst="rect">
             <a:avLst/>
@@ -1755,58 +2540,58 @@
           <a:bodyPr wrap="square" rtlCol="0" anchor="ctr"/>
           <a:lstStyle/>
           <a:p>
-            <a:pPr indent="0" marL="0">
-              <a:buNone/>
-            </a:pPr>
-            <a:r>
-              <a:rPr lang="en-US" sz="3000" b="1" dirty="0">
-                <a:solidFill>
-                  <a:srgbClr val="0E7C86"/>
+            <a:pPr algn="ctr" indent="0" marL="0">
+              <a:buNone/>
+            </a:pPr>
+            <a:r>
+              <a:rPr lang="en-US" sz="1400" b="1" dirty="0">
+                <a:solidFill>
+                  <a:srgbClr val="FFFFFF"/>
                 </a:solidFill>
                 <a:latin typeface="Yu Gothic UI Semibold" pitchFamily="34" charset="0"/>
                 <a:ea typeface="Yu Gothic UI Semibold" pitchFamily="34" charset="-122"/>
                 <a:cs typeface="Yu Gothic UI Semibold" pitchFamily="34" charset="-120"/>
               </a:rPr>
-              <a:t>01</a:t>
-            </a:r>
-            <a:endParaRPr lang="en-US" sz="3000" dirty="0"/>
-          </a:p>
-        </p:txBody>
-      </p:sp>
-      <p:sp>
-        <p:nvSpPr>
-          <p:cNvPr id="7" name="Text 5"/>
-          <p:cNvSpPr/>
-          <p:nvPr/>
-        </p:nvSpPr>
-        <p:spPr>
-          <a:xfrm>
-            <a:off x="612648" y="2286000"/>
-            <a:ext cx="2249424" cy="640080"/>
-          </a:xfrm>
-          <a:prstGeom prst="rect">
-            <a:avLst/>
-          </a:prstGeom>
-          <a:noFill/>
-          <a:ln/>
-        </p:spPr>
-        <p:txBody>
-          <a:bodyPr wrap="square" rtlCol="0" anchor="t"/>
-          <a:lstStyle/>
-          <a:p>
-            <a:pPr indent="0" marL="0">
+              <a:t>ステップ①</a:t>
+            </a:r>
+            <a:endParaRPr lang="en-US" sz="1400" dirty="0"/>
+          </a:p>
+        </p:txBody>
+      </p:sp>
+      <p:sp>
+        <p:nvSpPr>
+          <p:cNvPr id="8" name="Text 6"/>
+          <p:cNvSpPr/>
+          <p:nvPr/>
+        </p:nvSpPr>
+        <p:spPr>
+          <a:xfrm>
+            <a:off x="576072" y="2331720"/>
+            <a:ext cx="2261616" cy="502920"/>
+          </a:xfrm>
+          <a:prstGeom prst="rect">
+            <a:avLst/>
+          </a:prstGeom>
+          <a:noFill/>
+          <a:ln/>
+        </p:spPr>
+        <p:txBody>
+          <a:bodyPr wrap="square" rtlCol="0" anchor="ctr"/>
+          <a:lstStyle/>
+          <a:p>
+            <a:pPr algn="ctr" indent="0" marL="0">
               <a:buNone/>
             </a:pPr>
             <a:r>
               <a:rPr lang="en-US" sz="1700" b="1" dirty="0">
                 <a:solidFill>
-                  <a:srgbClr val="1F3A5F"/>
+                  <a:srgbClr val="1A1A1A"/>
                 </a:solidFill>
                 <a:latin typeface="Yu Gothic UI Semibold" pitchFamily="34" charset="0"/>
                 <a:ea typeface="Yu Gothic UI Semibold" pitchFamily="34" charset="-122"/>
                 <a:cs typeface="Yu Gothic UI Semibold" pitchFamily="34" charset="-120"/>
               </a:rPr>
-              <a:t>GAS + Gemini の基本実装</a:t>
+              <a:t>設計書を作る</a:t>
             </a:r>
             <a:endParaRPr lang="en-US" sz="1700" dirty="0"/>
           </a:p>
@@ -1814,14 +2599,14 @@
       </p:sp>
       <p:sp>
         <p:nvSpPr>
-          <p:cNvPr id="8" name="Text 6"/>
-          <p:cNvSpPr/>
-          <p:nvPr/>
-        </p:nvSpPr>
-        <p:spPr>
-          <a:xfrm>
-            <a:off x="612648" y="3017520"/>
-            <a:ext cx="2249424" cy="1188720"/>
+          <p:cNvPr id="9" name="Text 7"/>
+          <p:cNvSpPr/>
+          <p:nvPr/>
+        </p:nvSpPr>
+        <p:spPr>
+          <a:xfrm>
+            <a:off x="576072" y="2880360"/>
+            <a:ext cx="2261616" cy="640080"/>
           </a:xfrm>
           <a:prstGeom prst="rect">
             <a:avLst/>
@@ -1833,44 +2618,83 @@
           <a:bodyPr wrap="square" rtlCol="0" anchor="t"/>
           <a:lstStyle/>
           <a:p>
-            <a:pPr indent="0" marL="0">
-              <a:buNone/>
-            </a:pPr>
-            <a:r>
-              <a:rPr lang="en-US" sz="1300" dirty="0">
-                <a:solidFill>
-                  <a:srgbClr val="1A1A1A"/>
+            <a:pPr algn="ctr" indent="0" marL="0">
+              <a:buNone/>
+            </a:pPr>
+            <a:r>
+              <a:rPr lang="en-US" sz="1200" dirty="0">
+                <a:solidFill>
+                  <a:srgbClr val="555555"/>
                 </a:solidFill>
                 <a:latin typeface="Yu Gothic UI" pitchFamily="34" charset="0"/>
                 <a:ea typeface="Yu Gothic UI" pitchFamily="34" charset="-122"/>
                 <a:cs typeface="Yu Gothic UI" pitchFamily="34" charset="-120"/>
               </a:rPr>
-              <a:t>顧客カルテ+前提テーブル読込 → Gemini呼出 → シート/Docs書出 の一連の流れを実装</a:t>
-            </a:r>
-            <a:endParaRPr lang="en-US" sz="1300" dirty="0"/>
-          </a:p>
-        </p:txBody>
-      </p:sp>
-      <p:sp>
-        <p:nvSpPr>
-          <p:cNvPr id="9" name="Shape 7"/>
-          <p:cNvSpPr/>
-          <p:nvPr/>
-        </p:nvSpPr>
-        <p:spPr>
-          <a:xfrm>
-            <a:off x="3246120" y="1417320"/>
-            <a:ext cx="2651760" cy="2926080"/>
+              <a:t>何を作るか、どう作るかを 全部決める</a:t>
+            </a:r>
+            <a:endParaRPr lang="en-US" sz="1200" dirty="0"/>
+          </a:p>
+        </p:txBody>
+      </p:sp>
+      <p:sp>
+        <p:nvSpPr>
+          <p:cNvPr id="10" name="Text 8"/>
+          <p:cNvSpPr/>
+          <p:nvPr/>
+        </p:nvSpPr>
+        <p:spPr>
+          <a:xfrm>
+            <a:off x="3020568" y="2331720"/>
+            <a:ext cx="228600" cy="365760"/>
+          </a:xfrm>
+          <a:prstGeom prst="rect">
+            <a:avLst/>
+          </a:prstGeom>
+          <a:noFill/>
+          <a:ln/>
+        </p:spPr>
+        <p:txBody>
+          <a:bodyPr wrap="square" rtlCol="0" anchor="ctr"/>
+          <a:lstStyle/>
+          <a:p>
+            <a:pPr algn="ctr" indent="0" marL="0">
+              <a:buNone/>
+            </a:pPr>
+            <a:r>
+              <a:rPr lang="en-US" sz="2200" b="1" dirty="0">
+                <a:solidFill>
+                  <a:srgbClr val="E8A33D"/>
+                </a:solidFill>
+                <a:latin typeface="Yu Gothic UI Semibold" pitchFamily="34" charset="0"/>
+                <a:ea typeface="Yu Gothic UI Semibold" pitchFamily="34" charset="-122"/>
+                <a:cs typeface="Yu Gothic UI Semibold" pitchFamily="34" charset="-120"/>
+              </a:rPr>
+              <a:t>▶</a:t>
+            </a:r>
+            <a:endParaRPr lang="en-US" sz="2200" dirty="0"/>
+          </a:p>
+        </p:txBody>
+      </p:sp>
+      <p:sp>
+        <p:nvSpPr>
+          <p:cNvPr id="11" name="Shape 9"/>
+          <p:cNvSpPr/>
+          <p:nvPr/>
+        </p:nvSpPr>
+        <p:spPr>
+          <a:xfrm>
+            <a:off x="3276600" y="1417320"/>
+            <a:ext cx="2590800" cy="2194560"/>
           </a:xfrm>
           <a:prstGeom prst="roundRect">
             <a:avLst>
-              <a:gd name="adj" fmla="val 3448"/>
+              <a:gd name="adj" fmla="val 5000"/>
             </a:avLst>
           </a:prstGeom>
           <a:solidFill>
-            <a:srgbClr val="F4F6F9"/>
-          </a:solidFill>
-          <a:ln w="19050">
+            <a:srgbClr val="0E7C86"/>
+          </a:solidFill>
+          <a:ln w="38100">
             <a:solidFill>
               <a:srgbClr val="E8A33D"/>
             </a:solidFill>
@@ -1880,17 +2704,19 @@
       </p:sp>
       <p:sp>
         <p:nvSpPr>
-          <p:cNvPr id="10" name="Shape 8"/>
-          <p:cNvSpPr/>
-          <p:nvPr/>
-        </p:nvSpPr>
-        <p:spPr>
-          <a:xfrm>
-            <a:off x="3337560" y="1417320"/>
-            <a:ext cx="2468880" cy="73152"/>
-          </a:xfrm>
-          <a:prstGeom prst="rect">
-            <a:avLst/>
+          <p:cNvPr id="12" name="Shape 10"/>
+          <p:cNvSpPr/>
+          <p:nvPr/>
+        </p:nvSpPr>
+        <p:spPr>
+          <a:xfrm>
+            <a:off x="3596640" y="1737360"/>
+            <a:ext cx="1950720" cy="457200"/>
+          </a:xfrm>
+          <a:prstGeom prst="roundRect">
+            <a:avLst>
+              <a:gd name="adj" fmla="val 12000"/>
+            </a:avLst>
           </a:prstGeom>
           <a:solidFill>
             <a:srgbClr val="E8A33D"/>
@@ -1900,14 +2726,14 @@
       </p:sp>
       <p:sp>
         <p:nvSpPr>
-          <p:cNvPr id="11" name="Text 9"/>
-          <p:cNvSpPr/>
-          <p:nvPr/>
-        </p:nvSpPr>
-        <p:spPr>
-          <a:xfrm>
-            <a:off x="3447288" y="1600200"/>
-            <a:ext cx="914400" cy="640080"/>
+          <p:cNvPr id="13" name="Text 11"/>
+          <p:cNvSpPr/>
+          <p:nvPr/>
+        </p:nvSpPr>
+        <p:spPr>
+          <a:xfrm>
+            <a:off x="3596640" y="1737360"/>
+            <a:ext cx="1950720" cy="457200"/>
           </a:xfrm>
           <a:prstGeom prst="rect">
             <a:avLst/>
@@ -1919,58 +2745,58 @@
           <a:bodyPr wrap="square" rtlCol="0" anchor="ctr"/>
           <a:lstStyle/>
           <a:p>
-            <a:pPr indent="0" marL="0">
-              <a:buNone/>
-            </a:pPr>
-            <a:r>
-              <a:rPr lang="en-US" sz="3000" b="1" dirty="0">
-                <a:solidFill>
-                  <a:srgbClr val="E8A33D"/>
+            <a:pPr algn="ctr" indent="0" marL="0">
+              <a:buNone/>
+            </a:pPr>
+            <a:r>
+              <a:rPr lang="en-US" sz="1400" b="1" dirty="0">
+                <a:solidFill>
+                  <a:srgbClr val="1F3A5F"/>
                 </a:solidFill>
                 <a:latin typeface="Yu Gothic UI Semibold" pitchFamily="34" charset="0"/>
                 <a:ea typeface="Yu Gothic UI Semibold" pitchFamily="34" charset="-122"/>
                 <a:cs typeface="Yu Gothic UI Semibold" pitchFamily="34" charset="-120"/>
               </a:rPr>
-              <a:t>02</a:t>
-            </a:r>
-            <a:endParaRPr lang="en-US" sz="3000" dirty="0"/>
-          </a:p>
-        </p:txBody>
-      </p:sp>
-      <p:sp>
-        <p:nvSpPr>
-          <p:cNvPr id="12" name="Text 10"/>
-          <p:cNvSpPr/>
-          <p:nvPr/>
-        </p:nvSpPr>
-        <p:spPr>
-          <a:xfrm>
-            <a:off x="3447288" y="2286000"/>
-            <a:ext cx="2249424" cy="640080"/>
-          </a:xfrm>
-          <a:prstGeom prst="rect">
-            <a:avLst/>
-          </a:prstGeom>
-          <a:noFill/>
-          <a:ln/>
-        </p:spPr>
-        <p:txBody>
-          <a:bodyPr wrap="square" rtlCol="0" anchor="t"/>
-          <a:lstStyle/>
-          <a:p>
-            <a:pPr indent="0" marL="0">
+              <a:t>ステップ②</a:t>
+            </a:r>
+            <a:endParaRPr lang="en-US" sz="1400" dirty="0"/>
+          </a:p>
+        </p:txBody>
+      </p:sp>
+      <p:sp>
+        <p:nvSpPr>
+          <p:cNvPr id="14" name="Text 12"/>
+          <p:cNvSpPr/>
+          <p:nvPr/>
+        </p:nvSpPr>
+        <p:spPr>
+          <a:xfrm>
+            <a:off x="3441192" y="2331720"/>
+            <a:ext cx="2261616" cy="502920"/>
+          </a:xfrm>
+          <a:prstGeom prst="rect">
+            <a:avLst/>
+          </a:prstGeom>
+          <a:noFill/>
+          <a:ln/>
+        </p:spPr>
+        <p:txBody>
+          <a:bodyPr wrap="square" rtlCol="0" anchor="ctr"/>
+          <a:lstStyle/>
+          <a:p>
+            <a:pPr algn="ctr" indent="0" marL="0">
               <a:buNone/>
             </a:pPr>
             <a:r>
               <a:rPr lang="en-US" sz="1700" b="1" dirty="0">
                 <a:solidFill>
-                  <a:srgbClr val="1F3A5F"/>
+                  <a:srgbClr val="FFFFFF"/>
                 </a:solidFill>
                 <a:latin typeface="Yu Gothic UI Semibold" pitchFamily="34" charset="0"/>
                 <a:ea typeface="Yu Gothic UI Semibold" pitchFamily="34" charset="-122"/>
                 <a:cs typeface="Yu Gothic UI Semibold" pitchFamily="34" charset="-120"/>
               </a:rPr>
-              <a:t>UI 実装 (W1で選んだもの)</a:t>
+              <a:t>バイブコーディング</a:t>
             </a:r>
             <a:endParaRPr lang="en-US" sz="1700" dirty="0"/>
           </a:p>
@@ -1978,14 +2804,14 @@
       </p:sp>
       <p:sp>
         <p:nvSpPr>
-          <p:cNvPr id="13" name="Text 11"/>
-          <p:cNvSpPr/>
-          <p:nvPr/>
-        </p:nvSpPr>
-        <p:spPr>
-          <a:xfrm>
-            <a:off x="3447288" y="3017520"/>
-            <a:ext cx="2249424" cy="1188720"/>
+          <p:cNvPr id="15" name="Text 13"/>
+          <p:cNvSpPr/>
+          <p:nvPr/>
+        </p:nvSpPr>
+        <p:spPr>
+          <a:xfrm>
+            <a:off x="3441192" y="2880360"/>
+            <a:ext cx="2261616" cy="640080"/>
           </a:xfrm>
           <a:prstGeom prst="rect">
             <a:avLst/>
@@ -1997,46 +2823,85 @@
           <a:bodyPr wrap="square" rtlCol="0" anchor="t"/>
           <a:lstStyle/>
           <a:p>
-            <a:pPr indent="0" marL="0">
-              <a:buNone/>
-            </a:pPr>
-            <a:r>
-              <a:rPr lang="en-US" sz="1300" dirty="0">
-                <a:solidFill>
-                  <a:srgbClr val="1A1A1A"/>
+            <a:pPr algn="ctr" indent="0" marL="0">
+              <a:buNone/>
+            </a:pPr>
+            <a:r>
+              <a:rPr lang="en-US" sz="1200" dirty="0">
+                <a:solidFill>
+                  <a:srgbClr val="FFFFFF"/>
                 </a:solidFill>
                 <a:latin typeface="Yu Gothic UI" pitchFamily="34" charset="0"/>
                 <a:ea typeface="Yu Gothic UI" pitchFamily="34" charset="-122"/>
                 <a:cs typeface="Yu Gothic UI" pitchFamily="34" charset="-120"/>
               </a:rPr>
-              <a:t>サイドバー or WebApp を HtmlService で実装、ボタン→サーバー関数呼出の仕組み</a:t>
-            </a:r>
-            <a:endParaRPr lang="en-US" sz="1300" dirty="0"/>
-          </a:p>
-        </p:txBody>
-      </p:sp>
-      <p:sp>
-        <p:nvSpPr>
-          <p:cNvPr id="14" name="Shape 12"/>
-          <p:cNvSpPr/>
-          <p:nvPr/>
-        </p:nvSpPr>
-        <p:spPr>
-          <a:xfrm>
-            <a:off x="6080760" y="1417320"/>
-            <a:ext cx="2651760" cy="2926080"/>
+              <a:t>AI に頼んで 動くアプリを作る</a:t>
+            </a:r>
+            <a:endParaRPr lang="en-US" sz="1200" dirty="0"/>
+          </a:p>
+        </p:txBody>
+      </p:sp>
+      <p:sp>
+        <p:nvSpPr>
+          <p:cNvPr id="16" name="Text 14"/>
+          <p:cNvSpPr/>
+          <p:nvPr/>
+        </p:nvSpPr>
+        <p:spPr>
+          <a:xfrm>
+            <a:off x="5885688" y="2331720"/>
+            <a:ext cx="228600" cy="365760"/>
+          </a:xfrm>
+          <a:prstGeom prst="rect">
+            <a:avLst/>
+          </a:prstGeom>
+          <a:noFill/>
+          <a:ln/>
+        </p:spPr>
+        <p:txBody>
+          <a:bodyPr wrap="square" rtlCol="0" anchor="ctr"/>
+          <a:lstStyle/>
+          <a:p>
+            <a:pPr algn="ctr" indent="0" marL="0">
+              <a:buNone/>
+            </a:pPr>
+            <a:r>
+              <a:rPr lang="en-US" sz="2200" b="1" dirty="0">
+                <a:solidFill>
+                  <a:srgbClr val="E8A33D"/>
+                </a:solidFill>
+                <a:latin typeface="Yu Gothic UI Semibold" pitchFamily="34" charset="0"/>
+                <a:ea typeface="Yu Gothic UI Semibold" pitchFamily="34" charset="-122"/>
+                <a:cs typeface="Yu Gothic UI Semibold" pitchFamily="34" charset="-120"/>
+              </a:rPr>
+              <a:t>▶</a:t>
+            </a:r>
+            <a:endParaRPr lang="en-US" sz="2200" dirty="0"/>
+          </a:p>
+        </p:txBody>
+      </p:sp>
+      <p:sp>
+        <p:nvSpPr>
+          <p:cNvPr id="17" name="Shape 15"/>
+          <p:cNvSpPr/>
+          <p:nvPr/>
+        </p:nvSpPr>
+        <p:spPr>
+          <a:xfrm>
+            <a:off x="6141720" y="1417320"/>
+            <a:ext cx="2590800" cy="2194560"/>
           </a:xfrm>
           <a:prstGeom prst="roundRect">
             <a:avLst>
-              <a:gd name="adj" fmla="val 3448"/>
+              <a:gd name="adj" fmla="val 5000"/>
             </a:avLst>
           </a:prstGeom>
           <a:solidFill>
             <a:srgbClr val="F4F6F9"/>
           </a:solidFill>
-          <a:ln w="19050">
+          <a:ln w="12700">
             <a:solidFill>
-              <a:srgbClr val="1F3A5F"/>
+              <a:srgbClr val="D7DCE3"/>
             </a:solidFill>
             <a:prstDash val="solid"/>
           </a:ln>
@@ -2044,34 +2909,36 @@
       </p:sp>
       <p:sp>
         <p:nvSpPr>
-          <p:cNvPr id="15" name="Shape 13"/>
-          <p:cNvSpPr/>
-          <p:nvPr/>
-        </p:nvSpPr>
-        <p:spPr>
-          <a:xfrm>
-            <a:off x="6172200" y="1417320"/>
-            <a:ext cx="2468880" cy="73152"/>
-          </a:xfrm>
-          <a:prstGeom prst="rect">
-            <a:avLst/>
-          </a:prstGeom>
-          <a:solidFill>
-            <a:srgbClr val="1F3A5F"/>
-          </a:solidFill>
-          <a:ln/>
-        </p:spPr>
-      </p:sp>
-      <p:sp>
-        <p:nvSpPr>
-          <p:cNvPr id="16" name="Text 14"/>
-          <p:cNvSpPr/>
-          <p:nvPr/>
-        </p:nvSpPr>
-        <p:spPr>
-          <a:xfrm>
-            <a:off x="6281928" y="1600200"/>
-            <a:ext cx="914400" cy="640080"/>
+          <p:cNvPr id="18" name="Shape 16"/>
+          <p:cNvSpPr/>
+          <p:nvPr/>
+        </p:nvSpPr>
+        <p:spPr>
+          <a:xfrm>
+            <a:off x="6461760" y="1737360"/>
+            <a:ext cx="1950720" cy="457200"/>
+          </a:xfrm>
+          <a:prstGeom prst="roundRect">
+            <a:avLst>
+              <a:gd name="adj" fmla="val 12000"/>
+            </a:avLst>
+          </a:prstGeom>
+          <a:solidFill>
+            <a:srgbClr val="0E7C86"/>
+          </a:solidFill>
+          <a:ln/>
+        </p:spPr>
+      </p:sp>
+      <p:sp>
+        <p:nvSpPr>
+          <p:cNvPr id="19" name="Text 17"/>
+          <p:cNvSpPr/>
+          <p:nvPr/>
+        </p:nvSpPr>
+        <p:spPr>
+          <a:xfrm>
+            <a:off x="6461760" y="1737360"/>
+            <a:ext cx="1950720" cy="457200"/>
           </a:xfrm>
           <a:prstGeom prst="rect">
             <a:avLst/>
@@ -2083,58 +2950,58 @@
           <a:bodyPr wrap="square" rtlCol="0" anchor="ctr"/>
           <a:lstStyle/>
           <a:p>
-            <a:pPr indent="0" marL="0">
-              <a:buNone/>
-            </a:pPr>
-            <a:r>
-              <a:rPr lang="en-US" sz="3000" b="1" dirty="0">
-                <a:solidFill>
-                  <a:srgbClr val="1F3A5F"/>
+            <a:pPr algn="ctr" indent="0" marL="0">
+              <a:buNone/>
+            </a:pPr>
+            <a:r>
+              <a:rPr lang="en-US" sz="1400" b="1" dirty="0">
+                <a:solidFill>
+                  <a:srgbClr val="FFFFFF"/>
                 </a:solidFill>
                 <a:latin typeface="Yu Gothic UI Semibold" pitchFamily="34" charset="0"/>
                 <a:ea typeface="Yu Gothic UI Semibold" pitchFamily="34" charset="-122"/>
                 <a:cs typeface="Yu Gothic UI Semibold" pitchFamily="34" charset="-120"/>
               </a:rPr>
-              <a:t>03</a:t>
-            </a:r>
-            <a:endParaRPr lang="en-US" sz="3000" dirty="0"/>
-          </a:p>
-        </p:txBody>
-      </p:sp>
-      <p:sp>
-        <p:nvSpPr>
-          <p:cNvPr id="17" name="Text 15"/>
-          <p:cNvSpPr/>
-          <p:nvPr/>
-        </p:nvSpPr>
-        <p:spPr>
-          <a:xfrm>
-            <a:off x="6281928" y="2286000"/>
-            <a:ext cx="2249424" cy="640080"/>
-          </a:xfrm>
-          <a:prstGeom prst="rect">
-            <a:avLst/>
-          </a:prstGeom>
-          <a:noFill/>
-          <a:ln/>
-        </p:spPr>
-        <p:txBody>
-          <a:bodyPr wrap="square" rtlCol="0" anchor="t"/>
-          <a:lstStyle/>
-          <a:p>
-            <a:pPr indent="0" marL="0">
+              <a:t>ステップ③</a:t>
+            </a:r>
+            <a:endParaRPr lang="en-US" sz="1400" dirty="0"/>
+          </a:p>
+        </p:txBody>
+      </p:sp>
+      <p:sp>
+        <p:nvSpPr>
+          <p:cNvPr id="20" name="Text 18"/>
+          <p:cNvSpPr/>
+          <p:nvPr/>
+        </p:nvSpPr>
+        <p:spPr>
+          <a:xfrm>
+            <a:off x="6306312" y="2331720"/>
+            <a:ext cx="2261616" cy="502920"/>
+          </a:xfrm>
+          <a:prstGeom prst="rect">
+            <a:avLst/>
+          </a:prstGeom>
+          <a:noFill/>
+          <a:ln/>
+        </p:spPr>
+        <p:txBody>
+          <a:bodyPr wrap="square" rtlCol="0" anchor="ctr"/>
+          <a:lstStyle/>
+          <a:p>
+            <a:pPr algn="ctr" indent="0" marL="0">
               <a:buNone/>
             </a:pPr>
             <a:r>
               <a:rPr lang="en-US" sz="1700" b="1" dirty="0">
                 <a:solidFill>
-                  <a:srgbClr val="1F3A5F"/>
+                  <a:srgbClr val="1A1A1A"/>
                 </a:solidFill>
                 <a:latin typeface="Yu Gothic UI Semibold" pitchFamily="34" charset="0"/>
                 <a:ea typeface="Yu Gothic UI Semibold" pitchFamily="34" charset="-122"/>
                 <a:cs typeface="Yu Gothic UI Semibold" pitchFamily="34" charset="-120"/>
               </a:rPr>
-              <a:t>独自アドバイスの組込み</a:t>
+              <a:t>デプロイとテスト</a:t>
             </a:r>
             <a:endParaRPr lang="en-US" sz="1700" dirty="0"/>
           </a:p>
@@ -2142,14 +3009,14 @@
       </p:sp>
       <p:sp>
         <p:nvSpPr>
-          <p:cNvPr id="18" name="Text 16"/>
-          <p:cNvSpPr/>
-          <p:nvPr/>
-        </p:nvSpPr>
-        <p:spPr>
-          <a:xfrm>
-            <a:off x="6281928" y="3017520"/>
-            <a:ext cx="2249424" cy="1188720"/>
+          <p:cNvPr id="21" name="Text 19"/>
+          <p:cNvSpPr/>
+          <p:nvPr/>
+        </p:nvSpPr>
+        <p:spPr>
+          <a:xfrm>
+            <a:off x="6306312" y="2880360"/>
+            <a:ext cx="2261616" cy="640080"/>
           </a:xfrm>
           <a:prstGeom prst="rect">
             <a:avLst/>
@@ -2161,21 +3028,82 @@
           <a:bodyPr wrap="square" rtlCol="0" anchor="t"/>
           <a:lstStyle/>
           <a:p>
-            <a:pPr indent="0" marL="0">
-              <a:buNone/>
-            </a:pPr>
-            <a:r>
-              <a:rPr lang="en-US" sz="1300" dirty="0">
-                <a:solidFill>
-                  <a:srgbClr val="1A1A1A"/>
+            <a:pPr algn="ctr" indent="0" marL="0">
+              <a:buNone/>
+            </a:pPr>
+            <a:r>
+              <a:rPr lang="en-US" sz="1200" dirty="0">
+                <a:solidFill>
+                  <a:srgbClr val="555555"/>
                 </a:solidFill>
                 <a:latin typeface="Yu Gothic UI" pitchFamily="34" charset="0"/>
                 <a:ea typeface="Yu Gothic UI" pitchFamily="34" charset="-122"/>
                 <a:cs typeface="Yu Gothic UI" pitchFamily="34" charset="-120"/>
               </a:rPr>
-              <a:t>W1 の独自アドバイスマスタを プロンプトに埋め込んで 代理店らしさを反映</a:t>
-            </a:r>
-            <a:endParaRPr lang="en-US" sz="1300" dirty="0"/>
+              <a:t>みんなが使える形にして 動作確認</a:t>
+            </a:r>
+            <a:endParaRPr lang="en-US" sz="1200" dirty="0"/>
+          </a:p>
+        </p:txBody>
+      </p:sp>
+      <p:sp>
+        <p:nvSpPr>
+          <p:cNvPr id="22" name="Shape 20"/>
+          <p:cNvSpPr/>
+          <p:nvPr/>
+        </p:nvSpPr>
+        <p:spPr>
+          <a:xfrm>
+            <a:off x="411480" y="3886200"/>
+            <a:ext cx="8321040" cy="502920"/>
+          </a:xfrm>
+          <a:prstGeom prst="roundRect">
+            <a:avLst>
+              <a:gd name="adj" fmla="val 14545"/>
+            </a:avLst>
+          </a:prstGeom>
+          <a:solidFill>
+            <a:srgbClr val="E8A33D"/>
+          </a:solidFill>
+          <a:ln/>
+        </p:spPr>
+      </p:sp>
+      <p:sp>
+        <p:nvSpPr>
+          <p:cNvPr id="23" name="Text 21"/>
+          <p:cNvSpPr/>
+          <p:nvPr/>
+        </p:nvSpPr>
+        <p:spPr>
+          <a:xfrm>
+            <a:off x="411480" y="3886200"/>
+            <a:ext cx="8321040" cy="502920"/>
+          </a:xfrm>
+          <a:prstGeom prst="rect">
+            <a:avLst/>
+          </a:prstGeom>
+          <a:noFill/>
+          <a:ln/>
+        </p:spPr>
+        <p:txBody>
+          <a:bodyPr wrap="square" rtlCol="0" anchor="ctr"/>
+          <a:lstStyle/>
+          <a:p>
+            <a:pPr algn="ctr" indent="0" marL="0">
+              <a:buNone/>
+            </a:pPr>
+            <a:r>
+              <a:rPr lang="en-US" sz="1400" b="1" dirty="0">
+                <a:solidFill>
+                  <a:srgbClr val="1F3A5F"/>
+                </a:solidFill>
+                <a:latin typeface="Yu Gothic UI Semibold" pitchFamily="34" charset="0"/>
+                <a:ea typeface="Yu Gothic UI Semibold" pitchFamily="34" charset="-122"/>
+                <a:cs typeface="Yu Gothic UI Semibold" pitchFamily="34" charset="-120"/>
+              </a:rPr>
+              <a:t>今日は「ステップ②」= バイブコーディング です</a:t>
+            </a:r>
+            <a:endParaRPr lang="en-US" sz="1400" dirty="0"/>
           </a:p>
         </p:txBody>
       </p:sp>
@@ -2239,8 +3167,8 @@
         </p:nvSpPr>
         <p:spPr>
           <a:xfrm>
-            <a:off x="411480" y="201168"/>
-            <a:ext cx="8412480" cy="594360"/>
+            <a:off x="411480" y="182880"/>
+            <a:ext cx="8412480" cy="548640"/>
           </a:xfrm>
           <a:prstGeom prst="rect">
             <a:avLst/>
@@ -2256,7 +3184,7 @@
               <a:buNone/>
             </a:pPr>
             <a:r>
-              <a:rPr lang="en-US" sz="2600" b="1" dirty="0">
+              <a:rPr lang="en-US" sz="2400" b="1" dirty="0">
                 <a:solidFill>
                   <a:srgbClr val="1F3A5F"/>
                 </a:solidFill>
@@ -2264,30 +3192,69 @@
                 <a:ea typeface="Yu Gothic UI Semibold" pitchFamily="34" charset="-122"/>
                 <a:cs typeface="Yu Gothic UI Semibold" pitchFamily="34" charset="-120"/>
               </a:rPr>
-              <a:t>STEP1: 抑えておきたい用語と仕様</a:t>
-            </a:r>
-            <a:endParaRPr lang="en-US" sz="2600" dirty="0"/>
-          </a:p>
-        </p:txBody>
-      </p:sp>
-      <p:sp>
-        <p:nvSpPr>
-          <p:cNvPr id="4" name="Shape 2"/>
-          <p:cNvSpPr/>
-          <p:nvPr/>
-        </p:nvSpPr>
-        <p:spPr>
-          <a:xfrm>
-            <a:off x="365760" y="1188720"/>
-            <a:ext cx="1979676" cy="3017520"/>
+              <a:t>今日のゴール ─ アプリを動かす</a:t>
+            </a:r>
+            <a:endParaRPr lang="en-US" sz="2400" dirty="0"/>
+          </a:p>
+        </p:txBody>
+      </p:sp>
+      <p:sp>
+        <p:nvSpPr>
+          <p:cNvPr id="4" name="Text 2"/>
+          <p:cNvSpPr/>
+          <p:nvPr/>
+        </p:nvSpPr>
+        <p:spPr>
+          <a:xfrm>
+            <a:off x="411480" y="749808"/>
+            <a:ext cx="8412480" cy="365760"/>
+          </a:xfrm>
+          <a:prstGeom prst="rect">
+            <a:avLst/>
+          </a:prstGeom>
+          <a:noFill/>
+          <a:ln/>
+        </p:spPr>
+        <p:txBody>
+          <a:bodyPr wrap="square" rtlCol="0" anchor="ctr"/>
+          <a:lstStyle/>
+          <a:p>
+            <a:pPr indent="0" marL="0">
+              <a:buNone/>
+            </a:pPr>
+            <a:r>
+              <a:rPr lang="en-US" sz="1300" i="1" dirty="0">
+                <a:solidFill>
+                  <a:srgbClr val="555555"/>
+                </a:solidFill>
+                <a:latin typeface="Yu Gothic UI" pitchFamily="34" charset="0"/>
+                <a:ea typeface="Yu Gothic UI" pitchFamily="34" charset="-122"/>
+                <a:cs typeface="Yu Gothic UI" pitchFamily="34" charset="-120"/>
+              </a:rPr>
+              <a:t>昨日の設計書を "動くもの" に変えます</a:t>
+            </a:r>
+            <a:endParaRPr lang="en-US" sz="1300" dirty="0"/>
+          </a:p>
+        </p:txBody>
+      </p:sp>
+      <p:sp>
+        <p:nvSpPr>
+          <p:cNvPr id="5" name="Shape 3"/>
+          <p:cNvSpPr/>
+          <p:nvPr/>
+        </p:nvSpPr>
+        <p:spPr>
+          <a:xfrm>
+            <a:off x="411480" y="1234440"/>
+            <a:ext cx="8321040" cy="1234440"/>
           </a:xfrm>
           <a:prstGeom prst="roundRect">
             <a:avLst>
-              <a:gd name="adj" fmla="val 4619"/>
+              <a:gd name="adj" fmla="val 5926"/>
             </a:avLst>
           </a:prstGeom>
           <a:solidFill>
-            <a:srgbClr val="FFFFFF"/>
+            <a:srgbClr val="F4F6F9"/>
           </a:solidFill>
           <a:ln w="19050">
             <a:solidFill>
@@ -2299,56 +3266,14 @@
       </p:sp>
       <p:sp>
         <p:nvSpPr>
-          <p:cNvPr id="5" name="Shape 3"/>
-          <p:cNvSpPr/>
-          <p:nvPr/>
-        </p:nvSpPr>
-        <p:spPr>
-          <a:xfrm>
-            <a:off x="365760" y="1188720"/>
-            <a:ext cx="1979676" cy="566928"/>
-          </a:xfrm>
-          <a:prstGeom prst="roundRect">
-            <a:avLst>
-              <a:gd name="adj" fmla="val 16129"/>
-            </a:avLst>
-          </a:prstGeom>
-          <a:solidFill>
-            <a:srgbClr val="0E7C86"/>
-          </a:solidFill>
-          <a:ln/>
-        </p:spPr>
-      </p:sp>
-      <p:sp>
-        <p:nvSpPr>
-          <p:cNvPr id="6" name="Shape 4"/>
-          <p:cNvSpPr/>
-          <p:nvPr/>
-        </p:nvSpPr>
-        <p:spPr>
-          <a:xfrm>
-            <a:off x="365760" y="1417320"/>
-            <a:ext cx="1979676" cy="338328"/>
-          </a:xfrm>
-          <a:prstGeom prst="rect">
-            <a:avLst/>
-          </a:prstGeom>
-          <a:solidFill>
-            <a:srgbClr val="0E7C86"/>
-          </a:solidFill>
-          <a:ln/>
-        </p:spPr>
-      </p:sp>
-      <p:sp>
-        <p:nvSpPr>
-          <p:cNvPr id="7" name="Text 5"/>
-          <p:cNvSpPr/>
-          <p:nvPr/>
-        </p:nvSpPr>
-        <p:spPr>
-          <a:xfrm>
-            <a:off x="493776" y="1280160"/>
-            <a:ext cx="1723644" cy="457200"/>
+          <p:cNvPr id="6" name="Text 4"/>
+          <p:cNvSpPr/>
+          <p:nvPr/>
+        </p:nvSpPr>
+        <p:spPr>
+          <a:xfrm>
+            <a:off x="594360" y="1325880"/>
+            <a:ext cx="7955280" cy="320040"/>
           </a:xfrm>
           <a:prstGeom prst="rect">
             <a:avLst/>
@@ -2364,15 +3289,54 @@
               <a:buNone/>
             </a:pPr>
             <a:r>
-              <a:rPr lang="en-US" sz="1600" b="1" dirty="0">
-                <a:solidFill>
-                  <a:srgbClr val="FFFFFF"/>
+              <a:rPr lang="en-US" sz="1400" b="1" dirty="0">
+                <a:solidFill>
+                  <a:srgbClr val="0E7C86"/>
                 </a:solidFill>
                 <a:latin typeface="Yu Gothic UI Semibold" pitchFamily="34" charset="0"/>
                 <a:ea typeface="Yu Gothic UI Semibold" pitchFamily="34" charset="-122"/>
                 <a:cs typeface="Yu Gothic UI Semibold" pitchFamily="34" charset="-120"/>
               </a:rPr>
-              <a:t>バイブコーディング</a:t>
+              <a:t>■ 作るもの</a:t>
+            </a:r>
+            <a:endParaRPr lang="en-US" sz="1400" dirty="0"/>
+          </a:p>
+        </p:txBody>
+      </p:sp>
+      <p:sp>
+        <p:nvSpPr>
+          <p:cNvPr id="7" name="Text 5"/>
+          <p:cNvSpPr/>
+          <p:nvPr/>
+        </p:nvSpPr>
+        <p:spPr>
+          <a:xfrm>
+            <a:off x="594360" y="1673352"/>
+            <a:ext cx="7955280" cy="731520"/>
+          </a:xfrm>
+          <a:prstGeom prst="rect">
+            <a:avLst/>
+          </a:prstGeom>
+          <a:noFill/>
+          <a:ln/>
+        </p:spPr>
+        <p:txBody>
+          <a:bodyPr wrap="square" rtlCol="0" anchor="t"/>
+          <a:lstStyle/>
+          <a:p>
+            <a:pPr indent="0" marL="0">
+              <a:buNone/>
+            </a:pPr>
+            <a:r>
+              <a:rPr lang="en-US" sz="1600" b="1" dirty="0">
+                <a:solidFill>
+                  <a:srgbClr val="1F3A5F"/>
+                </a:solidFill>
+                <a:latin typeface="Yu Gothic UI Semibold" pitchFamily="34" charset="0"/>
+                <a:ea typeface="Yu Gothic UI Semibold" pitchFamily="34" charset="-122"/>
+                <a:cs typeface="Yu Gothic UI Semibold" pitchFamily="34" charset="-120"/>
+              </a:rPr>
+              <a:t>「お客様情報を入れる → ボタンを押す → 30秒で結果が出る」を実現</a:t>
             </a:r>
             <a:endParaRPr lang="en-US" sz="1600" dirty="0"/>
           </a:p>
@@ -2380,14 +3344,100 @@
       </p:sp>
       <p:sp>
         <p:nvSpPr>
-          <p:cNvPr id="8" name="Text 6"/>
-          <p:cNvSpPr/>
-          <p:nvPr/>
-        </p:nvSpPr>
-        <p:spPr>
-          <a:xfrm>
-            <a:off x="530352" y="1938528"/>
-            <a:ext cx="1650492" cy="2148840"/>
+          <p:cNvPr id="8" name="Shape 6"/>
+          <p:cNvSpPr/>
+          <p:nvPr/>
+        </p:nvSpPr>
+        <p:spPr>
+          <a:xfrm>
+            <a:off x="411480" y="2651760"/>
+            <a:ext cx="2651760" cy="2011680"/>
+          </a:xfrm>
+          <a:prstGeom prst="roundRect">
+            <a:avLst>
+              <a:gd name="adj" fmla="val 3636"/>
+            </a:avLst>
+          </a:prstGeom>
+          <a:solidFill>
+            <a:srgbClr val="FFFFFF"/>
+          </a:solidFill>
+          <a:ln w="12700">
+            <a:solidFill>
+              <a:srgbClr val="D7DCE3"/>
+            </a:solidFill>
+            <a:prstDash val="solid"/>
+          </a:ln>
+        </p:spPr>
+      </p:sp>
+      <p:sp>
+        <p:nvSpPr>
+          <p:cNvPr id="9" name="Shape 7"/>
+          <p:cNvSpPr/>
+          <p:nvPr/>
+        </p:nvSpPr>
+        <p:spPr>
+          <a:xfrm>
+            <a:off x="411480" y="2651760"/>
+            <a:ext cx="2651760" cy="384048"/>
+          </a:xfrm>
+          <a:prstGeom prst="rect">
+            <a:avLst/>
+          </a:prstGeom>
+          <a:solidFill>
+            <a:srgbClr val="0E7C86"/>
+          </a:solidFill>
+          <a:ln/>
+        </p:spPr>
+      </p:sp>
+      <p:sp>
+        <p:nvSpPr>
+          <p:cNvPr id="10" name="Text 8"/>
+          <p:cNvSpPr/>
+          <p:nvPr/>
+        </p:nvSpPr>
+        <p:spPr>
+          <a:xfrm>
+            <a:off x="521208" y="2670048"/>
+            <a:ext cx="2432304" cy="347472"/>
+          </a:xfrm>
+          <a:prstGeom prst="rect">
+            <a:avLst/>
+          </a:prstGeom>
+          <a:noFill/>
+          <a:ln/>
+        </p:spPr>
+        <p:txBody>
+          <a:bodyPr wrap="square" rtlCol="0" anchor="ctr"/>
+          <a:lstStyle/>
+          <a:p>
+            <a:pPr indent="0" marL="0">
+              <a:buNone/>
+            </a:pPr>
+            <a:r>
+              <a:rPr lang="en-US" sz="1300" b="1" dirty="0">
+                <a:solidFill>
+                  <a:srgbClr val="FFFFFF"/>
+                </a:solidFill>
+                <a:latin typeface="Yu Gothic UI Semibold" pitchFamily="34" charset="0"/>
+                <a:ea typeface="Yu Gothic UI Semibold" pitchFamily="34" charset="-122"/>
+                <a:cs typeface="Yu Gothic UI Semibold" pitchFamily="34" charset="-120"/>
+              </a:rPr>
+              <a:t>💻  AIに書かせる</a:t>
+            </a:r>
+            <a:endParaRPr lang="en-US" sz="1300" dirty="0"/>
+          </a:p>
+        </p:txBody>
+      </p:sp>
+      <p:sp>
+        <p:nvSpPr>
+          <p:cNvPr id="11" name="Text 9"/>
+          <p:cNvSpPr/>
+          <p:nvPr/>
+        </p:nvSpPr>
+        <p:spPr>
+          <a:xfrm>
+            <a:off x="557784" y="3154680"/>
+            <a:ext cx="2359152" cy="1417320"/>
           </a:xfrm>
           <a:prstGeom prst="rect">
             <a:avLst/>
@@ -2401,12 +3451,12 @@
           <a:p>
             <a:pPr indent="0" marL="0">
               <a:spcAft>
-                <a:spcPts val="600"/>
+                <a:spcPts val="300"/>
               </a:spcAft>
               <a:buNone/>
             </a:pPr>
             <a:r>
-              <a:rPr lang="en-US" sz="1600" dirty="0">
+              <a:rPr lang="en-US" sz="1200" dirty="0">
                 <a:solidFill>
                   <a:srgbClr val="1A1A1A"/>
                 </a:solidFill>
@@ -2414,34 +3464,34 @@
                 <a:ea typeface="Yu Gothic UI" pitchFamily="34" charset="-122"/>
                 <a:cs typeface="Yu Gothic UI" pitchFamily="34" charset="-120"/>
               </a:rPr>
-              <a:t>Gemini に "こういうの作って" と依頼して 返ってきたコードをコピペして動かす作り方。</a:t>
-            </a:r>
-            <a:endParaRPr lang="en-US" sz="1600" dirty="0"/>
-          </a:p>
-        </p:txBody>
-      </p:sp>
-      <p:sp>
-        <p:nvSpPr>
-          <p:cNvPr id="9" name="Shape 7"/>
-          <p:cNvSpPr/>
-          <p:nvPr/>
-        </p:nvSpPr>
-        <p:spPr>
-          <a:xfrm>
-            <a:off x="2510028" y="1188720"/>
-            <a:ext cx="1979676" cy="3017520"/>
+              <a:t>設計書をAIに渡して「この通りに GAS書いて」と依頼。返ってきたコードを貼付ける。</a:t>
+            </a:r>
+            <a:endParaRPr lang="en-US" sz="1200" dirty="0"/>
+          </a:p>
+        </p:txBody>
+      </p:sp>
+      <p:sp>
+        <p:nvSpPr>
+          <p:cNvPr id="12" name="Shape 10"/>
+          <p:cNvSpPr/>
+          <p:nvPr/>
+        </p:nvSpPr>
+        <p:spPr>
+          <a:xfrm>
+            <a:off x="3246120" y="2651760"/>
+            <a:ext cx="2651760" cy="2011680"/>
           </a:xfrm>
           <a:prstGeom prst="roundRect">
             <a:avLst>
-              <a:gd name="adj" fmla="val 4619"/>
+              <a:gd name="adj" fmla="val 3636"/>
             </a:avLst>
           </a:prstGeom>
           <a:solidFill>
             <a:srgbClr val="FFFFFF"/>
           </a:solidFill>
-          <a:ln w="19050">
+          <a:ln w="12700">
             <a:solidFill>
-              <a:srgbClr val="E8A33D"/>
+              <a:srgbClr val="D7DCE3"/>
             </a:solidFill>
             <a:prstDash val="solid"/>
           </a:ln>
@@ -2449,19 +3499,17 @@
       </p:sp>
       <p:sp>
         <p:nvSpPr>
-          <p:cNvPr id="10" name="Shape 8"/>
-          <p:cNvSpPr/>
-          <p:nvPr/>
-        </p:nvSpPr>
-        <p:spPr>
-          <a:xfrm>
-            <a:off x="2510028" y="1188720"/>
-            <a:ext cx="1979676" cy="566928"/>
-          </a:xfrm>
-          <a:prstGeom prst="roundRect">
-            <a:avLst>
-              <a:gd name="adj" fmla="val 16129"/>
-            </a:avLst>
+          <p:cNvPr id="13" name="Shape 11"/>
+          <p:cNvSpPr/>
+          <p:nvPr/>
+        </p:nvSpPr>
+        <p:spPr>
+          <a:xfrm>
+            <a:off x="3246120" y="2651760"/>
+            <a:ext cx="2651760" cy="384048"/>
+          </a:xfrm>
+          <a:prstGeom prst="rect">
+            <a:avLst/>
           </a:prstGeom>
           <a:solidFill>
             <a:srgbClr val="E8A33D"/>
@@ -2471,34 +3519,14 @@
       </p:sp>
       <p:sp>
         <p:nvSpPr>
-          <p:cNvPr id="11" name="Shape 9"/>
-          <p:cNvSpPr/>
-          <p:nvPr/>
-        </p:nvSpPr>
-        <p:spPr>
-          <a:xfrm>
-            <a:off x="2510028" y="1417320"/>
-            <a:ext cx="1979676" cy="338328"/>
-          </a:xfrm>
-          <a:prstGeom prst="rect">
-            <a:avLst/>
-          </a:prstGeom>
-          <a:solidFill>
-            <a:srgbClr val="E8A33D"/>
-          </a:solidFill>
-          <a:ln/>
-        </p:spPr>
-      </p:sp>
-      <p:sp>
-        <p:nvSpPr>
-          <p:cNvPr id="12" name="Text 10"/>
-          <p:cNvSpPr/>
-          <p:nvPr/>
-        </p:nvSpPr>
-        <p:spPr>
-          <a:xfrm>
-            <a:off x="2638044" y="1280160"/>
-            <a:ext cx="1723644" cy="457200"/>
+          <p:cNvPr id="14" name="Text 12"/>
+          <p:cNvSpPr/>
+          <p:nvPr/>
+        </p:nvSpPr>
+        <p:spPr>
+          <a:xfrm>
+            <a:off x="3355848" y="2670048"/>
+            <a:ext cx="2432304" cy="347472"/>
           </a:xfrm>
           <a:prstGeom prst="rect">
             <a:avLst/>
@@ -2514,7 +3542,7 @@
               <a:buNone/>
             </a:pPr>
             <a:r>
-              <a:rPr lang="en-US" sz="1600" b="1" dirty="0">
+              <a:rPr lang="en-US" sz="1300" b="1" dirty="0">
                 <a:solidFill>
                   <a:srgbClr val="FFFFFF"/>
                 </a:solidFill>
@@ -2522,22 +3550,22 @@
                 <a:ea typeface="Yu Gothic UI Semibold" pitchFamily="34" charset="-122"/>
                 <a:cs typeface="Yu Gothic UI Semibold" pitchFamily="34" charset="-120"/>
               </a:rPr>
-              <a:t>HtmlService</a:t>
-            </a:r>
-            <a:endParaRPr lang="en-US" sz="1600" dirty="0"/>
-          </a:p>
-        </p:txBody>
-      </p:sp>
-      <p:sp>
-        <p:nvSpPr>
-          <p:cNvPr id="13" name="Text 11"/>
-          <p:cNvSpPr/>
-          <p:nvPr/>
-        </p:nvSpPr>
-        <p:spPr>
-          <a:xfrm>
-            <a:off x="2674620" y="1938528"/>
-            <a:ext cx="1650492" cy="2148840"/>
+              <a:t>▶️  動かして確認</a:t>
+            </a:r>
+            <a:endParaRPr lang="en-US" sz="1300" dirty="0"/>
+          </a:p>
+        </p:txBody>
+      </p:sp>
+      <p:sp>
+        <p:nvSpPr>
+          <p:cNvPr id="15" name="Text 13"/>
+          <p:cNvSpPr/>
+          <p:nvPr/>
+        </p:nvSpPr>
+        <p:spPr>
+          <a:xfrm>
+            <a:off x="3392424" y="3154680"/>
+            <a:ext cx="2359152" cy="1417320"/>
           </a:xfrm>
           <a:prstGeom prst="rect">
             <a:avLst/>
@@ -2551,12 +3579,12 @@
           <a:p>
             <a:pPr indent="0" marL="0">
               <a:spcAft>
-                <a:spcPts val="600"/>
+                <a:spcPts val="300"/>
               </a:spcAft>
               <a:buNone/>
             </a:pPr>
             <a:r>
-              <a:rPr lang="en-US" sz="1600" dirty="0">
+              <a:rPr lang="en-US" sz="1200" dirty="0">
                 <a:solidFill>
                   <a:srgbClr val="1A1A1A"/>
                 </a:solidFill>
@@ -2564,16 +3592,127 @@
                 <a:ea typeface="Yu Gothic UI" pitchFamily="34" charset="-122"/>
                 <a:cs typeface="Yu Gothic UI" pitchFamily="34" charset="-120"/>
               </a:rPr>
-              <a:t>GAS で HTMLファイルを扱う仕組み。</a:t>
-            </a:r>
+              <a:t>ボタン1つで シミュレーションが走り、40年家計表と保険提案が返る。</a:t>
+            </a:r>
+            <a:endParaRPr lang="en-US" sz="1200" dirty="0"/>
+          </a:p>
+        </p:txBody>
+      </p:sp>
+      <p:sp>
+        <p:nvSpPr>
+          <p:cNvPr id="16" name="Shape 14"/>
+          <p:cNvSpPr/>
+          <p:nvPr/>
+        </p:nvSpPr>
+        <p:spPr>
+          <a:xfrm>
+            <a:off x="6080760" y="2651760"/>
+            <a:ext cx="2651760" cy="2011680"/>
+          </a:xfrm>
+          <a:prstGeom prst="roundRect">
+            <a:avLst>
+              <a:gd name="adj" fmla="val 3636"/>
+            </a:avLst>
+          </a:prstGeom>
+          <a:solidFill>
+            <a:srgbClr val="FFFFFF"/>
+          </a:solidFill>
+          <a:ln w="12700">
+            <a:solidFill>
+              <a:srgbClr val="D7DCE3"/>
+            </a:solidFill>
+            <a:prstDash val="solid"/>
+          </a:ln>
+        </p:spPr>
+      </p:sp>
+      <p:sp>
+        <p:nvSpPr>
+          <p:cNvPr id="17" name="Shape 15"/>
+          <p:cNvSpPr/>
+          <p:nvPr/>
+        </p:nvSpPr>
+        <p:spPr>
+          <a:xfrm>
+            <a:off x="6080760" y="2651760"/>
+            <a:ext cx="2651760" cy="384048"/>
+          </a:xfrm>
+          <a:prstGeom prst="rect">
+            <a:avLst/>
+          </a:prstGeom>
+          <a:solidFill>
+            <a:srgbClr val="7C5F8A"/>
+          </a:solidFill>
+          <a:ln/>
+        </p:spPr>
+      </p:sp>
+      <p:sp>
+        <p:nvSpPr>
+          <p:cNvPr id="18" name="Text 16"/>
+          <p:cNvSpPr/>
+          <p:nvPr/>
+        </p:nvSpPr>
+        <p:spPr>
+          <a:xfrm>
+            <a:off x="6190488" y="2670048"/>
+            <a:ext cx="2432304" cy="347472"/>
+          </a:xfrm>
+          <a:prstGeom prst="rect">
+            <a:avLst/>
+          </a:prstGeom>
+          <a:noFill/>
+          <a:ln/>
+        </p:spPr>
+        <p:txBody>
+          <a:bodyPr wrap="square" rtlCol="0" anchor="ctr"/>
+          <a:lstStyle/>
+          <a:p>
+            <a:pPr indent="0" marL="0">
+              <a:buNone/>
+            </a:pPr>
+            <a:r>
+              <a:rPr lang="en-US" sz="1300" b="1" dirty="0">
+                <a:solidFill>
+                  <a:srgbClr val="FFFFFF"/>
+                </a:solidFill>
+                <a:latin typeface="Yu Gothic UI Semibold" pitchFamily="34" charset="0"/>
+                <a:ea typeface="Yu Gothic UI Semibold" pitchFamily="34" charset="-122"/>
+                <a:cs typeface="Yu Gothic UI Semibold" pitchFamily="34" charset="-120"/>
+              </a:rPr>
+              <a:t>📄  PDFレポートも自動</a:t>
+            </a:r>
+            <a:endParaRPr lang="en-US" sz="1300" dirty="0"/>
+          </a:p>
+        </p:txBody>
+      </p:sp>
+      <p:sp>
+        <p:nvSpPr>
+          <p:cNvPr id="19" name="Text 17"/>
+          <p:cNvSpPr/>
+          <p:nvPr/>
+        </p:nvSpPr>
+        <p:spPr>
+          <a:xfrm>
+            <a:off x="6227064" y="3154680"/>
+            <a:ext cx="2359152" cy="1417320"/>
+          </a:xfrm>
+          <a:prstGeom prst="rect">
+            <a:avLst/>
+          </a:prstGeom>
+          <a:noFill/>
+          <a:ln/>
+        </p:spPr>
+        <p:txBody>
+          <a:bodyPr wrap="square" rtlCol="0" anchor="t"/>
+          <a:lstStyle/>
+          <a:p>
             <a:pPr indent="0" marL="0">
               <a:spcAft>
-                <a:spcPts val="600"/>
+                <a:spcPts val="300"/>
               </a:spcAft>
               <a:buNone/>
             </a:pPr>
             <a:r>
-              <a:rPr lang="en-US" sz="1600" dirty="0">
+              <a:rPr lang="en-US" sz="1200" dirty="0">
                 <a:solidFill>
                   <a:srgbClr val="1A1A1A"/>
                 </a:solidFill>
@@ -2581,519 +3720,9 @@
                 <a:ea typeface="Yu Gothic UI" pitchFamily="34" charset="-122"/>
                 <a:cs typeface="Yu Gothic UI" pitchFamily="34" charset="-120"/>
               </a:rPr>
-              <a:t>サイドバー・WebApp・ダイアログ の生成に使う。</a:t>
-            </a:r>
-            <a:endParaRPr lang="en-US" sz="1600" dirty="0"/>
-          </a:p>
-        </p:txBody>
-      </p:sp>
-      <p:sp>
-        <p:nvSpPr>
-          <p:cNvPr id="14" name="Shape 12"/>
-          <p:cNvSpPr/>
-          <p:nvPr/>
-        </p:nvSpPr>
-        <p:spPr>
-          <a:xfrm>
-            <a:off x="4654296" y="1188720"/>
-            <a:ext cx="1979676" cy="3017520"/>
-          </a:xfrm>
-          <a:prstGeom prst="roundRect">
-            <a:avLst>
-              <a:gd name="adj" fmla="val 4619"/>
-            </a:avLst>
-          </a:prstGeom>
-          <a:solidFill>
-            <a:srgbClr val="FFFFFF"/>
-          </a:solidFill>
-          <a:ln w="19050">
-            <a:solidFill>
-              <a:srgbClr val="1F3A5F"/>
-            </a:solidFill>
-            <a:prstDash val="solid"/>
-          </a:ln>
-        </p:spPr>
-      </p:sp>
-      <p:sp>
-        <p:nvSpPr>
-          <p:cNvPr id="15" name="Shape 13"/>
-          <p:cNvSpPr/>
-          <p:nvPr/>
-        </p:nvSpPr>
-        <p:spPr>
-          <a:xfrm>
-            <a:off x="4654296" y="1188720"/>
-            <a:ext cx="1979676" cy="566928"/>
-          </a:xfrm>
-          <a:prstGeom prst="roundRect">
-            <a:avLst>
-              <a:gd name="adj" fmla="val 16129"/>
-            </a:avLst>
-          </a:prstGeom>
-          <a:solidFill>
-            <a:srgbClr val="1F3A5F"/>
-          </a:solidFill>
-          <a:ln/>
-        </p:spPr>
-      </p:sp>
-      <p:sp>
-        <p:nvSpPr>
-          <p:cNvPr id="16" name="Shape 14"/>
-          <p:cNvSpPr/>
-          <p:nvPr/>
-        </p:nvSpPr>
-        <p:spPr>
-          <a:xfrm>
-            <a:off x="4654296" y="1417320"/>
-            <a:ext cx="1979676" cy="338328"/>
-          </a:xfrm>
-          <a:prstGeom prst="rect">
-            <a:avLst/>
-          </a:prstGeom>
-          <a:solidFill>
-            <a:srgbClr val="1F3A5F"/>
-          </a:solidFill>
-          <a:ln/>
-        </p:spPr>
-      </p:sp>
-      <p:sp>
-        <p:nvSpPr>
-          <p:cNvPr id="17" name="Text 15"/>
-          <p:cNvSpPr/>
-          <p:nvPr/>
-        </p:nvSpPr>
-        <p:spPr>
-          <a:xfrm>
-            <a:off x="4782312" y="1280160"/>
-            <a:ext cx="1723644" cy="457200"/>
-          </a:xfrm>
-          <a:prstGeom prst="rect">
-            <a:avLst/>
-          </a:prstGeom>
-          <a:noFill/>
-          <a:ln/>
-        </p:spPr>
-        <p:txBody>
-          <a:bodyPr wrap="square" rtlCol="0" anchor="ctr"/>
-          <a:lstStyle/>
-          <a:p>
-            <a:pPr indent="0" marL="0">
-              <a:buNone/>
-            </a:pPr>
-            <a:r>
-              <a:rPr lang="en-US" sz="1600" b="1" dirty="0">
-                <a:solidFill>
-                  <a:srgbClr val="FFFFFF"/>
-                </a:solidFill>
-                <a:latin typeface="Yu Gothic UI Semibold" pitchFamily="34" charset="0"/>
-                <a:ea typeface="Yu Gothic UI Semibold" pitchFamily="34" charset="-122"/>
-                <a:cs typeface="Yu Gothic UI Semibold" pitchFamily="34" charset="-120"/>
-              </a:rPr>
-              <a:t>responseSchema</a:t>
-            </a:r>
-            <a:endParaRPr lang="en-US" sz="1600" dirty="0"/>
-          </a:p>
-        </p:txBody>
-      </p:sp>
-      <p:sp>
-        <p:nvSpPr>
-          <p:cNvPr id="18" name="Text 16"/>
-          <p:cNvSpPr/>
-          <p:nvPr/>
-        </p:nvSpPr>
-        <p:spPr>
-          <a:xfrm>
-            <a:off x="4818888" y="1938528"/>
-            <a:ext cx="1650492" cy="2148840"/>
-          </a:xfrm>
-          <a:prstGeom prst="rect">
-            <a:avLst/>
-          </a:prstGeom>
-          <a:noFill/>
-          <a:ln/>
-        </p:spPr>
-        <p:txBody>
-          <a:bodyPr wrap="square" rtlCol="0" anchor="t"/>
-          <a:lstStyle/>
-          <a:p>
-            <a:pPr indent="0" marL="0">
-              <a:spcAft>
-                <a:spcPts val="600"/>
-              </a:spcAft>
-              <a:buNone/>
-            </a:pPr>
-            <a:r>
-              <a:rPr lang="en-US" sz="1600" dirty="0">
-                <a:solidFill>
-                  <a:srgbClr val="1A1A1A"/>
-                </a:solidFill>
-                <a:latin typeface="Yu Gothic UI" pitchFamily="34" charset="0"/>
-                <a:ea typeface="Yu Gothic UI" pitchFamily="34" charset="-122"/>
-                <a:cs typeface="Yu Gothic UI" pitchFamily="34" charset="-120"/>
-              </a:rPr>
-              <a:t>Gemini API に "この JSON 構造で返して" と厳密指定する仕組み。</a:t>
-            </a:r>
-            <a:endParaRPr lang="en-US" sz="1600" dirty="0"/>
-          </a:p>
-        </p:txBody>
-      </p:sp>
-      <p:sp>
-        <p:nvSpPr>
-          <p:cNvPr id="19" name="Shape 17"/>
-          <p:cNvSpPr/>
-          <p:nvPr/>
-        </p:nvSpPr>
-        <p:spPr>
-          <a:xfrm>
-            <a:off x="6798564" y="1188720"/>
-            <a:ext cx="1979676" cy="3017520"/>
-          </a:xfrm>
-          <a:prstGeom prst="roundRect">
-            <a:avLst>
-              <a:gd name="adj" fmla="val 4619"/>
-            </a:avLst>
-          </a:prstGeom>
-          <a:solidFill>
-            <a:srgbClr val="FFFFFF"/>
-          </a:solidFill>
-          <a:ln w="19050">
-            <a:solidFill>
-              <a:srgbClr val="7C5F8A"/>
-            </a:solidFill>
-            <a:prstDash val="solid"/>
-          </a:ln>
-        </p:spPr>
-      </p:sp>
-      <p:sp>
-        <p:nvSpPr>
-          <p:cNvPr id="20" name="Shape 18"/>
-          <p:cNvSpPr/>
-          <p:nvPr/>
-        </p:nvSpPr>
-        <p:spPr>
-          <a:xfrm>
-            <a:off x="6798564" y="1188720"/>
-            <a:ext cx="1979676" cy="566928"/>
-          </a:xfrm>
-          <a:prstGeom prst="roundRect">
-            <a:avLst>
-              <a:gd name="adj" fmla="val 16129"/>
-            </a:avLst>
-          </a:prstGeom>
-          <a:solidFill>
-            <a:srgbClr val="7C5F8A"/>
-          </a:solidFill>
-          <a:ln/>
-        </p:spPr>
-      </p:sp>
-      <p:sp>
-        <p:nvSpPr>
-          <p:cNvPr id="21" name="Shape 19"/>
-          <p:cNvSpPr/>
-          <p:nvPr/>
-        </p:nvSpPr>
-        <p:spPr>
-          <a:xfrm>
-            <a:off x="6798564" y="1417320"/>
-            <a:ext cx="1979676" cy="338328"/>
-          </a:xfrm>
-          <a:prstGeom prst="rect">
-            <a:avLst/>
-          </a:prstGeom>
-          <a:solidFill>
-            <a:srgbClr val="7C5F8A"/>
-          </a:solidFill>
-          <a:ln/>
-        </p:spPr>
-      </p:sp>
-      <p:sp>
-        <p:nvSpPr>
-          <p:cNvPr id="22" name="Text 20"/>
-          <p:cNvSpPr/>
-          <p:nvPr/>
-        </p:nvSpPr>
-        <p:spPr>
-          <a:xfrm>
-            <a:off x="6926580" y="1280160"/>
-            <a:ext cx="1723644" cy="457200"/>
-          </a:xfrm>
-          <a:prstGeom prst="rect">
-            <a:avLst/>
-          </a:prstGeom>
-          <a:noFill/>
-          <a:ln/>
-        </p:spPr>
-        <p:txBody>
-          <a:bodyPr wrap="square" rtlCol="0" anchor="ctr"/>
-          <a:lstStyle/>
-          <a:p>
-            <a:pPr indent="0" marL="0">
-              <a:buNone/>
-            </a:pPr>
-            <a:r>
-              <a:rPr lang="en-US" sz="1600" b="1" dirty="0">
-                <a:solidFill>
-                  <a:srgbClr val="FFFFFF"/>
-                </a:solidFill>
-                <a:latin typeface="Yu Gothic UI Semibold" pitchFamily="34" charset="0"/>
-                <a:ea typeface="Yu Gothic UI Semibold" pitchFamily="34" charset="-122"/>
-                <a:cs typeface="Yu Gothic UI Semibold" pitchFamily="34" charset="-120"/>
-              </a:rPr>
-              <a:t>DocumentApp</a:t>
-            </a:r>
-            <a:endParaRPr lang="en-US" sz="1600" dirty="0"/>
-          </a:p>
-        </p:txBody>
-      </p:sp>
-      <p:sp>
-        <p:nvSpPr>
-          <p:cNvPr id="23" name="Text 21"/>
-          <p:cNvSpPr/>
-          <p:nvPr/>
-        </p:nvSpPr>
-        <p:spPr>
-          <a:xfrm>
-            <a:off x="6963156" y="1938528"/>
-            <a:ext cx="1650492" cy="2148840"/>
-          </a:xfrm>
-          <a:prstGeom prst="rect">
-            <a:avLst/>
-          </a:prstGeom>
-          <a:noFill/>
-          <a:ln/>
-        </p:spPr>
-        <p:txBody>
-          <a:bodyPr wrap="square" rtlCol="0" anchor="t"/>
-          <a:lstStyle/>
-          <a:p>
-            <a:pPr indent="0" marL="0">
-              <a:spcAft>
-                <a:spcPts val="600"/>
-              </a:spcAft>
-              <a:buNone/>
-            </a:pPr>
-            <a:r>
-              <a:rPr lang="en-US" sz="1600" dirty="0">
-                <a:solidFill>
-                  <a:srgbClr val="1A1A1A"/>
-                </a:solidFill>
-                <a:latin typeface="Yu Gothic UI" pitchFamily="34" charset="0"/>
-                <a:ea typeface="Yu Gothic UI" pitchFamily="34" charset="-122"/>
-                <a:cs typeface="Yu Gothic UI" pitchFamily="34" charset="-120"/>
-              </a:rPr>
-              <a:t>GAS から Google Docs を作成・編集できる API。</a:t>
-            </a:r>
-            <a:pPr indent="0" marL="0">
-              <a:spcAft>
-                <a:spcPts val="600"/>
-              </a:spcAft>
-              <a:buNone/>
-            </a:pPr>
-            <a:r>
-              <a:rPr lang="en-US" sz="1600" dirty="0">
-                <a:solidFill>
-                  <a:srgbClr val="1A1A1A"/>
-                </a:solidFill>
-                <a:latin typeface="Yu Gothic UI" pitchFamily="34" charset="0"/>
-                <a:ea typeface="Yu Gothic UI" pitchFamily="34" charset="-122"/>
-                <a:cs typeface="Yu Gothic UI" pitchFamily="34" charset="-120"/>
-              </a:rPr>
-              <a:t>顧客向け PDFレポート生成に使う。</a:t>
-            </a:r>
-            <a:endParaRPr lang="en-US" sz="1600" dirty="0"/>
-          </a:p>
-        </p:txBody>
-      </p:sp>
-      <p:sp>
-        <p:nvSpPr>
-          <p:cNvPr id="24" name="Text 22"/>
-          <p:cNvSpPr/>
-          <p:nvPr/>
-        </p:nvSpPr>
-        <p:spPr>
-          <a:xfrm>
-            <a:off x="365760" y="4389120"/>
-            <a:ext cx="8412480" cy="914400"/>
-          </a:xfrm>
-          <a:prstGeom prst="rect">
-            <a:avLst/>
-          </a:prstGeom>
-          <a:noFill/>
-          <a:ln/>
-        </p:spPr>
-        <p:txBody>
-          <a:bodyPr wrap="square" rtlCol="0" anchor="t"/>
-          <a:lstStyle/>
-          <a:p>
-            <a:pPr indent="0" marL="0">
-              <a:buNone/>
-            </a:pPr>
-            <a:r>
-              <a:rPr lang="en-US" sz="1100" b="1" dirty="0">
-                <a:solidFill>
-                  <a:srgbClr val="E8A33D"/>
-                </a:solidFill>
-                <a:latin typeface="Yu Gothic UI" pitchFamily="34" charset="0"/>
-                <a:ea typeface="Yu Gothic UI" pitchFamily="34" charset="-122"/>
-                <a:cs typeface="Yu Gothic UI" pitchFamily="34" charset="-120"/>
-              </a:rPr>
-              <a:t>※ </a:t>
-            </a:r>
-            <a:pPr indent="0" marL="0">
-              <a:buNone/>
-            </a:pPr>
-            <a:r>
-              <a:rPr lang="en-US" sz="1100" b="1" dirty="0">
-                <a:solidFill>
-                  <a:srgbClr val="1F3A5F"/>
-                </a:solidFill>
-                <a:latin typeface="Yu Gothic UI" pitchFamily="34" charset="0"/>
-                <a:ea typeface="Yu Gothic UI" pitchFamily="34" charset="-122"/>
-                <a:cs typeface="Yu Gothic UI" pitchFamily="34" charset="-120"/>
-              </a:rPr>
-              <a:t>バイブコーディング: </a:t>
-            </a:r>
-            <a:pPr indent="0" marL="0">
-              <a:buNone/>
-            </a:pPr>
-            <a:r>
-              <a:rPr lang="en-US" sz="1100" dirty="0">
-                <a:solidFill>
-                  <a:srgbClr val="555555"/>
-                </a:solidFill>
-                <a:latin typeface="Yu Gothic UI" pitchFamily="34" charset="0"/>
-                <a:ea typeface="Yu Gothic UI" pitchFamily="34" charset="-122"/>
-                <a:cs typeface="Yu Gothic UI" pitchFamily="34" charset="-120"/>
-              </a:rPr>
-              <a:t>空気感(vibe)だけで作る   </a:t>
-            </a:r>
-            <a:pPr indent="0" marL="0">
-              <a:buNone/>
-            </a:pPr>
-            <a:r>
-              <a:rPr lang="en-US" sz="1100" b="1" dirty="0">
-                <a:solidFill>
-                  <a:srgbClr val="E8A33D"/>
-                </a:solidFill>
-                <a:latin typeface="Yu Gothic UI" pitchFamily="34" charset="0"/>
-                <a:ea typeface="Yu Gothic UI" pitchFamily="34" charset="-122"/>
-                <a:cs typeface="Yu Gothic UI" pitchFamily="34" charset="-120"/>
-              </a:rPr>
-              <a:t>※ </a:t>
-            </a:r>
-            <a:pPr indent="0" marL="0">
-              <a:buNone/>
-            </a:pPr>
-            <a:r>
-              <a:rPr lang="en-US" sz="1100" b="1" dirty="0">
-                <a:solidFill>
-                  <a:srgbClr val="1F3A5F"/>
-                </a:solidFill>
-                <a:latin typeface="Yu Gothic UI" pitchFamily="34" charset="0"/>
-                <a:ea typeface="Yu Gothic UI" pitchFamily="34" charset="-122"/>
-                <a:cs typeface="Yu Gothic UI" pitchFamily="34" charset="-120"/>
-              </a:rPr>
-              <a:t>HtmlService: </a:t>
-            </a:r>
-            <a:pPr indent="0" marL="0">
-              <a:buNone/>
-            </a:pPr>
-            <a:r>
-              <a:rPr lang="en-US" sz="1100" dirty="0">
-                <a:solidFill>
-                  <a:srgbClr val="555555"/>
-                </a:solidFill>
-                <a:latin typeface="Yu Gothic UI" pitchFamily="34" charset="0"/>
-                <a:ea typeface="Yu Gothic UI" pitchFamily="34" charset="-122"/>
-                <a:cs typeface="Yu Gothic UI" pitchFamily="34" charset="-120"/>
-              </a:rPr>
-              <a:t>サーバー関数は google.script.run で呼出   </a:t>
-            </a:r>
-            <a:pPr indent="0" marL="0">
-              <a:buNone/>
-            </a:pPr>
-            <a:r>
-              <a:rPr lang="en-US" sz="1100" b="1" dirty="0">
-                <a:solidFill>
-                  <a:srgbClr val="E8A33D"/>
-                </a:solidFill>
-                <a:latin typeface="Yu Gothic UI" pitchFamily="34" charset="0"/>
-                <a:ea typeface="Yu Gothic UI" pitchFamily="34" charset="-122"/>
-                <a:cs typeface="Yu Gothic UI" pitchFamily="34" charset="-120"/>
-              </a:rPr>
-              <a:t>※ </a:t>
-            </a:r>
-            <a:pPr indent="0" marL="0">
-              <a:buNone/>
-            </a:pPr>
-            <a:r>
-              <a:rPr lang="en-US" sz="1100" b="1" dirty="0">
-                <a:solidFill>
-                  <a:srgbClr val="1F3A5F"/>
-                </a:solidFill>
-                <a:latin typeface="Yu Gothic UI" pitchFamily="34" charset="0"/>
-                <a:ea typeface="Yu Gothic UI" pitchFamily="34" charset="-122"/>
-                <a:cs typeface="Yu Gothic UI" pitchFamily="34" charset="-120"/>
-              </a:rPr>
-              <a:t>responseSchema: </a:t>
-            </a:r>
-            <a:pPr indent="0" marL="0">
-              <a:buNone/>
-            </a:pPr>
-            <a:r>
-              <a:rPr lang="en-US" sz="1100" dirty="0">
-                <a:solidFill>
-                  <a:srgbClr val="555555"/>
-                </a:solidFill>
-                <a:latin typeface="Yu Gothic UI" pitchFamily="34" charset="0"/>
-                <a:ea typeface="Yu Gothic UI" pitchFamily="34" charset="-122"/>
-                <a:cs typeface="Yu Gothic UI" pitchFamily="34" charset="-120"/>
-              </a:rPr>
-              <a:t>出力の暴走を防ぐ   </a:t>
-            </a:r>
-            <a:pPr indent="0" marL="0">
-              <a:buNone/>
-            </a:pPr>
-            <a:r>
-              <a:rPr lang="en-US" sz="1100" b="1" dirty="0">
-                <a:solidFill>
-                  <a:srgbClr val="E8A33D"/>
-                </a:solidFill>
-                <a:latin typeface="Yu Gothic UI" pitchFamily="34" charset="0"/>
-                <a:ea typeface="Yu Gothic UI" pitchFamily="34" charset="-122"/>
-                <a:cs typeface="Yu Gothic UI" pitchFamily="34" charset="-120"/>
-              </a:rPr>
-              <a:t>※ </a:t>
-            </a:r>
-            <a:pPr indent="0" marL="0">
-              <a:buNone/>
-            </a:pPr>
-            <a:r>
-              <a:rPr lang="en-US" sz="1100" b="1" dirty="0">
-                <a:solidFill>
-                  <a:srgbClr val="1F3A5F"/>
-                </a:solidFill>
-                <a:latin typeface="Yu Gothic UI" pitchFamily="34" charset="0"/>
-                <a:ea typeface="Yu Gothic UI" pitchFamily="34" charset="-122"/>
-                <a:cs typeface="Yu Gothic UI" pitchFamily="34" charset="-120"/>
-              </a:rPr>
-              <a:t>DocumentApp: </a:t>
-            </a:r>
-            <a:pPr indent="0" marL="0">
-              <a:buNone/>
-            </a:pPr>
-            <a:r>
-              <a:rPr lang="en-US" sz="1100" dirty="0">
-                <a:solidFill>
-                  <a:srgbClr val="555555"/>
-                </a:solidFill>
-                <a:latin typeface="Yu Gothic UI" pitchFamily="34" charset="0"/>
-                <a:ea typeface="Yu Gothic UI" pitchFamily="34" charset="-122"/>
-                <a:cs typeface="Yu Gothic UI" pitchFamily="34" charset="-120"/>
-              </a:rPr>
-              <a:t>表・見出し・書式も操作可</a:t>
-            </a:r>
-            <a:endParaRPr lang="en-US" sz="1100" dirty="0"/>
+              <a:t>お客様に渡せる 7ページのPDFが Google ドライブに自動保存される。</a:t>
+            </a:r>
+            <a:endParaRPr lang="en-US" sz="1200" dirty="0"/>
           </a:p>
         </p:txBody>
       </p:sp>
@@ -3157,8 +3786,8 @@
         </p:nvSpPr>
         <p:spPr>
           <a:xfrm>
-            <a:off x="411480" y="201168"/>
-            <a:ext cx="8412480" cy="594360"/>
+            <a:off x="411480" y="182880"/>
+            <a:ext cx="8412480" cy="548640"/>
           </a:xfrm>
           <a:prstGeom prst="rect">
             <a:avLst/>
@@ -3174,7 +3803,7 @@
               <a:buNone/>
             </a:pPr>
             <a:r>
-              <a:rPr lang="en-US" sz="2600" b="1" dirty="0">
+              <a:rPr lang="en-US" sz="2400" b="1" dirty="0">
                 <a:solidFill>
                   <a:srgbClr val="1F3A5F"/>
                 </a:solidFill>
@@ -3182,34 +3811,73 @@
                 <a:ea typeface="Yu Gothic UI Semibold" pitchFamily="34" charset="-122"/>
                 <a:cs typeface="Yu Gothic UI Semibold" pitchFamily="34" charset="-120"/>
               </a:rPr>
-              <a:t>演習1 メイン処理 (シミュレーション本体) をバイブコーディング</a:t>
-            </a:r>
-            <a:endParaRPr lang="en-US" sz="2600" dirty="0"/>
-          </a:p>
-        </p:txBody>
-      </p:sp>
-      <p:sp>
-        <p:nvSpPr>
-          <p:cNvPr id="4" name="Shape 2"/>
-          <p:cNvSpPr/>
-          <p:nvPr/>
-        </p:nvSpPr>
-        <p:spPr>
-          <a:xfrm>
-            <a:off x="411480" y="1005840"/>
-            <a:ext cx="4160520" cy="1783080"/>
+              <a:t>「バイブコーディング」って何?</a:t>
+            </a:r>
+            <a:endParaRPr lang="en-US" sz="2400" dirty="0"/>
+          </a:p>
+        </p:txBody>
+      </p:sp>
+      <p:sp>
+        <p:nvSpPr>
+          <p:cNvPr id="4" name="Text 2"/>
+          <p:cNvSpPr/>
+          <p:nvPr/>
+        </p:nvSpPr>
+        <p:spPr>
+          <a:xfrm>
+            <a:off x="411480" y="749808"/>
+            <a:ext cx="8412480" cy="365760"/>
+          </a:xfrm>
+          <a:prstGeom prst="rect">
+            <a:avLst/>
+          </a:prstGeom>
+          <a:noFill/>
+          <a:ln/>
+        </p:spPr>
+        <p:txBody>
+          <a:bodyPr wrap="square" rtlCol="0" anchor="ctr"/>
+          <a:lstStyle/>
+          <a:p>
+            <a:pPr indent="0" marL="0">
+              <a:buNone/>
+            </a:pPr>
+            <a:r>
+              <a:rPr lang="en-US" sz="1300" i="1" dirty="0">
+                <a:solidFill>
+                  <a:srgbClr val="555555"/>
+                </a:solidFill>
+                <a:latin typeface="Yu Gothic UI" pitchFamily="34" charset="0"/>
+                <a:ea typeface="Yu Gothic UI" pitchFamily="34" charset="-122"/>
+                <a:cs typeface="Yu Gothic UI" pitchFamily="34" charset="-120"/>
+              </a:rPr>
+              <a:t>コードを1文字も書かず、AI に頼んで作る やり方です</a:t>
+            </a:r>
+            <a:endParaRPr lang="en-US" sz="1300" dirty="0"/>
+          </a:p>
+        </p:txBody>
+      </p:sp>
+      <p:sp>
+        <p:nvSpPr>
+          <p:cNvPr id="5" name="Shape 3"/>
+          <p:cNvSpPr/>
+          <p:nvPr/>
+        </p:nvSpPr>
+        <p:spPr>
+          <a:xfrm>
+            <a:off x="411480" y="1280160"/>
+            <a:ext cx="4023360" cy="3017520"/>
           </a:xfrm>
           <a:prstGeom prst="roundRect">
             <a:avLst>
-              <a:gd name="adj" fmla="val 4103"/>
+              <a:gd name="adj" fmla="val 3030"/>
             </a:avLst>
           </a:prstGeom>
           <a:solidFill>
-            <a:srgbClr val="F4F6F9"/>
-          </a:solidFill>
-          <a:ln w="6350">
+            <a:srgbClr val="FDECEA"/>
+          </a:solidFill>
+          <a:ln w="25400">
             <a:solidFill>
-              <a:srgbClr val="D7DCE3"/>
+              <a:srgbClr val="C76B7A"/>
             </a:solidFill>
             <a:prstDash val="solid"/>
           </a:ln>
@@ -3217,34 +3885,34 @@
       </p:sp>
       <p:sp>
         <p:nvSpPr>
-          <p:cNvPr id="5" name="Shape 3"/>
-          <p:cNvSpPr/>
-          <p:nvPr/>
-        </p:nvSpPr>
-        <p:spPr>
-          <a:xfrm>
-            <a:off x="411480" y="1005840"/>
-            <a:ext cx="91440" cy="1783080"/>
-          </a:xfrm>
-          <a:prstGeom prst="rect">
-            <a:avLst/>
-          </a:prstGeom>
-          <a:solidFill>
-            <a:srgbClr val="1F3A5F"/>
-          </a:solidFill>
-          <a:ln/>
-        </p:spPr>
-      </p:sp>
-      <p:sp>
-        <p:nvSpPr>
-          <p:cNvPr id="6" name="Text 4"/>
-          <p:cNvSpPr/>
-          <p:nvPr/>
-        </p:nvSpPr>
-        <p:spPr>
-          <a:xfrm>
-            <a:off x="612648" y="1097280"/>
-            <a:ext cx="3849624" cy="384048"/>
+          <p:cNvPr id="6" name="Shape 4"/>
+          <p:cNvSpPr/>
+          <p:nvPr/>
+        </p:nvSpPr>
+        <p:spPr>
+          <a:xfrm>
+            <a:off x="411480" y="1280160"/>
+            <a:ext cx="4023360" cy="502920"/>
+          </a:xfrm>
+          <a:prstGeom prst="rect">
+            <a:avLst/>
+          </a:prstGeom>
+          <a:solidFill>
+            <a:srgbClr val="C76B7A"/>
+          </a:solidFill>
+          <a:ln/>
+        </p:spPr>
+      </p:sp>
+      <p:sp>
+        <p:nvSpPr>
+          <p:cNvPr id="7" name="Text 5"/>
+          <p:cNvSpPr/>
+          <p:nvPr/>
+        </p:nvSpPr>
+        <p:spPr>
+          <a:xfrm>
+            <a:off x="548640" y="1280160"/>
+            <a:ext cx="3749040" cy="502920"/>
           </a:xfrm>
           <a:prstGeom prst="rect">
             <a:avLst/>
@@ -3256,34 +3924,34 @@
           <a:bodyPr wrap="square" rtlCol="0" anchor="ctr"/>
           <a:lstStyle/>
           <a:p>
-            <a:pPr indent="0" marL="0">
-              <a:buNone/>
-            </a:pPr>
-            <a:r>
-              <a:rPr lang="en-US" sz="1600" b="1" dirty="0">
-                <a:solidFill>
-                  <a:srgbClr val="1F3A5F"/>
+            <a:pPr algn="ctr" indent="0" marL="0">
+              <a:buNone/>
+            </a:pPr>
+            <a:r>
+              <a:rPr lang="en-US" sz="1400" b="1" dirty="0">
+                <a:solidFill>
+                  <a:srgbClr val="FFFFFF"/>
                 </a:solidFill>
                 <a:latin typeface="Yu Gothic UI Semibold" pitchFamily="34" charset="0"/>
                 <a:ea typeface="Yu Gothic UI Semibold" pitchFamily="34" charset="-122"/>
                 <a:cs typeface="Yu Gothic UI Semibold" pitchFamily="34" charset="-120"/>
               </a:rPr>
-              <a:t>📍 シチュエーション</a:t>
-            </a:r>
-            <a:endParaRPr lang="en-US" sz="1600" dirty="0"/>
-          </a:p>
-        </p:txBody>
-      </p:sp>
-      <p:sp>
-        <p:nvSpPr>
-          <p:cNvPr id="7" name="Text 5"/>
-          <p:cNvSpPr/>
-          <p:nvPr/>
-        </p:nvSpPr>
-        <p:spPr>
-          <a:xfrm>
-            <a:off x="649224" y="1536192"/>
-            <a:ext cx="3703320" cy="1161288"/>
+              <a:t>これまでの作り方</a:t>
+            </a:r>
+            <a:endParaRPr lang="en-US" sz="1400" dirty="0"/>
+          </a:p>
+        </p:txBody>
+      </p:sp>
+      <p:sp>
+        <p:nvSpPr>
+          <p:cNvPr id="8" name="Text 6"/>
+          <p:cNvSpPr/>
+          <p:nvPr/>
+        </p:nvSpPr>
+        <p:spPr>
+          <a:xfrm>
+            <a:off x="630936" y="1938528"/>
+            <a:ext cx="3584448" cy="2240280"/>
           </a:xfrm>
           <a:prstGeom prst="rect">
             <a:avLst/>
@@ -3295,14 +3963,15 @@
           <a:bodyPr wrap="square" rtlCol="0" anchor="t"/>
           <a:lstStyle/>
           <a:p>
-            <a:pPr indent="0" marL="0">
+            <a:pPr marL="342900" indent="-342900">
               <a:spcAft>
-                <a:spcPts val="400"/>
+                <a:spcPts val="600"/>
               </a:spcAft>
-              <a:buNone/>
-            </a:pPr>
-            <a:r>
-              <a:rPr lang="en-US" sz="1400" dirty="0">
+              <a:buSzPct val="100000"/>
+              <a:buChar char="•"/>
+            </a:pPr>
+            <a:r>
+              <a:rPr lang="en-US" sz="1300" dirty="0">
                 <a:solidFill>
                   <a:srgbClr val="1A1A1A"/>
                 </a:solidFill>
@@ -3310,19 +3979,20 @@
                 <a:ea typeface="Yu Gothic UI" pitchFamily="34" charset="-122"/>
                 <a:cs typeface="Yu Gothic UI" pitchFamily="34" charset="-120"/>
               </a:rPr>
-              <a:t>W1 の設計書 を Gemini に見せて、GAS のメイン関数を書いてもらう。</a:t>
-            </a:r>
-            <a:endParaRPr lang="en-US" sz="1400" dirty="0"/>
-          </a:p>
-          <a:p>
-            <a:pPr indent="0" marL="0">
+              <a:t>1行ずつ書く → 何日もかかる</a:t>
+            </a:r>
+            <a:endParaRPr lang="en-US" sz="1300" dirty="0"/>
+          </a:p>
+          <a:p>
+            <a:pPr marL="342900" indent="-342900">
               <a:spcAft>
-                <a:spcPts val="400"/>
+                <a:spcPts val="600"/>
               </a:spcAft>
-              <a:buNone/>
-            </a:pPr>
-            <a:r>
-              <a:rPr lang="en-US" sz="1400" dirty="0">
+              <a:buSzPct val="100000"/>
+              <a:buChar char="•"/>
+            </a:pPr>
+            <a:r>
+              <a:rPr lang="en-US" sz="1300" dirty="0">
                 <a:solidFill>
                   <a:srgbClr val="1A1A1A"/>
                 </a:solidFill>
@@ -3330,19 +4000,20 @@
                 <a:ea typeface="Yu Gothic UI" pitchFamily="34" charset="-122"/>
                 <a:cs typeface="Yu Gothic UI" pitchFamily="34" charset="-120"/>
               </a:rPr>
-              <a:t>同梱「Code_ライフプランAI.gs」が完成形の見本、まず貼付して動かし、</a:t>
-            </a:r>
-            <a:endParaRPr lang="en-US" sz="1400" dirty="0"/>
-          </a:p>
-          <a:p>
-            <a:pPr indent="0" marL="0">
+              <a:t>文法エラーで止まる → 検索して調べる</a:t>
+            </a:r>
+            <a:endParaRPr lang="en-US" sz="1300" dirty="0"/>
+          </a:p>
+          <a:p>
+            <a:pPr marL="342900" indent="-342900">
               <a:spcAft>
-                <a:spcPts val="400"/>
+                <a:spcPts val="600"/>
               </a:spcAft>
-              <a:buNone/>
-            </a:pPr>
-            <a:r>
-              <a:rPr lang="en-US" sz="1400" dirty="0">
+              <a:buSzPct val="100000"/>
+              <a:buChar char="•"/>
+            </a:pPr>
+            <a:r>
+              <a:rPr lang="en-US" sz="1300" dirty="0">
                 <a:solidFill>
                   <a:srgbClr val="1A1A1A"/>
                 </a:solidFill>
@@ -3350,34 +4021,55 @@
                 <a:ea typeface="Yu Gothic UI" pitchFamily="34" charset="-122"/>
                 <a:cs typeface="Yu Gothic UI" pitchFamily="34" charset="-120"/>
               </a:rPr>
-              <a:t>設計書に合わせて 部分修正 or Gemini に修正依頼していく流れ。</a:t>
-            </a:r>
-            <a:endParaRPr lang="en-US" sz="1400" dirty="0"/>
-          </a:p>
-        </p:txBody>
-      </p:sp>
-      <p:sp>
-        <p:nvSpPr>
-          <p:cNvPr id="8" name="Shape 6"/>
-          <p:cNvSpPr/>
-          <p:nvPr/>
-        </p:nvSpPr>
-        <p:spPr>
-          <a:xfrm>
-            <a:off x="411480" y="2880360"/>
-            <a:ext cx="4160520" cy="2011680"/>
+              <a:t>「あれ、この関数どう使う?」で毎回止まる</a:t>
+            </a:r>
+            <a:endParaRPr lang="en-US" sz="1300" dirty="0"/>
+          </a:p>
+          <a:p>
+            <a:pPr marL="342900" indent="-342900">
+              <a:spcAft>
+                <a:spcPts val="600"/>
+              </a:spcAft>
+              <a:buSzPct val="100000"/>
+              <a:buChar char="•"/>
+            </a:pPr>
+            <a:r>
+              <a:rPr lang="en-US" sz="1300" dirty="0">
+                <a:solidFill>
+                  <a:srgbClr val="1A1A1A"/>
+                </a:solidFill>
+                <a:latin typeface="Yu Gothic UI" pitchFamily="34" charset="0"/>
+                <a:ea typeface="Yu Gothic UI" pitchFamily="34" charset="-122"/>
+                <a:cs typeface="Yu Gothic UI" pitchFamily="34" charset="-120"/>
+              </a:rPr>
+              <a:t>プログラマーじゃないと厳しい</a:t>
+            </a:r>
+            <a:endParaRPr lang="en-US" sz="1300" dirty="0"/>
+          </a:p>
+        </p:txBody>
+      </p:sp>
+      <p:sp>
+        <p:nvSpPr>
+          <p:cNvPr id="9" name="Shape 7"/>
+          <p:cNvSpPr/>
+          <p:nvPr/>
+        </p:nvSpPr>
+        <p:spPr>
+          <a:xfrm>
+            <a:off x="4709160" y="1280160"/>
+            <a:ext cx="4023360" cy="3017520"/>
           </a:xfrm>
           <a:prstGeom prst="roundRect">
             <a:avLst>
-              <a:gd name="adj" fmla="val 3636"/>
+              <a:gd name="adj" fmla="val 3030"/>
             </a:avLst>
           </a:prstGeom>
           <a:solidFill>
-            <a:srgbClr val="F4F6F9"/>
-          </a:solidFill>
-          <a:ln w="6350">
+            <a:srgbClr val="E6F4EA"/>
+          </a:solidFill>
+          <a:ln w="25400">
             <a:solidFill>
-              <a:srgbClr val="D7DCE3"/>
+              <a:srgbClr val="0E7C86"/>
             </a:solidFill>
             <a:prstDash val="solid"/>
           </a:ln>
@@ -3385,34 +4077,34 @@
       </p:sp>
       <p:sp>
         <p:nvSpPr>
-          <p:cNvPr id="9" name="Shape 7"/>
-          <p:cNvSpPr/>
-          <p:nvPr/>
-        </p:nvSpPr>
-        <p:spPr>
-          <a:xfrm>
-            <a:off x="411480" y="2880360"/>
-            <a:ext cx="91440" cy="2011680"/>
-          </a:xfrm>
-          <a:prstGeom prst="rect">
-            <a:avLst/>
-          </a:prstGeom>
-          <a:solidFill>
-            <a:srgbClr val="E8A33D"/>
-          </a:solidFill>
-          <a:ln/>
-        </p:spPr>
-      </p:sp>
-      <p:sp>
-        <p:nvSpPr>
-          <p:cNvPr id="10" name="Text 8"/>
-          <p:cNvSpPr/>
-          <p:nvPr/>
-        </p:nvSpPr>
-        <p:spPr>
-          <a:xfrm>
-            <a:off x="612648" y="2971800"/>
-            <a:ext cx="3849624" cy="384048"/>
+          <p:cNvPr id="10" name="Shape 8"/>
+          <p:cNvSpPr/>
+          <p:nvPr/>
+        </p:nvSpPr>
+        <p:spPr>
+          <a:xfrm>
+            <a:off x="4709160" y="1280160"/>
+            <a:ext cx="4023360" cy="502920"/>
+          </a:xfrm>
+          <a:prstGeom prst="rect">
+            <a:avLst/>
+          </a:prstGeom>
+          <a:solidFill>
+            <a:srgbClr val="0E7C86"/>
+          </a:solidFill>
+          <a:ln/>
+        </p:spPr>
+      </p:sp>
+      <p:sp>
+        <p:nvSpPr>
+          <p:cNvPr id="11" name="Text 9"/>
+          <p:cNvSpPr/>
+          <p:nvPr/>
+        </p:nvSpPr>
+        <p:spPr>
+          <a:xfrm>
+            <a:off x="4846320" y="1280160"/>
+            <a:ext cx="3749040" cy="502920"/>
           </a:xfrm>
           <a:prstGeom prst="rect">
             <a:avLst/>
@@ -3424,34 +4116,34 @@
           <a:bodyPr wrap="square" rtlCol="0" anchor="ctr"/>
           <a:lstStyle/>
           <a:p>
-            <a:pPr indent="0" marL="0">
-              <a:buNone/>
-            </a:pPr>
-            <a:r>
-              <a:rPr lang="en-US" sz="1600" b="1" dirty="0">
-                <a:solidFill>
-                  <a:srgbClr val="E8A33D"/>
+            <a:pPr algn="ctr" indent="0" marL="0">
+              <a:buNone/>
+            </a:pPr>
+            <a:r>
+              <a:rPr lang="en-US" sz="1400" b="1" dirty="0">
+                <a:solidFill>
+                  <a:srgbClr val="FFFFFF"/>
                 </a:solidFill>
                 <a:latin typeface="Yu Gothic UI Semibold" pitchFamily="34" charset="0"/>
                 <a:ea typeface="Yu Gothic UI Semibold" pitchFamily="34" charset="-122"/>
                 <a:cs typeface="Yu Gothic UI Semibold" pitchFamily="34" charset="-120"/>
               </a:rPr>
-              <a:t>💭 プロンプトのヒント</a:t>
-            </a:r>
-            <a:endParaRPr lang="en-US" sz="1600" dirty="0"/>
-          </a:p>
-        </p:txBody>
-      </p:sp>
-      <p:sp>
-        <p:nvSpPr>
-          <p:cNvPr id="11" name="Text 9"/>
-          <p:cNvSpPr/>
-          <p:nvPr/>
-        </p:nvSpPr>
-        <p:spPr>
-          <a:xfrm>
-            <a:off x="649224" y="3410712"/>
-            <a:ext cx="3703320" cy="1389888"/>
+              <a:t>バイブコーディング</a:t>
+            </a:r>
+            <a:endParaRPr lang="en-US" sz="1400" dirty="0"/>
+          </a:p>
+        </p:txBody>
+      </p:sp>
+      <p:sp>
+        <p:nvSpPr>
+          <p:cNvPr id="12" name="Text 10"/>
+          <p:cNvSpPr/>
+          <p:nvPr/>
+        </p:nvSpPr>
+        <p:spPr>
+          <a:xfrm>
+            <a:off x="4928616" y="1938528"/>
+            <a:ext cx="3584448" cy="2240280"/>
           </a:xfrm>
           <a:prstGeom prst="rect">
             <a:avLst/>
@@ -3465,13 +4157,13 @@
           <a:p>
             <a:pPr marL="342900" indent="-342900">
               <a:spcAft>
-                <a:spcPts val="400"/>
+                <a:spcPts val="600"/>
               </a:spcAft>
               <a:buSzPct val="100000"/>
-              <a:buChar char="●"/>
-            </a:pPr>
-            <a:r>
-              <a:rPr lang="en-US" sz="1400" dirty="0">
+              <a:buChar char="•"/>
+            </a:pPr>
+            <a:r>
+              <a:rPr lang="en-US" sz="1300" dirty="0">
                 <a:solidFill>
                   <a:srgbClr val="1A1A1A"/>
                 </a:solidFill>
@@ -3479,20 +4171,20 @@
                 <a:ea typeface="Yu Gothic UI" pitchFamily="34" charset="-122"/>
                 <a:cs typeface="Yu Gothic UI" pitchFamily="34" charset="-120"/>
               </a:rPr>
-              <a:t>「Code_ライフプランAI.gs をこの設計書に合わせて改造して」と Gemini に依頼するのがバイブコーディング</a:t>
-            </a:r>
-            <a:endParaRPr lang="en-US" sz="1400" dirty="0"/>
+              <a:t>AI に「こういうの作って」と日本語で頼む</a:t>
+            </a:r>
+            <a:endParaRPr lang="en-US" sz="1300" dirty="0"/>
           </a:p>
           <a:p>
             <a:pPr marL="342900" indent="-342900">
               <a:spcAft>
-                <a:spcPts val="400"/>
+                <a:spcPts val="600"/>
               </a:spcAft>
               <a:buSzPct val="100000"/>
-              <a:buChar char="●"/>
-            </a:pPr>
-            <a:r>
-              <a:rPr lang="en-US" sz="1400" dirty="0">
+              <a:buChar char="•"/>
+            </a:pPr>
+            <a:r>
+              <a:rPr lang="en-US" sz="1300" dirty="0">
                 <a:solidFill>
                   <a:srgbClr val="1A1A1A"/>
                 </a:solidFill>
@@ -3500,20 +4192,20 @@
                 <a:ea typeface="Yu Gothic UI" pitchFamily="34" charset="-122"/>
                 <a:cs typeface="Yu Gothic UI" pitchFamily="34" charset="-120"/>
               </a:rPr>
-              <a:t>エラー時は Logger のログを Gemini に貼って「これ何?」と聞く</a:t>
-            </a:r>
-            <a:endParaRPr lang="en-US" sz="1400" dirty="0"/>
+              <a:t>返ってきたコードをコピペ、動かしてみる</a:t>
+            </a:r>
+            <a:endParaRPr lang="en-US" sz="1300" dirty="0"/>
           </a:p>
           <a:p>
             <a:pPr marL="342900" indent="-342900">
               <a:spcAft>
-                <a:spcPts val="400"/>
+                <a:spcPts val="600"/>
               </a:spcAft>
               <a:buSzPct val="100000"/>
-              <a:buChar char="●"/>
-            </a:pPr>
-            <a:r>
-              <a:rPr lang="en-US" sz="1400" dirty="0">
+              <a:buChar char="•"/>
+            </a:pPr>
+            <a:r>
+              <a:rPr lang="en-US" sz="1300" dirty="0">
                 <a:solidFill>
                   <a:srgbClr val="1A1A1A"/>
                 </a:solidFill>
@@ -3521,20 +4213,20 @@
                 <a:ea typeface="Yu Gothic UI" pitchFamily="34" charset="-122"/>
                 <a:cs typeface="Yu Gothic UI" pitchFamily="34" charset="-120"/>
               </a:rPr>
-              <a:t>独自アドバイスの埋め込みは buildPrompt_ 関数の末尾に文字列連結で追加</a:t>
-            </a:r>
-            <a:endParaRPr lang="en-US" sz="1400" dirty="0"/>
+              <a:t>エラーが出たら AI に「これ直して」と貼付ける</a:t>
+            </a:r>
+            <a:endParaRPr lang="en-US" sz="1300" dirty="0"/>
           </a:p>
           <a:p>
             <a:pPr marL="342900" indent="-342900">
               <a:spcAft>
-                <a:spcPts val="400"/>
+                <a:spcPts val="600"/>
               </a:spcAft>
               <a:buSzPct val="100000"/>
-              <a:buChar char="●"/>
-            </a:pPr>
-            <a:r>
-              <a:rPr lang="en-US" sz="1400" dirty="0">
+              <a:buChar char="•"/>
+            </a:pPr>
+            <a:r>
+              <a:rPr lang="en-US" sz="1300" dirty="0">
                 <a:solidFill>
                   <a:srgbClr val="1A1A1A"/>
                 </a:solidFill>
@@ -3542,222 +4234,9 @@
                 <a:ea typeface="Yu Gothic UI" pitchFamily="34" charset="-122"/>
                 <a:cs typeface="Yu Gothic UI" pitchFamily="34" charset="-120"/>
               </a:rPr>
-              <a:t>コード全読解を求めない、動作原理を掴んで詳細は困った時に読む</a:t>
-            </a:r>
-            <a:endParaRPr lang="en-US" sz="1400" dirty="0"/>
-          </a:p>
-        </p:txBody>
-      </p:sp>
-      <p:sp>
-        <p:nvSpPr>
-          <p:cNvPr id="12" name="Shape 10"/>
-          <p:cNvSpPr/>
-          <p:nvPr/>
-        </p:nvSpPr>
-        <p:spPr>
-          <a:xfrm>
-            <a:off x="4663440" y="1005840"/>
-            <a:ext cx="4160520" cy="3886200"/>
-          </a:xfrm>
-          <a:prstGeom prst="roundRect">
-            <a:avLst>
-              <a:gd name="adj" fmla="val 1882"/>
-            </a:avLst>
-          </a:prstGeom>
-          <a:solidFill>
-            <a:srgbClr val="F4F6F9"/>
-          </a:solidFill>
-          <a:ln w="6350">
-            <a:solidFill>
-              <a:srgbClr val="D7DCE3"/>
-            </a:solidFill>
-            <a:prstDash val="solid"/>
-          </a:ln>
-        </p:spPr>
-      </p:sp>
-      <p:sp>
-        <p:nvSpPr>
-          <p:cNvPr id="13" name="Shape 11"/>
-          <p:cNvSpPr/>
-          <p:nvPr/>
-        </p:nvSpPr>
-        <p:spPr>
-          <a:xfrm>
-            <a:off x="4663440" y="1005840"/>
-            <a:ext cx="91440" cy="3886200"/>
-          </a:xfrm>
-          <a:prstGeom prst="rect">
-            <a:avLst/>
-          </a:prstGeom>
-          <a:solidFill>
-            <a:srgbClr val="0E7C86"/>
-          </a:solidFill>
-          <a:ln/>
-        </p:spPr>
-      </p:sp>
-      <p:sp>
-        <p:nvSpPr>
-          <p:cNvPr id="14" name="Text 12"/>
-          <p:cNvSpPr/>
-          <p:nvPr/>
-        </p:nvSpPr>
-        <p:spPr>
-          <a:xfrm>
-            <a:off x="4864608" y="1097280"/>
-            <a:ext cx="3849624" cy="384048"/>
-          </a:xfrm>
-          <a:prstGeom prst="rect">
-            <a:avLst/>
-          </a:prstGeom>
-          <a:noFill/>
-          <a:ln/>
-        </p:spPr>
-        <p:txBody>
-          <a:bodyPr wrap="square" rtlCol="0" anchor="ctr"/>
-          <a:lstStyle/>
-          <a:p>
-            <a:pPr indent="0" marL="0">
-              <a:buNone/>
-            </a:pPr>
-            <a:r>
-              <a:rPr lang="en-US" sz="1600" b="1" dirty="0">
-                <a:solidFill>
-                  <a:srgbClr val="0E7C86"/>
-                </a:solidFill>
-                <a:latin typeface="Yu Gothic UI Semibold" pitchFamily="34" charset="0"/>
-                <a:ea typeface="Yu Gothic UI Semibold" pitchFamily="34" charset="-122"/>
-                <a:cs typeface="Yu Gothic UI Semibold" pitchFamily="34" charset="-120"/>
-              </a:rPr>
-              <a:t>🎯 AIに作ってもらいたいもの</a:t>
-            </a:r>
-            <a:endParaRPr lang="en-US" sz="1600" dirty="0"/>
-          </a:p>
-        </p:txBody>
-      </p:sp>
-      <p:sp>
-        <p:nvSpPr>
-          <p:cNvPr id="15" name="Text 13"/>
-          <p:cNvSpPr/>
-          <p:nvPr/>
-        </p:nvSpPr>
-        <p:spPr>
-          <a:xfrm>
-            <a:off x="4901184" y="1536192"/>
-            <a:ext cx="3703320" cy="3264408"/>
-          </a:xfrm>
-          <a:prstGeom prst="rect">
-            <a:avLst/>
-          </a:prstGeom>
-          <a:noFill/>
-          <a:ln/>
-        </p:spPr>
-        <p:txBody>
-          <a:bodyPr wrap="square" rtlCol="0" anchor="t"/>
-          <a:lstStyle/>
-          <a:p>
-            <a:pPr marL="342900" indent="-342900">
-              <a:spcAft>
-                <a:spcPts val="400"/>
-              </a:spcAft>
-              <a:buSzPct val="100000"/>
-              <a:buChar char="●"/>
-            </a:pPr>
-            <a:r>
-              <a:rPr lang="en-US" sz="1400" dirty="0">
-                <a:solidFill>
-                  <a:srgbClr val="1A1A1A"/>
-                </a:solidFill>
-                <a:latin typeface="Yu Gothic UI" pitchFamily="34" charset="0"/>
-                <a:ea typeface="Yu Gothic UI" pitchFamily="34" charset="-122"/>
-                <a:cs typeface="Yu Gothic UI" pitchFamily="34" charset="-120"/>
-              </a:rPr>
-              <a:t>スプシ「ライフプラン入力テンプレ.xlsx」をアップロード → 拡張機能 → Apps Script</a:t>
-            </a:r>
-            <a:endParaRPr lang="en-US" sz="1400" dirty="0"/>
-          </a:p>
-          <a:p>
-            <a:pPr marL="342900" indent="-342900">
-              <a:spcAft>
-                <a:spcPts val="400"/>
-              </a:spcAft>
-              <a:buSzPct val="100000"/>
-              <a:buChar char="●"/>
-            </a:pPr>
-            <a:r>
-              <a:rPr lang="en-US" sz="1400" dirty="0">
-                <a:solidFill>
-                  <a:srgbClr val="1A1A1A"/>
-                </a:solidFill>
-                <a:latin typeface="Yu Gothic UI" pitchFamily="34" charset="0"/>
-                <a:ea typeface="Yu Gothic UI" pitchFamily="34" charset="-122"/>
-                <a:cs typeface="Yu Gothic UI" pitchFamily="34" charset="-120"/>
-              </a:rPr>
-              <a:t>Code_ライフプランAI.gs 貼付、スクリプトプロパティに GEMINI_API_KEY 設定</a:t>
-            </a:r>
-            <a:endParaRPr lang="en-US" sz="1400" dirty="0"/>
-          </a:p>
-          <a:p>
-            <a:pPr marL="342900" indent="-342900">
-              <a:spcAft>
-                <a:spcPts val="400"/>
-              </a:spcAft>
-              <a:buSzPct val="100000"/>
-              <a:buChar char="●"/>
-            </a:pPr>
-            <a:r>
-              <a:rPr lang="en-US" sz="1400" dirty="0">
-                <a:solidFill>
-                  <a:srgbClr val="1A1A1A"/>
-                </a:solidFill>
-                <a:latin typeface="Yu Gothic UI" pitchFamily="34" charset="0"/>
-                <a:ea typeface="Yu Gothic UI" pitchFamily="34" charset="-122"/>
-                <a:cs typeface="Yu Gothic UI" pitchFamily="34" charset="-120"/>
-              </a:rPr>
-              <a:t>関数 testSetup で権限承認 → メニュー「ライフプランAI」→「▶ シミュレーション実行」</a:t>
-            </a:r>
-            <a:endParaRPr lang="en-US" sz="1400" dirty="0"/>
-          </a:p>
-          <a:p>
-            <a:pPr marL="342900" indent="-342900">
-              <a:spcAft>
-                <a:spcPts val="400"/>
-              </a:spcAft>
-              <a:buSzPct val="100000"/>
-              <a:buChar char="●"/>
-            </a:pPr>
-            <a:r>
-              <a:rPr lang="en-US" sz="1400" dirty="0">
-                <a:solidFill>
-                  <a:srgbClr val="1A1A1A"/>
-                </a:solidFill>
-                <a:latin typeface="Yu Gothic UI" pitchFamily="34" charset="0"/>
-                <a:ea typeface="Yu Gothic UI" pitchFamily="34" charset="-122"/>
-                <a:cs typeface="Yu Gothic UI" pitchFamily="34" charset="-120"/>
-              </a:rPr>
-              <a:t>記入例で実行し、40年CFと保険提案フックが出ることを確認</a:t>
-            </a:r>
-            <a:endParaRPr lang="en-US" sz="1400" dirty="0"/>
-          </a:p>
-          <a:p>
-            <a:pPr marL="342900" indent="-342900">
-              <a:spcAft>
-                <a:spcPts val="400"/>
-              </a:spcAft>
-              <a:buSzPct val="100000"/>
-              <a:buChar char="●"/>
-            </a:pPr>
-            <a:r>
-              <a:rPr lang="en-US" sz="1400" dirty="0">
-                <a:solidFill>
-                  <a:srgbClr val="1A1A1A"/>
-                </a:solidFill>
-                <a:latin typeface="Yu Gothic UI" pitchFamily="34" charset="0"/>
-                <a:ea typeface="Yu Gothic UI" pitchFamily="34" charset="-122"/>
-                <a:cs typeface="Yu Gothic UI" pitchFamily="34" charset="-120"/>
-              </a:rPr>
-              <a:t>W1 の独自アドバイスマスタ を プロンプトに追加する方法を Gemini に相談 → 修正</a:t>
-            </a:r>
-            <a:endParaRPr lang="en-US" sz="1400" dirty="0"/>
+              <a:t>完璧を目指さない、動いたらOK、詳細は後で</a:t>
+            </a:r>
+            <a:endParaRPr lang="en-US" sz="1300" dirty="0"/>
           </a:p>
         </p:txBody>
       </p:sp>
@@ -3821,8 +4300,8 @@
         </p:nvSpPr>
         <p:spPr>
           <a:xfrm>
-            <a:off x="411480" y="201168"/>
-            <a:ext cx="8412480" cy="594360"/>
+            <a:off x="411480" y="182880"/>
+            <a:ext cx="8412480" cy="548640"/>
           </a:xfrm>
           <a:prstGeom prst="rect">
             <a:avLst/>
@@ -3838,7 +4317,7 @@
               <a:buNone/>
             </a:pPr>
             <a:r>
-              <a:rPr lang="en-US" sz="2600" b="1" dirty="0">
+              <a:rPr lang="en-US" sz="2400" b="1" dirty="0">
                 <a:solidFill>
                   <a:srgbClr val="1F3A5F"/>
                 </a:solidFill>
@@ -3846,9 +4325,9 @@
                 <a:ea typeface="Yu Gothic UI Semibold" pitchFamily="34" charset="-122"/>
                 <a:cs typeface="Yu Gothic UI Semibold" pitchFamily="34" charset="-120"/>
               </a:rPr>
-              <a:t>演習1 メイン処理 (シミュレーション本体) をバイブコーディング — 観点別チェック</a:t>
-            </a:r>
-            <a:endParaRPr lang="en-US" sz="2600" dirty="0"/>
+              <a:t>今日やることは、この3つ</a:t>
+            </a:r>
+            <a:endParaRPr lang="en-US" sz="2400" dirty="0"/>
           </a:p>
         </p:txBody>
       </p:sp>
@@ -3860,7 +4339,7 @@
         </p:nvSpPr>
         <p:spPr>
           <a:xfrm>
-            <a:off x="411480" y="804672"/>
+            <a:off x="411480" y="749808"/>
             <a:ext cx="8412480" cy="365760"/>
           </a:xfrm>
           <a:prstGeom prst="rect">
@@ -3877,7 +4356,7 @@
               <a:buNone/>
             </a:pPr>
             <a:r>
-              <a:rPr lang="en-US" sz="1500" i="1" dirty="0">
+              <a:rPr lang="en-US" sz="1300" i="1" dirty="0">
                 <a:solidFill>
                   <a:srgbClr val="555555"/>
                 </a:solidFill>
@@ -3885,9 +4364,9 @@
                 <a:ea typeface="Yu Gothic UI" pitchFamily="34" charset="-122"/>
                 <a:cs typeface="Yu Gothic UI" pitchFamily="34" charset="-120"/>
               </a:rPr>
-              <a:t>プロンプトをさらにブラッシュアップ — 3観点でセルフチェック</a:t>
-            </a:r>
-            <a:endParaRPr lang="en-US" sz="1500" dirty="0"/>
+              <a:t>スプレッドシートに GAS を貼付けて、AIと対話しながら仕上げます</a:t>
+            </a:r>
+            <a:endParaRPr lang="en-US" sz="1300" dirty="0"/>
           </a:p>
         </p:txBody>
       </p:sp>
@@ -3899,18 +4378,18 @@
         </p:nvSpPr>
         <p:spPr>
           <a:xfrm>
-            <a:off x="411480" y="1325880"/>
-            <a:ext cx="2651760" cy="3474720"/>
+            <a:off x="411480" y="1280160"/>
+            <a:ext cx="4069080" cy="1440180"/>
           </a:xfrm>
           <a:prstGeom prst="roundRect">
             <a:avLst>
-              <a:gd name="adj" fmla="val 3448"/>
+              <a:gd name="adj" fmla="val 5079"/>
             </a:avLst>
           </a:prstGeom>
           <a:solidFill>
             <a:srgbClr val="F4F6F9"/>
           </a:solidFill>
-          <a:ln w="15240">
+          <a:ln w="19050">
             <a:solidFill>
               <a:srgbClr val="0E7C86"/>
             </a:solidFill>
@@ -3926,10 +4405,10 @@
         </p:nvSpPr>
         <p:spPr>
           <a:xfrm>
-            <a:off x="411480" y="1325880"/>
-            <a:ext cx="2651760" cy="457200"/>
-          </a:xfrm>
-          <a:prstGeom prst="rect">
+            <a:off x="557784" y="1426464"/>
+            <a:ext cx="502920" cy="502920"/>
+          </a:xfrm>
+          <a:prstGeom prst="ellipse">
             <a:avLst/>
           </a:prstGeom>
           <a:solidFill>
@@ -3946,8 +4425,8 @@
         </p:nvSpPr>
         <p:spPr>
           <a:xfrm>
-            <a:off x="539496" y="1380744"/>
-            <a:ext cx="2395728" cy="365760"/>
+            <a:off x="557784" y="1426464"/>
+            <a:ext cx="502920" cy="502920"/>
           </a:xfrm>
           <a:prstGeom prst="rect">
             <a:avLst/>
@@ -3959,11 +4438,11 @@
           <a:bodyPr wrap="square" rtlCol="0" anchor="ctr"/>
           <a:lstStyle/>
           <a:p>
-            <a:pPr indent="0" marL="0">
-              <a:buNone/>
-            </a:pPr>
-            <a:r>
-              <a:rPr lang="en-US" sz="1500" b="1" dirty="0">
+            <a:pPr algn="ctr" indent="0" marL="0">
+              <a:buNone/>
+            </a:pPr>
+            <a:r>
+              <a:rPr lang="en-US" sz="2000" b="1" dirty="0">
                 <a:solidFill>
                   <a:srgbClr val="FFFFFF"/>
                 </a:solidFill>
@@ -3971,9 +4450,9 @@
                 <a:ea typeface="Yu Gothic UI Semibold" pitchFamily="34" charset="-122"/>
                 <a:cs typeface="Yu Gothic UI Semibold" pitchFamily="34" charset="-120"/>
               </a:rPr>
-              <a:t>観点 A</a:t>
-            </a:r>
-            <a:endParaRPr lang="en-US" sz="1500" dirty="0"/>
+              <a:t>1</a:t>
+            </a:r>
+            <a:endParaRPr lang="en-US" sz="2000" dirty="0"/>
           </a:p>
         </p:txBody>
       </p:sp>
@@ -3985,24 +4464,24 @@
         </p:nvSpPr>
         <p:spPr>
           <a:xfrm>
-            <a:off x="594360" y="1892808"/>
-            <a:ext cx="2359152" cy="548640"/>
-          </a:xfrm>
-          <a:prstGeom prst="rect">
-            <a:avLst/>
-          </a:prstGeom>
-          <a:noFill/>
-          <a:ln/>
-        </p:spPr>
-        <p:txBody>
-          <a:bodyPr wrap="square" rtlCol="0" anchor="t"/>
+            <a:off x="1188720" y="1417320"/>
+            <a:ext cx="3154680" cy="502920"/>
+          </a:xfrm>
+          <a:prstGeom prst="rect">
+            <a:avLst/>
+          </a:prstGeom>
+          <a:noFill/>
+          <a:ln/>
+        </p:spPr>
+        <p:txBody>
+          <a:bodyPr wrap="square" rtlCol="0" anchor="ctr"/>
           <a:lstStyle/>
           <a:p>
             <a:pPr indent="0" marL="0">
               <a:buNone/>
             </a:pPr>
             <a:r>
-              <a:rPr lang="en-US" sz="1500" b="1" dirty="0">
+              <a:rPr lang="en-US" sz="1400" b="1" dirty="0">
                 <a:solidFill>
                   <a:srgbClr val="1F3A5F"/>
                 </a:solidFill>
@@ -4010,9 +4489,9 @@
                 <a:ea typeface="Yu Gothic UI Semibold" pitchFamily="34" charset="-122"/>
                 <a:cs typeface="Yu Gothic UI Semibold" pitchFamily="34" charset="-120"/>
               </a:rPr>
-              <a:t>A. セットアップ完了</a:t>
-            </a:r>
-            <a:endParaRPr lang="en-US" sz="1500" dirty="0"/>
+              <a:t>GAS を貼付けて動かす</a:t>
+            </a:r>
+            <a:endParaRPr lang="en-US" sz="1400" dirty="0"/>
           </a:p>
         </p:txBody>
       </p:sp>
@@ -4024,8 +4503,8 @@
         </p:nvSpPr>
         <p:spPr>
           <a:xfrm>
-            <a:off x="594360" y="2514600"/>
-            <a:ext cx="2359152" cy="1051560"/>
+            <a:off x="612648" y="2057400"/>
+            <a:ext cx="3666744" cy="525780"/>
           </a:xfrm>
           <a:prstGeom prst="rect">
             <a:avLst/>
@@ -4038,110 +4517,46 @@
           <a:lstStyle/>
           <a:p>
             <a:pPr indent="0" marL="0">
-              <a:buNone/>
-            </a:pPr>
-            <a:r>
-              <a:rPr lang="en-US" sz="1400" b="1" dirty="0">
-                <a:solidFill>
-                  <a:srgbClr val="0E7C86"/>
+              <a:spcAft>
+                <a:spcPts val="300"/>
+              </a:spcAft>
+              <a:buNone/>
+            </a:pPr>
+            <a:r>
+              <a:rPr lang="en-US" sz="1200" dirty="0">
+                <a:solidFill>
+                  <a:srgbClr val="1A1A1A"/>
                 </a:solidFill>
                 <a:latin typeface="Yu Gothic UI" pitchFamily="34" charset="0"/>
                 <a:ea typeface="Yu Gothic UI" pitchFamily="34" charset="-122"/>
                 <a:cs typeface="Yu Gothic UI" pitchFamily="34" charset="-120"/>
               </a:rPr>
-              <a:t>✓  </a:t>
-            </a:r>
-            <a:pPr indent="0" marL="0">
-              <a:buNone/>
-            </a:pPr>
-            <a:r>
-              <a:rPr lang="en-US" sz="1300" dirty="0">
-                <a:solidFill>
-                  <a:srgbClr val="1A1A1A"/>
-                </a:solidFill>
-                <a:latin typeface="Yu Gothic UI" pitchFamily="34" charset="0"/>
-                <a:ea typeface="Yu Gothic UI" pitchFamily="34" charset="-122"/>
-                <a:cs typeface="Yu Gothic UI" pitchFamily="34" charset="-120"/>
-              </a:rPr>
-              <a:t>testSetup が全項目 OK で返るか</a:t>
-            </a:r>
-            <a:endParaRPr lang="en-US" sz="1300" dirty="0"/>
-          </a:p>
-        </p:txBody>
-      </p:sp>
-      <p:sp>
-        <p:nvSpPr>
-          <p:cNvPr id="10" name="Text 8"/>
-          <p:cNvSpPr/>
-          <p:nvPr/>
-        </p:nvSpPr>
-        <p:spPr>
-          <a:xfrm>
-            <a:off x="594360" y="3611880"/>
-            <a:ext cx="2359152" cy="1097280"/>
-          </a:xfrm>
-          <a:prstGeom prst="rect">
-            <a:avLst/>
-          </a:prstGeom>
-          <a:noFill/>
-          <a:ln/>
-        </p:spPr>
-        <p:txBody>
-          <a:bodyPr wrap="square" rtlCol="0" anchor="t"/>
-          <a:lstStyle/>
-          <a:p>
-            <a:pPr indent="0" marL="0">
-              <a:buNone/>
-            </a:pPr>
-            <a:r>
-              <a:rPr lang="en-US" sz="1400" b="1" dirty="0">
-                <a:solidFill>
-                  <a:srgbClr val="E8A33D"/>
-                </a:solidFill>
-                <a:latin typeface="Yu Gothic UI" pitchFamily="34" charset="0"/>
-                <a:ea typeface="Yu Gothic UI" pitchFamily="34" charset="-122"/>
-                <a:cs typeface="Yu Gothic UI" pitchFamily="34" charset="-120"/>
-              </a:rPr>
-              <a:t>💡  </a:t>
-            </a:r>
-            <a:pPr indent="0" marL="0">
-              <a:buNone/>
-            </a:pPr>
-            <a:r>
-              <a:rPr lang="en-US" sz="1300" dirty="0">
-                <a:solidFill>
-                  <a:srgbClr val="1A1A1A"/>
-                </a:solidFill>
-                <a:latin typeface="Yu Gothic UI" pitchFamily="34" charset="0"/>
-                <a:ea typeface="Yu Gothic UI" pitchFamily="34" charset="-122"/>
-                <a:cs typeface="Yu Gothic UI" pitchFamily="34" charset="-120"/>
-              </a:rPr>
-              <a:t>「顧客カルテ 項目数」「前提テーブル 項目数」が期待値</a:t>
-            </a:r>
-            <a:endParaRPr lang="en-US" sz="1300" dirty="0"/>
-          </a:p>
-        </p:txBody>
-      </p:sp>
-      <p:sp>
-        <p:nvSpPr>
-          <p:cNvPr id="11" name="Shape 9"/>
-          <p:cNvSpPr/>
-          <p:nvPr/>
-        </p:nvSpPr>
-        <p:spPr>
-          <a:xfrm>
-            <a:off x="3246120" y="1325880"/>
-            <a:ext cx="2651760" cy="3474720"/>
+              <a:t>同梱の「Code_ライフプランAI.gs」を貼付けて 動作確認。</a:t>
+            </a:r>
+            <a:endParaRPr lang="en-US" sz="1200" dirty="0"/>
+          </a:p>
+        </p:txBody>
+      </p:sp>
+      <p:sp>
+        <p:nvSpPr>
+          <p:cNvPr id="10" name="Shape 8"/>
+          <p:cNvSpPr/>
+          <p:nvPr/>
+        </p:nvSpPr>
+        <p:spPr>
+          <a:xfrm>
+            <a:off x="4663440" y="1280160"/>
+            <a:ext cx="4069080" cy="1440180"/>
           </a:xfrm>
           <a:prstGeom prst="roundRect">
             <a:avLst>
-              <a:gd name="adj" fmla="val 3448"/>
+              <a:gd name="adj" fmla="val 5079"/>
             </a:avLst>
           </a:prstGeom>
           <a:solidFill>
             <a:srgbClr val="F4F6F9"/>
           </a:solidFill>
-          <a:ln w="15240">
+          <a:ln w="19050">
             <a:solidFill>
               <a:srgbClr val="E8A33D"/>
             </a:solidFill>
@@ -4151,16 +4566,16 @@
       </p:sp>
       <p:sp>
         <p:nvSpPr>
-          <p:cNvPr id="12" name="Shape 10"/>
-          <p:cNvSpPr/>
-          <p:nvPr/>
-        </p:nvSpPr>
-        <p:spPr>
-          <a:xfrm>
-            <a:off x="3246120" y="1325880"/>
-            <a:ext cx="2651760" cy="457200"/>
-          </a:xfrm>
-          <a:prstGeom prst="rect">
+          <p:cNvPr id="11" name="Shape 9"/>
+          <p:cNvSpPr/>
+          <p:nvPr/>
+        </p:nvSpPr>
+        <p:spPr>
+          <a:xfrm>
+            <a:off x="4809744" y="1426464"/>
+            <a:ext cx="502920" cy="502920"/>
+          </a:xfrm>
+          <a:prstGeom prst="ellipse">
             <a:avLst/>
           </a:prstGeom>
           <a:solidFill>
@@ -4171,14 +4586,14 @@
       </p:sp>
       <p:sp>
         <p:nvSpPr>
-          <p:cNvPr id="13" name="Text 11"/>
-          <p:cNvSpPr/>
-          <p:nvPr/>
-        </p:nvSpPr>
-        <p:spPr>
-          <a:xfrm>
-            <a:off x="3374136" y="1380744"/>
-            <a:ext cx="2395728" cy="365760"/>
+          <p:cNvPr id="12" name="Text 10"/>
+          <p:cNvSpPr/>
+          <p:nvPr/>
+        </p:nvSpPr>
+        <p:spPr>
+          <a:xfrm>
+            <a:off x="4809744" y="1426464"/>
+            <a:ext cx="502920" cy="502920"/>
           </a:xfrm>
           <a:prstGeom prst="rect">
             <a:avLst/>
@@ -4190,11 +4605,11 @@
           <a:bodyPr wrap="square" rtlCol="0" anchor="ctr"/>
           <a:lstStyle/>
           <a:p>
-            <a:pPr indent="0" marL="0">
-              <a:buNone/>
-            </a:pPr>
-            <a:r>
-              <a:rPr lang="en-US" sz="1500" b="1" dirty="0">
+            <a:pPr algn="ctr" indent="0" marL="0">
+              <a:buNone/>
+            </a:pPr>
+            <a:r>
+              <a:rPr lang="en-US" sz="2000" b="1" dirty="0">
                 <a:solidFill>
                   <a:srgbClr val="FFFFFF"/>
                 </a:solidFill>
@@ -4202,38 +4617,38 @@
                 <a:ea typeface="Yu Gothic UI Semibold" pitchFamily="34" charset="-122"/>
                 <a:cs typeface="Yu Gothic UI Semibold" pitchFamily="34" charset="-120"/>
               </a:rPr>
-              <a:t>観点 B</a:t>
-            </a:r>
-            <a:endParaRPr lang="en-US" sz="1500" dirty="0"/>
-          </a:p>
-        </p:txBody>
-      </p:sp>
-      <p:sp>
-        <p:nvSpPr>
-          <p:cNvPr id="14" name="Text 12"/>
-          <p:cNvSpPr/>
-          <p:nvPr/>
-        </p:nvSpPr>
-        <p:spPr>
-          <a:xfrm>
-            <a:off x="3429000" y="1892808"/>
-            <a:ext cx="2359152" cy="548640"/>
-          </a:xfrm>
-          <a:prstGeom prst="rect">
-            <a:avLst/>
-          </a:prstGeom>
-          <a:noFill/>
-          <a:ln/>
-        </p:spPr>
-        <p:txBody>
-          <a:bodyPr wrap="square" rtlCol="0" anchor="t"/>
+              <a:t>2</a:t>
+            </a:r>
+            <a:endParaRPr lang="en-US" sz="2000" dirty="0"/>
+          </a:p>
+        </p:txBody>
+      </p:sp>
+      <p:sp>
+        <p:nvSpPr>
+          <p:cNvPr id="13" name="Text 11"/>
+          <p:cNvSpPr/>
+          <p:nvPr/>
+        </p:nvSpPr>
+        <p:spPr>
+          <a:xfrm>
+            <a:off x="5440680" y="1417320"/>
+            <a:ext cx="3154680" cy="502920"/>
+          </a:xfrm>
+          <a:prstGeom prst="rect">
+            <a:avLst/>
+          </a:prstGeom>
+          <a:noFill/>
+          <a:ln/>
+        </p:spPr>
+        <p:txBody>
+          <a:bodyPr wrap="square" rtlCol="0" anchor="ctr"/>
           <a:lstStyle/>
           <a:p>
             <a:pPr indent="0" marL="0">
               <a:buNone/>
             </a:pPr>
             <a:r>
-              <a:rPr lang="en-US" sz="1500" b="1" dirty="0">
+              <a:rPr lang="en-US" sz="1400" b="1" dirty="0">
                 <a:solidFill>
                   <a:srgbClr val="1F3A5F"/>
                 </a:solidFill>
@@ -4241,22 +4656,22 @@
                 <a:ea typeface="Yu Gothic UI Semibold" pitchFamily="34" charset="-122"/>
                 <a:cs typeface="Yu Gothic UI Semibold" pitchFamily="34" charset="-120"/>
               </a:rPr>
-              <a:t>B. 基本動作</a:t>
-            </a:r>
-            <a:endParaRPr lang="en-US" sz="1500" dirty="0"/>
-          </a:p>
-        </p:txBody>
-      </p:sp>
-      <p:sp>
-        <p:nvSpPr>
-          <p:cNvPr id="15" name="Text 13"/>
-          <p:cNvSpPr/>
-          <p:nvPr/>
-        </p:nvSpPr>
-        <p:spPr>
-          <a:xfrm>
-            <a:off x="3429000" y="2514600"/>
-            <a:ext cx="2359152" cy="1051560"/>
+              <a:t>独自のアドバイスを組み込む</a:t>
+            </a:r>
+            <a:endParaRPr lang="en-US" sz="1400" dirty="0"/>
+          </a:p>
+        </p:txBody>
+      </p:sp>
+      <p:sp>
+        <p:nvSpPr>
+          <p:cNvPr id="14" name="Text 12"/>
+          <p:cNvSpPr/>
+          <p:nvPr/>
+        </p:nvSpPr>
+        <p:spPr>
+          <a:xfrm>
+            <a:off x="4864608" y="2057400"/>
+            <a:ext cx="3666744" cy="525780"/>
           </a:xfrm>
           <a:prstGeom prst="rect">
             <a:avLst/>
@@ -4269,110 +4684,46 @@
           <a:lstStyle/>
           <a:p>
             <a:pPr indent="0" marL="0">
-              <a:buNone/>
-            </a:pPr>
-            <a:r>
-              <a:rPr lang="en-US" sz="1400" b="1" dirty="0">
-                <a:solidFill>
-                  <a:srgbClr val="0E7C86"/>
+              <a:spcAft>
+                <a:spcPts val="300"/>
+              </a:spcAft>
+              <a:buNone/>
+            </a:pPr>
+            <a:r>
+              <a:rPr lang="en-US" sz="1200" dirty="0">
+                <a:solidFill>
+                  <a:srgbClr val="1A1A1A"/>
                 </a:solidFill>
                 <a:latin typeface="Yu Gothic UI" pitchFamily="34" charset="0"/>
                 <a:ea typeface="Yu Gothic UI" pitchFamily="34" charset="-122"/>
                 <a:cs typeface="Yu Gothic UI" pitchFamily="34" charset="-120"/>
               </a:rPr>
-              <a:t>✓  </a:t>
-            </a:r>
-            <a:pPr indent="0" marL="0">
-              <a:buNone/>
-            </a:pPr>
-            <a:r>
-              <a:rPr lang="en-US" sz="1300" dirty="0">
-                <a:solidFill>
-                  <a:srgbClr val="1A1A1A"/>
-                </a:solidFill>
-                <a:latin typeface="Yu Gothic UI" pitchFamily="34" charset="0"/>
-                <a:ea typeface="Yu Gothic UI" pitchFamily="34" charset="-122"/>
-                <a:cs typeface="Yu Gothic UI" pitchFamily="34" charset="-120"/>
-              </a:rPr>
-              <a:t>記入例で 40年CF が正しく出るか、破綻/最大貯蓄 の指標が妥当か</a:t>
-            </a:r>
-            <a:endParaRPr lang="en-US" sz="1300" dirty="0"/>
-          </a:p>
-        </p:txBody>
-      </p:sp>
-      <p:sp>
-        <p:nvSpPr>
-          <p:cNvPr id="16" name="Text 14"/>
-          <p:cNvSpPr/>
-          <p:nvPr/>
-        </p:nvSpPr>
-        <p:spPr>
-          <a:xfrm>
-            <a:off x="3429000" y="3611880"/>
-            <a:ext cx="2359152" cy="1097280"/>
-          </a:xfrm>
-          <a:prstGeom prst="rect">
-            <a:avLst/>
-          </a:prstGeom>
-          <a:noFill/>
-          <a:ln/>
-        </p:spPr>
-        <p:txBody>
-          <a:bodyPr wrap="square" rtlCol="0" anchor="t"/>
-          <a:lstStyle/>
-          <a:p>
-            <a:pPr indent="0" marL="0">
-              <a:buNone/>
-            </a:pPr>
-            <a:r>
-              <a:rPr lang="en-US" sz="1400" b="1" dirty="0">
-                <a:solidFill>
-                  <a:srgbClr val="E8A33D"/>
-                </a:solidFill>
-                <a:latin typeface="Yu Gothic UI" pitchFamily="34" charset="0"/>
-                <a:ea typeface="Yu Gothic UI" pitchFamily="34" charset="-122"/>
-                <a:cs typeface="Yu Gothic UI" pitchFamily="34" charset="-120"/>
-              </a:rPr>
-              <a:t>💡  </a:t>
-            </a:r>
-            <a:pPr indent="0" marL="0">
-              <a:buNone/>
-            </a:pPr>
-            <a:r>
-              <a:rPr lang="en-US" sz="1300" dirty="0">
-                <a:solidFill>
-                  <a:srgbClr val="1A1A1A"/>
-                </a:solidFill>
-                <a:latin typeface="Yu Gothic UI" pitchFamily="34" charset="0"/>
-                <a:ea typeface="Yu Gothic UI" pitchFamily="34" charset="-122"/>
-                <a:cs typeface="Yu Gothic UI" pitchFamily="34" charset="-120"/>
-              </a:rPr>
-              <a:t>「シミュレーション結果」シートに 40行 + サマリ + グラフ + 提案フック</a:t>
-            </a:r>
-            <a:endParaRPr lang="en-US" sz="1300" dirty="0"/>
-          </a:p>
-        </p:txBody>
-      </p:sp>
-      <p:sp>
-        <p:nvSpPr>
-          <p:cNvPr id="17" name="Shape 15"/>
-          <p:cNvSpPr/>
-          <p:nvPr/>
-        </p:nvSpPr>
-        <p:spPr>
-          <a:xfrm>
-            <a:off x="6080760" y="1325880"/>
-            <a:ext cx="2651760" cy="3474720"/>
+              <a:t>設計書の「独自アドバイス」を AIへの依頼文に追加。</a:t>
+            </a:r>
+            <a:endParaRPr lang="en-US" sz="1200" dirty="0"/>
+          </a:p>
+        </p:txBody>
+      </p:sp>
+      <p:sp>
+        <p:nvSpPr>
+          <p:cNvPr id="15" name="Shape 13"/>
+          <p:cNvSpPr/>
+          <p:nvPr/>
+        </p:nvSpPr>
+        <p:spPr>
+          <a:xfrm>
+            <a:off x="411480" y="2857500"/>
+            <a:ext cx="4069080" cy="1440180"/>
           </a:xfrm>
           <a:prstGeom prst="roundRect">
             <a:avLst>
-              <a:gd name="adj" fmla="val 3448"/>
+              <a:gd name="adj" fmla="val 5079"/>
             </a:avLst>
           </a:prstGeom>
           <a:solidFill>
             <a:srgbClr val="F4F6F9"/>
           </a:solidFill>
-          <a:ln w="15240">
+          <a:ln w="19050">
             <a:solidFill>
               <a:srgbClr val="7C5F8A"/>
             </a:solidFill>
@@ -4382,16 +4733,16 @@
       </p:sp>
       <p:sp>
         <p:nvSpPr>
-          <p:cNvPr id="18" name="Shape 16"/>
-          <p:cNvSpPr/>
-          <p:nvPr/>
-        </p:nvSpPr>
-        <p:spPr>
-          <a:xfrm>
-            <a:off x="6080760" y="1325880"/>
-            <a:ext cx="2651760" cy="457200"/>
-          </a:xfrm>
-          <a:prstGeom prst="rect">
+          <p:cNvPr id="16" name="Shape 14"/>
+          <p:cNvSpPr/>
+          <p:nvPr/>
+        </p:nvSpPr>
+        <p:spPr>
+          <a:xfrm>
+            <a:off x="557784" y="3003804"/>
+            <a:ext cx="502920" cy="502920"/>
+          </a:xfrm>
+          <a:prstGeom prst="ellipse">
             <a:avLst/>
           </a:prstGeom>
           <a:solidFill>
@@ -4402,14 +4753,14 @@
       </p:sp>
       <p:sp>
         <p:nvSpPr>
-          <p:cNvPr id="19" name="Text 17"/>
-          <p:cNvSpPr/>
-          <p:nvPr/>
-        </p:nvSpPr>
-        <p:spPr>
-          <a:xfrm>
-            <a:off x="6208776" y="1380744"/>
-            <a:ext cx="2395728" cy="365760"/>
+          <p:cNvPr id="17" name="Text 15"/>
+          <p:cNvSpPr/>
+          <p:nvPr/>
+        </p:nvSpPr>
+        <p:spPr>
+          <a:xfrm>
+            <a:off x="557784" y="3003804"/>
+            <a:ext cx="502920" cy="502920"/>
           </a:xfrm>
           <a:prstGeom prst="rect">
             <a:avLst/>
@@ -4421,11 +4772,11 @@
           <a:bodyPr wrap="square" rtlCol="0" anchor="ctr"/>
           <a:lstStyle/>
           <a:p>
-            <a:pPr indent="0" marL="0">
-              <a:buNone/>
-            </a:pPr>
-            <a:r>
-              <a:rPr lang="en-US" sz="1500" b="1" dirty="0">
+            <a:pPr algn="ctr" indent="0" marL="0">
+              <a:buNone/>
+            </a:pPr>
+            <a:r>
+              <a:rPr lang="en-US" sz="2000" b="1" dirty="0">
                 <a:solidFill>
                   <a:srgbClr val="FFFFFF"/>
                 </a:solidFill>
@@ -4433,38 +4784,38 @@
                 <a:ea typeface="Yu Gothic UI Semibold" pitchFamily="34" charset="-122"/>
                 <a:cs typeface="Yu Gothic UI Semibold" pitchFamily="34" charset="-120"/>
               </a:rPr>
-              <a:t>観点 C</a:t>
-            </a:r>
-            <a:endParaRPr lang="en-US" sz="1500" dirty="0"/>
-          </a:p>
-        </p:txBody>
-      </p:sp>
-      <p:sp>
-        <p:nvSpPr>
-          <p:cNvPr id="20" name="Text 18"/>
-          <p:cNvSpPr/>
-          <p:nvPr/>
-        </p:nvSpPr>
-        <p:spPr>
-          <a:xfrm>
-            <a:off x="6263640" y="1892808"/>
-            <a:ext cx="2359152" cy="548640"/>
-          </a:xfrm>
-          <a:prstGeom prst="rect">
-            <a:avLst/>
-          </a:prstGeom>
-          <a:noFill/>
-          <a:ln/>
-        </p:spPr>
-        <p:txBody>
-          <a:bodyPr wrap="square" rtlCol="0" anchor="t"/>
+              <a:t>3</a:t>
+            </a:r>
+            <a:endParaRPr lang="en-US" sz="2000" dirty="0"/>
+          </a:p>
+        </p:txBody>
+      </p:sp>
+      <p:sp>
+        <p:nvSpPr>
+          <p:cNvPr id="18" name="Text 16"/>
+          <p:cNvSpPr/>
+          <p:nvPr/>
+        </p:nvSpPr>
+        <p:spPr>
+          <a:xfrm>
+            <a:off x="1188720" y="2994660"/>
+            <a:ext cx="3154680" cy="502920"/>
+          </a:xfrm>
+          <a:prstGeom prst="rect">
+            <a:avLst/>
+          </a:prstGeom>
+          <a:noFill/>
+          <a:ln/>
+        </p:spPr>
+        <p:txBody>
+          <a:bodyPr wrap="square" rtlCol="0" anchor="ctr"/>
           <a:lstStyle/>
           <a:p>
             <a:pPr indent="0" marL="0">
               <a:buNone/>
             </a:pPr>
             <a:r>
-              <a:rPr lang="en-US" sz="1500" b="1" dirty="0">
+              <a:rPr lang="en-US" sz="1400" b="1" dirty="0">
                 <a:solidFill>
                   <a:srgbClr val="1F3A5F"/>
                 </a:solidFill>
@@ -4472,22 +4823,22 @@
                 <a:ea typeface="Yu Gothic UI Semibold" pitchFamily="34" charset="-122"/>
                 <a:cs typeface="Yu Gothic UI Semibold" pitchFamily="34" charset="-120"/>
               </a:rPr>
-              <a:t>C. 独自アドバイス反映</a:t>
-            </a:r>
-            <a:endParaRPr lang="en-US" sz="1500" dirty="0"/>
-          </a:p>
-        </p:txBody>
-      </p:sp>
-      <p:sp>
-        <p:nvSpPr>
-          <p:cNvPr id="21" name="Text 19"/>
-          <p:cNvSpPr/>
-          <p:nvPr/>
-        </p:nvSpPr>
-        <p:spPr>
-          <a:xfrm>
-            <a:off x="6263640" y="2514600"/>
-            <a:ext cx="2359152" cy="1051560"/>
+              <a:t>画面 と PDFレポートを追加</a:t>
+            </a:r>
+            <a:endParaRPr lang="en-US" sz="1400" dirty="0"/>
+          </a:p>
+        </p:txBody>
+      </p:sp>
+      <p:sp>
+        <p:nvSpPr>
+          <p:cNvPr id="19" name="Text 17"/>
+          <p:cNvSpPr/>
+          <p:nvPr/>
+        </p:nvSpPr>
+        <p:spPr>
+          <a:xfrm>
+            <a:off x="612648" y="3634740"/>
+            <a:ext cx="3666744" cy="525780"/>
           </a:xfrm>
           <a:prstGeom prst="rect">
             <a:avLst/>
@@ -4500,87 +4851,84 @@
           <a:lstStyle/>
           <a:p>
             <a:pPr indent="0" marL="0">
-              <a:buNone/>
-            </a:pPr>
-            <a:r>
-              <a:rPr lang="en-US" sz="1400" b="1" dirty="0">
-                <a:solidFill>
-                  <a:srgbClr val="0E7C86"/>
+              <a:spcAft>
+                <a:spcPts val="300"/>
+              </a:spcAft>
+              <a:buNone/>
+            </a:pPr>
+            <a:r>
+              <a:rPr lang="en-US" sz="1200" dirty="0">
+                <a:solidFill>
+                  <a:srgbClr val="1A1A1A"/>
                 </a:solidFill>
                 <a:latin typeface="Yu Gothic UI" pitchFamily="34" charset="0"/>
                 <a:ea typeface="Yu Gothic UI" pitchFamily="34" charset="-122"/>
                 <a:cs typeface="Yu Gothic UI" pitchFamily="34" charset="-120"/>
               </a:rPr>
-              <a:t>✓  </a:t>
-            </a:r>
-            <a:pPr indent="0" marL="0">
-              <a:buNone/>
-            </a:pPr>
-            <a:r>
-              <a:rPr lang="en-US" sz="1300" dirty="0">
-                <a:solidFill>
-                  <a:srgbClr val="1A1A1A"/>
-                </a:solidFill>
-                <a:latin typeface="Yu Gothic UI" pitchFamily="34" charset="0"/>
-                <a:ea typeface="Yu Gothic UI" pitchFamily="34" charset="-122"/>
-                <a:cs typeface="Yu Gothic UI" pitchFamily="34" charset="-120"/>
-              </a:rPr>
-              <a:t>W1で書いた独自アドバイスがプロンプトに組み込まれ、AI 出力に反映されているか</a:t>
-            </a:r>
-            <a:endParaRPr lang="en-US" sz="1300" dirty="0"/>
-          </a:p>
-        </p:txBody>
-      </p:sp>
-      <p:sp>
-        <p:nvSpPr>
-          <p:cNvPr id="22" name="Text 20"/>
-          <p:cNvSpPr/>
-          <p:nvPr/>
-        </p:nvSpPr>
-        <p:spPr>
-          <a:xfrm>
-            <a:off x="6263640" y="3611880"/>
-            <a:ext cx="2359152" cy="1097280"/>
-          </a:xfrm>
-          <a:prstGeom prst="rect">
-            <a:avLst/>
-          </a:prstGeom>
-          <a:noFill/>
-          <a:ln/>
-        </p:spPr>
-        <p:txBody>
-          <a:bodyPr wrap="square" rtlCol="0" anchor="t"/>
-          <a:lstStyle/>
-          <a:p>
-            <a:pPr indent="0" marL="0">
-              <a:buNone/>
-            </a:pPr>
-            <a:r>
-              <a:rPr lang="en-US" sz="1400" b="1" dirty="0">
-                <a:solidFill>
-                  <a:srgbClr val="E8A33D"/>
-                </a:solidFill>
-                <a:latin typeface="Yu Gothic UI" pitchFamily="34" charset="0"/>
-                <a:ea typeface="Yu Gothic UI" pitchFamily="34" charset="-122"/>
-                <a:cs typeface="Yu Gothic UI" pitchFamily="34" charset="-120"/>
-              </a:rPr>
-              <a:t>💡  </a:t>
-            </a:r>
-            <a:pPr indent="0" marL="0">
-              <a:buNone/>
-            </a:pPr>
-            <a:r>
-              <a:rPr lang="en-US" sz="1300" dirty="0">
-                <a:solidFill>
-                  <a:srgbClr val="1A1A1A"/>
-                </a:solidFill>
-                <a:latin typeface="Yu Gothic UI" pitchFamily="34" charset="0"/>
-                <a:ea typeface="Yu Gothic UI" pitchFamily="34" charset="-122"/>
-                <a:cs typeface="Yu Gothic UI" pitchFamily="34" charset="-120"/>
-              </a:rPr>
-              <a:t>保険提案フックに 代理店らしい提案 が出ているか目視</a:t>
-            </a:r>
-            <a:endParaRPr lang="en-US" sz="1300" dirty="0"/>
+              <a:t>設計書で選んだ画面(サイドバー / Webアプリ)を実装。</a:t>
+            </a:r>
+            <a:endParaRPr lang="en-US" sz="1200" dirty="0"/>
+          </a:p>
+        </p:txBody>
+      </p:sp>
+      <p:sp>
+        <p:nvSpPr>
+          <p:cNvPr id="20" name="Shape 18"/>
+          <p:cNvSpPr/>
+          <p:nvPr/>
+        </p:nvSpPr>
+        <p:spPr>
+          <a:xfrm>
+            <a:off x="411480" y="4434840"/>
+            <a:ext cx="8321040" cy="411480"/>
+          </a:xfrm>
+          <a:prstGeom prst="roundRect">
+            <a:avLst>
+              <a:gd name="adj" fmla="val 13333"/>
+            </a:avLst>
+          </a:prstGeom>
+          <a:solidFill>
+            <a:srgbClr val="E8A33D"/>
+          </a:solidFill>
+          <a:ln/>
+        </p:spPr>
+      </p:sp>
+      <p:sp>
+        <p:nvSpPr>
+          <p:cNvPr id="21" name="Text 19"/>
+          <p:cNvSpPr/>
+          <p:nvPr/>
+        </p:nvSpPr>
+        <p:spPr>
+          <a:xfrm>
+            <a:off x="411480" y="4434840"/>
+            <a:ext cx="8321040" cy="411480"/>
+          </a:xfrm>
+          <a:prstGeom prst="rect">
+            <a:avLst/>
+          </a:prstGeom>
+          <a:noFill/>
+          <a:ln/>
+        </p:spPr>
+        <p:txBody>
+          <a:bodyPr wrap="square" rtlCol="0" anchor="ctr"/>
+          <a:lstStyle/>
+          <a:p>
+            <a:pPr algn="ctr" indent="0" marL="0">
+              <a:buNone/>
+            </a:pPr>
+            <a:r>
+              <a:rPr lang="en-US" sz="1200" b="1" dirty="0">
+                <a:solidFill>
+                  <a:srgbClr val="1F3A5F"/>
+                </a:solidFill>
+                <a:latin typeface="Yu Gothic UI Semibold" pitchFamily="34" charset="0"/>
+                <a:ea typeface="Yu Gothic UI Semibold" pitchFamily="34" charset="-122"/>
+                <a:cs typeface="Yu Gothic UI Semibold" pitchFamily="34" charset="-120"/>
+              </a:rPr>
+              <a:t>★ 動きが変な所は AI に貼付けて「直して」と頼む — それがバイブコーディング</a:t>
+            </a:r>
+            <a:endParaRPr lang="en-US" sz="1200" dirty="0"/>
           </a:p>
         </p:txBody>
       </p:sp>
@@ -4644,8 +4992,8 @@
         </p:nvSpPr>
         <p:spPr>
           <a:xfrm>
-            <a:off x="411480" y="201168"/>
-            <a:ext cx="8412480" cy="594360"/>
+            <a:off x="411480" y="182880"/>
+            <a:ext cx="8412480" cy="548640"/>
           </a:xfrm>
           <a:prstGeom prst="rect">
             <a:avLst/>
@@ -4661,7 +5009,7 @@
               <a:buNone/>
             </a:pPr>
             <a:r>
-              <a:rPr lang="en-US" sz="2600" b="1" dirty="0">
+              <a:rPr lang="en-US" sz="2400" b="1" dirty="0">
                 <a:solidFill>
                   <a:srgbClr val="1F3A5F"/>
                 </a:solidFill>
@@ -4669,34 +5017,73 @@
                 <a:ea typeface="Yu Gothic UI Semibold" pitchFamily="34" charset="-122"/>
                 <a:cs typeface="Yu Gothic UI Semibold" pitchFamily="34" charset="-120"/>
               </a:rPr>
-              <a:t>演習2 UI と 顧客向けレポート出力 をバイブコーディング</a:t>
-            </a:r>
-            <a:endParaRPr lang="en-US" sz="2600" dirty="0"/>
-          </a:p>
-        </p:txBody>
-      </p:sp>
-      <p:sp>
-        <p:nvSpPr>
-          <p:cNvPr id="4" name="Shape 2"/>
-          <p:cNvSpPr/>
-          <p:nvPr/>
-        </p:nvSpPr>
-        <p:spPr>
-          <a:xfrm>
-            <a:off x="411480" y="1005840"/>
-            <a:ext cx="4160520" cy="1783080"/>
+              <a:t>演習1 ─ シミュレーション本体を動かす</a:t>
+            </a:r>
+            <a:endParaRPr lang="en-US" sz="2400" dirty="0"/>
+          </a:p>
+        </p:txBody>
+      </p:sp>
+      <p:sp>
+        <p:nvSpPr>
+          <p:cNvPr id="4" name="Text 2"/>
+          <p:cNvSpPr/>
+          <p:nvPr/>
+        </p:nvSpPr>
+        <p:spPr>
+          <a:xfrm>
+            <a:off x="411480" y="749808"/>
+            <a:ext cx="8412480" cy="365760"/>
+          </a:xfrm>
+          <a:prstGeom prst="rect">
+            <a:avLst/>
+          </a:prstGeom>
+          <a:noFill/>
+          <a:ln/>
+        </p:spPr>
+        <p:txBody>
+          <a:bodyPr wrap="square" rtlCol="0" anchor="ctr"/>
+          <a:lstStyle/>
+          <a:p>
+            <a:pPr indent="0" marL="0">
+              <a:buNone/>
+            </a:pPr>
+            <a:r>
+              <a:rPr lang="en-US" sz="1300" i="1" dirty="0">
+                <a:solidFill>
+                  <a:srgbClr val="555555"/>
+                </a:solidFill>
+                <a:latin typeface="Yu Gothic UI" pitchFamily="34" charset="0"/>
+                <a:ea typeface="Yu Gothic UI" pitchFamily="34" charset="-122"/>
+                <a:cs typeface="Yu Gothic UI" pitchFamily="34" charset="-120"/>
+              </a:rPr>
+              <a:t>GAS を貼付けて、記入例で 40年家計表が出るところまで</a:t>
+            </a:r>
+            <a:endParaRPr lang="en-US" sz="1300" dirty="0"/>
+          </a:p>
+        </p:txBody>
+      </p:sp>
+      <p:sp>
+        <p:nvSpPr>
+          <p:cNvPr id="5" name="Shape 3"/>
+          <p:cNvSpPr/>
+          <p:nvPr/>
+        </p:nvSpPr>
+        <p:spPr>
+          <a:xfrm>
+            <a:off x="411480" y="1234440"/>
+            <a:ext cx="3429000" cy="1691640"/>
           </a:xfrm>
           <a:prstGeom prst="roundRect">
             <a:avLst>
-              <a:gd name="adj" fmla="val 4103"/>
+              <a:gd name="adj" fmla="val 4324"/>
             </a:avLst>
           </a:prstGeom>
           <a:solidFill>
             <a:srgbClr val="F4F6F9"/>
           </a:solidFill>
-          <a:ln w="6350">
+          <a:ln w="25400">
             <a:solidFill>
-              <a:srgbClr val="D7DCE3"/>
+              <a:srgbClr val="1F3A5F"/>
             </a:solidFill>
             <a:prstDash val="solid"/>
           </a:ln>
@@ -4704,34 +5091,14 @@
       </p:sp>
       <p:sp>
         <p:nvSpPr>
-          <p:cNvPr id="5" name="Shape 3"/>
-          <p:cNvSpPr/>
-          <p:nvPr/>
-        </p:nvSpPr>
-        <p:spPr>
-          <a:xfrm>
-            <a:off x="411480" y="1005840"/>
-            <a:ext cx="91440" cy="1783080"/>
-          </a:xfrm>
-          <a:prstGeom prst="rect">
-            <a:avLst/>
-          </a:prstGeom>
-          <a:solidFill>
-            <a:srgbClr val="1F3A5F"/>
-          </a:solidFill>
-          <a:ln/>
-        </p:spPr>
-      </p:sp>
-      <p:sp>
-        <p:nvSpPr>
           <p:cNvPr id="6" name="Text 4"/>
           <p:cNvSpPr/>
           <p:nvPr/>
         </p:nvSpPr>
         <p:spPr>
           <a:xfrm>
-            <a:off x="612648" y="1097280"/>
-            <a:ext cx="3849624" cy="384048"/>
+            <a:off x="548640" y="1325880"/>
+            <a:ext cx="3154680" cy="365760"/>
           </a:xfrm>
           <a:prstGeom prst="rect">
             <a:avLst/>
@@ -4747,7 +5114,7 @@
               <a:buNone/>
             </a:pPr>
             <a:r>
-              <a:rPr lang="en-US" sz="1600" b="1" dirty="0">
+              <a:rPr lang="en-US" sz="1400" b="1" dirty="0">
                 <a:solidFill>
                   <a:srgbClr val="1F3A5F"/>
                 </a:solidFill>
@@ -4755,9 +5122,9 @@
                 <a:ea typeface="Yu Gothic UI Semibold" pitchFamily="34" charset="-122"/>
                 <a:cs typeface="Yu Gothic UI Semibold" pitchFamily="34" charset="-120"/>
               </a:rPr>
-              <a:t>📍 シチュエーション</a:t>
-            </a:r>
-            <a:endParaRPr lang="en-US" sz="1600" dirty="0"/>
+              <a:t>📌 シチュエーション</a:t>
+            </a:r>
+            <a:endParaRPr lang="en-US" sz="1400" dirty="0"/>
           </a:p>
         </p:txBody>
       </p:sp>
@@ -4769,8 +5136,8 @@
         </p:nvSpPr>
         <p:spPr>
           <a:xfrm>
-            <a:off x="649224" y="1536192"/>
-            <a:ext cx="3703320" cy="1161288"/>
+            <a:off x="548640" y="1709928"/>
+            <a:ext cx="3154680" cy="1143000"/>
           </a:xfrm>
           <a:prstGeom prst="rect">
             <a:avLst/>
@@ -4784,12 +5151,12 @@
           <a:p>
             <a:pPr indent="0" marL="0">
               <a:spcAft>
-                <a:spcPts val="400"/>
+                <a:spcPts val="300"/>
               </a:spcAft>
               <a:buNone/>
             </a:pPr>
             <a:r>
-              <a:rPr lang="en-US" sz="1400" dirty="0">
+              <a:rPr lang="en-US" sz="1200" dirty="0">
                 <a:solidFill>
                   <a:srgbClr val="1A1A1A"/>
                 </a:solidFill>
@@ -4797,19 +5164,28 @@
                 <a:ea typeface="Yu Gothic UI" pitchFamily="34" charset="-122"/>
                 <a:cs typeface="Yu Gothic UI" pitchFamily="34" charset="-120"/>
               </a:rPr>
-              <a:t>W1 で選んだ UI(サイドバー / WebApp)を実装、</a:t>
-            </a:r>
-            <a:endParaRPr lang="en-US" sz="1400" dirty="0"/>
+              <a:t>スプレッドシートに GAS を貼付けます。</a:t>
+            </a:r>
+            <a:endParaRPr lang="en-US" sz="1200" dirty="0"/>
           </a:p>
           <a:p>
             <a:pPr indent="0" marL="0">
               <a:spcAft>
-                <a:spcPts val="400"/>
+                <a:spcPts val="300"/>
               </a:spcAft>
               <a:buNone/>
             </a:pPr>
-            <a:r>
-              <a:rPr lang="en-US" sz="1400" dirty="0">
+            <a:endParaRPr lang="en-US" sz="1200" dirty="0"/>
+          </a:p>
+          <a:p>
+            <a:pPr indent="0" marL="0">
+              <a:spcAft>
+                <a:spcPts val="300"/>
+              </a:spcAft>
+              <a:buNone/>
+            </a:pPr>
+            <a:r>
+              <a:rPr lang="en-US" sz="1200" dirty="0">
                 <a:solidFill>
                   <a:srgbClr val="1A1A1A"/>
                 </a:solidFill>
@@ -4817,9 +5193,58 @@
                 <a:ea typeface="Yu Gothic UI" pitchFamily="34" charset="-122"/>
                 <a:cs typeface="Yu Gothic UI" pitchFamily="34" charset="-120"/>
               </a:rPr>
-              <a:t>「▶ 実行」ボタンから 30秒で結果が返る + Google Docs レポートが生成される 状態を作る。</a:t>
-            </a:r>
-            <a:endParaRPr lang="en-US" sz="1400" dirty="0"/>
+              <a:t>「Gemini APIのキー」という 特別なパスワードを設定 して、</a:t>
+            </a:r>
+            <a:endParaRPr lang="en-US" sz="1200" dirty="0"/>
+          </a:p>
+          <a:p>
+            <a:pPr indent="0" marL="0">
+              <a:spcAft>
+                <a:spcPts val="300"/>
+              </a:spcAft>
+              <a:buNone/>
+            </a:pPr>
+            <a:r>
+              <a:rPr lang="en-US" sz="1200" dirty="0">
+                <a:solidFill>
+                  <a:srgbClr val="1A1A1A"/>
+                </a:solidFill>
+                <a:latin typeface="Yu Gothic UI" pitchFamily="34" charset="0"/>
+                <a:ea typeface="Yu Gothic UI" pitchFamily="34" charset="-122"/>
+                <a:cs typeface="Yu Gothic UI" pitchFamily="34" charset="-120"/>
+              </a:rPr>
+              <a:t>ボタン1つで シミュレーションが走る状態を作ります。</a:t>
+            </a:r>
+            <a:endParaRPr lang="en-US" sz="1200" dirty="0"/>
+          </a:p>
+          <a:p>
+            <a:pPr indent="0" marL="0">
+              <a:spcAft>
+                <a:spcPts val="300"/>
+              </a:spcAft>
+              <a:buNone/>
+            </a:pPr>
+            <a:endParaRPr lang="en-US" sz="1200" dirty="0"/>
+          </a:p>
+          <a:p>
+            <a:pPr indent="0" marL="0">
+              <a:spcAft>
+                <a:spcPts val="300"/>
+              </a:spcAft>
+              <a:buNone/>
+            </a:pPr>
+            <a:r>
+              <a:rPr lang="en-US" sz="1200" dirty="0">
+                <a:solidFill>
+                  <a:srgbClr val="1A1A1A"/>
+                </a:solidFill>
+                <a:latin typeface="Yu Gothic UI" pitchFamily="34" charset="0"/>
+                <a:ea typeface="Yu Gothic UI" pitchFamily="34" charset="-122"/>
+                <a:cs typeface="Yu Gothic UI" pitchFamily="34" charset="-120"/>
+              </a:rPr>
+              <a:t>まずは記入見本のお客様データで動作確認します。</a:t>
+            </a:r>
+            <a:endParaRPr lang="en-US" sz="1200" dirty="0"/>
           </a:p>
         </p:txBody>
       </p:sp>
@@ -4831,20 +5256,20 @@
         </p:nvSpPr>
         <p:spPr>
           <a:xfrm>
-            <a:off x="411480" y="2880360"/>
-            <a:ext cx="4160520" cy="2011680"/>
+            <a:off x="411480" y="3063240"/>
+            <a:ext cx="3429000" cy="1874520"/>
           </a:xfrm>
           <a:prstGeom prst="roundRect">
             <a:avLst>
-              <a:gd name="adj" fmla="val 3636"/>
+              <a:gd name="adj" fmla="val 3902"/>
             </a:avLst>
           </a:prstGeom>
           <a:solidFill>
-            <a:srgbClr val="F4F6F9"/>
-          </a:solidFill>
-          <a:ln w="6350">
+            <a:srgbClr val="FFF3E0"/>
+          </a:solidFill>
+          <a:ln w="19050">
             <a:solidFill>
-              <a:srgbClr val="D7DCE3"/>
+              <a:srgbClr val="E8A33D"/>
             </a:solidFill>
             <a:prstDash val="solid"/>
           </a:ln>
@@ -4852,34 +5277,14 @@
       </p:sp>
       <p:sp>
         <p:nvSpPr>
-          <p:cNvPr id="9" name="Shape 7"/>
-          <p:cNvSpPr/>
-          <p:nvPr/>
-        </p:nvSpPr>
-        <p:spPr>
-          <a:xfrm>
-            <a:off x="411480" y="2880360"/>
-            <a:ext cx="91440" cy="2011680"/>
-          </a:xfrm>
-          <a:prstGeom prst="rect">
-            <a:avLst/>
-          </a:prstGeom>
-          <a:solidFill>
-            <a:srgbClr val="E8A33D"/>
-          </a:solidFill>
-          <a:ln/>
-        </p:spPr>
-      </p:sp>
-      <p:sp>
-        <p:nvSpPr>
-          <p:cNvPr id="10" name="Text 8"/>
-          <p:cNvSpPr/>
-          <p:nvPr/>
-        </p:nvSpPr>
-        <p:spPr>
-          <a:xfrm>
-            <a:off x="612648" y="2971800"/>
-            <a:ext cx="3849624" cy="384048"/>
+          <p:cNvPr id="9" name="Text 7"/>
+          <p:cNvSpPr/>
+          <p:nvPr/>
+        </p:nvSpPr>
+        <p:spPr>
+          <a:xfrm>
+            <a:off x="548640" y="3154680"/>
+            <a:ext cx="3154680" cy="365760"/>
           </a:xfrm>
           <a:prstGeom prst="rect">
             <a:avLst/>
@@ -4895,7 +5300,7 @@
               <a:buNone/>
             </a:pPr>
             <a:r>
-              <a:rPr lang="en-US" sz="1600" b="1" dirty="0">
+              <a:rPr lang="en-US" sz="1300" b="1" dirty="0">
                 <a:solidFill>
                   <a:srgbClr val="E8A33D"/>
                 </a:solidFill>
@@ -4903,22 +5308,22 @@
                 <a:ea typeface="Yu Gothic UI Semibold" pitchFamily="34" charset="-122"/>
                 <a:cs typeface="Yu Gothic UI Semibold" pitchFamily="34" charset="-120"/>
               </a:rPr>
-              <a:t>💭 プロンプトのヒント</a:t>
-            </a:r>
-            <a:endParaRPr lang="en-US" sz="1600" dirty="0"/>
-          </a:p>
-        </p:txBody>
-      </p:sp>
-      <p:sp>
-        <p:nvSpPr>
-          <p:cNvPr id="11" name="Text 9"/>
-          <p:cNvSpPr/>
-          <p:nvPr/>
-        </p:nvSpPr>
-        <p:spPr>
-          <a:xfrm>
-            <a:off x="649224" y="3410712"/>
-            <a:ext cx="3703320" cy="1389888"/>
+              <a:t>💬 AIとの壁打ちヒント</a:t>
+            </a:r>
+            <a:endParaRPr lang="en-US" sz="1300" dirty="0"/>
+          </a:p>
+        </p:txBody>
+      </p:sp>
+      <p:sp>
+        <p:nvSpPr>
+          <p:cNvPr id="10" name="Text 8"/>
+          <p:cNvSpPr/>
+          <p:nvPr/>
+        </p:nvSpPr>
+        <p:spPr>
+          <a:xfrm>
+            <a:off x="621792" y="3538728"/>
+            <a:ext cx="3081528" cy="1325880"/>
           </a:xfrm>
           <a:prstGeom prst="rect">
             <a:avLst/>
@@ -4935,10 +5340,10 @@
                 <a:spcPts val="400"/>
               </a:spcAft>
               <a:buSzPct val="100000"/>
-              <a:buChar char="●"/>
-            </a:pPr>
-            <a:r>
-              <a:rPr lang="en-US" sz="1400" dirty="0">
+              <a:buChar char="•"/>
+            </a:pPr>
+            <a:r>
+              <a:rPr lang="en-US" sz="1100" dirty="0">
                 <a:solidFill>
                   <a:srgbClr val="1A1A1A"/>
                 </a:solidFill>
@@ -4946,9 +5351,9 @@
                 <a:ea typeface="Yu Gothic UI" pitchFamily="34" charset="-122"/>
                 <a:cs typeface="Yu Gothic UI" pitchFamily="34" charset="-120"/>
               </a:rPr>
-              <a:t>サイドバーは スプシメニュー起動、WebApp は URL アクセス — 選んだ方だけ実装で OK</a:t>
-            </a:r>
-            <a:endParaRPr lang="en-US" sz="1400" dirty="0"/>
+              <a:t>エラーが出たら Logger のログを AI に貼って「これ直して」</a:t>
+            </a:r>
+            <a:endParaRPr lang="en-US" sz="1100" dirty="0"/>
           </a:p>
           <a:p>
             <a:pPr marL="342900" indent="-342900">
@@ -4956,10 +5361,10 @@
                 <a:spcPts val="400"/>
               </a:spcAft>
               <a:buSzPct val="100000"/>
-              <a:buChar char="●"/>
-            </a:pPr>
-            <a:r>
-              <a:rPr lang="en-US" sz="1400" dirty="0">
+              <a:buChar char="•"/>
+            </a:pPr>
+            <a:r>
+              <a:rPr lang="en-US" sz="1100" dirty="0">
                 <a:solidFill>
                   <a:srgbClr val="1A1A1A"/>
                 </a:solidFill>
@@ -4967,9 +5372,9 @@
                 <a:ea typeface="Yu Gothic UI" pitchFamily="34" charset="-122"/>
                 <a:cs typeface="Yu Gothic UI" pitchFamily="34" charset="-120"/>
               </a:rPr>
-              <a:t>HtmlService のイベントは google.script.run.関数名() で呼ぶ (第11回で学習済み)</a:t>
-            </a:r>
-            <a:endParaRPr lang="en-US" sz="1400" dirty="0"/>
+              <a:t>APIキーは絶対に コードに直書きしない(スクリプトプロパティ経由)</a:t>
+            </a:r>
+            <a:endParaRPr lang="en-US" sz="1100" dirty="0"/>
           </a:p>
           <a:p>
             <a:pPr marL="342900" indent="-342900">
@@ -4977,10 +5382,10 @@
                 <a:spcPts val="400"/>
               </a:spcAft>
               <a:buSzPct val="100000"/>
-              <a:buChar char="●"/>
-            </a:pPr>
-            <a:r>
-              <a:rPr lang="en-US" sz="1400" dirty="0">
+              <a:buChar char="•"/>
+            </a:pPr>
+            <a:r>
+              <a:rPr lang="en-US" sz="1100" dirty="0">
                 <a:solidFill>
                   <a:srgbClr val="1A1A1A"/>
                 </a:solidFill>
@@ -4988,9 +5393,9 @@
                 <a:ea typeface="Yu Gothic UI" pitchFamily="34" charset="-122"/>
                 <a:cs typeface="Yu Gothic UI" pitchFamily="34" charset="-120"/>
               </a:rPr>
-              <a:t>レポート生成の Google Docs は 数十秒かかる、ぼーっと待つ</a:t>
-            </a:r>
-            <a:endParaRPr lang="en-US" sz="1400" dirty="0"/>
+              <a:t>「安全ではない...」画面 → 自分のスクリプトだから許可でOK</a:t>
+            </a:r>
+            <a:endParaRPr lang="en-US" sz="1100" dirty="0"/>
           </a:p>
           <a:p>
             <a:pPr marL="342900" indent="-342900">
@@ -4998,10 +5403,10 @@
                 <a:spcPts val="400"/>
               </a:spcAft>
               <a:buSzPct val="100000"/>
-              <a:buChar char="●"/>
-            </a:pPr>
-            <a:r>
-              <a:rPr lang="en-US" sz="1400" dirty="0">
+              <a:buChar char="•"/>
+            </a:pPr>
+            <a:r>
+              <a:rPr lang="en-US" sz="1100" dirty="0">
                 <a:solidFill>
                   <a:srgbClr val="1A1A1A"/>
                 </a:solidFill>
@@ -5009,34 +5414,34 @@
                 <a:ea typeface="Yu Gothic UI" pitchFamily="34" charset="-122"/>
                 <a:cs typeface="Yu Gothic UI" pitchFamily="34" charset="-120"/>
               </a:rPr>
-              <a:t>AGENCY_NAME を Code_レポート生成.gs の冒頭で設定 → 全レポートに反映</a:t>
-            </a:r>
-            <a:endParaRPr lang="en-US" sz="1400" dirty="0"/>
-          </a:p>
-        </p:txBody>
-      </p:sp>
-      <p:sp>
-        <p:nvSpPr>
-          <p:cNvPr id="12" name="Shape 10"/>
-          <p:cNvSpPr/>
-          <p:nvPr/>
-        </p:nvSpPr>
-        <p:spPr>
-          <a:xfrm>
-            <a:off x="4663440" y="1005840"/>
-            <a:ext cx="4160520" cy="3886200"/>
+              <a:t>独自アドバイスの追加は AI に「これをプロンプトに追加して」と依頼</a:t>
+            </a:r>
+            <a:endParaRPr lang="en-US" sz="1100" dirty="0"/>
+          </a:p>
+        </p:txBody>
+      </p:sp>
+      <p:sp>
+        <p:nvSpPr>
+          <p:cNvPr id="11" name="Shape 9"/>
+          <p:cNvSpPr/>
+          <p:nvPr/>
+        </p:nvSpPr>
+        <p:spPr>
+          <a:xfrm>
+            <a:off x="4069080" y="1234440"/>
+            <a:ext cx="4663440" cy="3566160"/>
           </a:xfrm>
           <a:prstGeom prst="roundRect">
             <a:avLst>
-              <a:gd name="adj" fmla="val 1882"/>
+              <a:gd name="adj" fmla="val 2051"/>
             </a:avLst>
           </a:prstGeom>
           <a:solidFill>
-            <a:srgbClr val="F4F6F9"/>
-          </a:solidFill>
-          <a:ln w="6350">
+            <a:srgbClr val="FFFFFF"/>
+          </a:solidFill>
+          <a:ln w="25400">
             <a:solidFill>
-              <a:srgbClr val="D7DCE3"/>
+              <a:srgbClr val="0E7C86"/>
             </a:solidFill>
             <a:prstDash val="solid"/>
           </a:ln>
@@ -5044,14 +5449,14 @@
       </p:sp>
       <p:sp>
         <p:nvSpPr>
-          <p:cNvPr id="13" name="Shape 11"/>
-          <p:cNvSpPr/>
-          <p:nvPr/>
-        </p:nvSpPr>
-        <p:spPr>
-          <a:xfrm>
-            <a:off x="4663440" y="1005840"/>
-            <a:ext cx="91440" cy="3886200"/>
+          <p:cNvPr id="12" name="Shape 10"/>
+          <p:cNvSpPr/>
+          <p:nvPr/>
+        </p:nvSpPr>
+        <p:spPr>
+          <a:xfrm>
+            <a:off x="4069080" y="1234440"/>
+            <a:ext cx="4663440" cy="502920"/>
           </a:xfrm>
           <a:prstGeom prst="rect">
             <a:avLst/>
@@ -5064,14 +5469,14 @@
       </p:sp>
       <p:sp>
         <p:nvSpPr>
-          <p:cNvPr id="14" name="Text 12"/>
-          <p:cNvSpPr/>
-          <p:nvPr/>
-        </p:nvSpPr>
-        <p:spPr>
-          <a:xfrm>
-            <a:off x="4864608" y="1097280"/>
-            <a:ext cx="3849624" cy="384048"/>
+          <p:cNvPr id="13" name="Text 11"/>
+          <p:cNvSpPr/>
+          <p:nvPr/>
+        </p:nvSpPr>
+        <p:spPr>
+          <a:xfrm>
+            <a:off x="4206240" y="1234440"/>
+            <a:ext cx="4389120" cy="502920"/>
           </a:xfrm>
           <a:prstGeom prst="rect">
             <a:avLst/>
@@ -5087,30 +5492,30 @@
               <a:buNone/>
             </a:pPr>
             <a:r>
-              <a:rPr lang="en-US" sz="1600" b="1" dirty="0">
-                <a:solidFill>
-                  <a:srgbClr val="0E7C86"/>
+              <a:rPr lang="en-US" sz="1400" b="1" dirty="0">
+                <a:solidFill>
+                  <a:srgbClr val="FFFFFF"/>
                 </a:solidFill>
                 <a:latin typeface="Yu Gothic UI Semibold" pitchFamily="34" charset="0"/>
                 <a:ea typeface="Yu Gothic UI Semibold" pitchFamily="34" charset="-122"/>
                 <a:cs typeface="Yu Gothic UI Semibold" pitchFamily="34" charset="-120"/>
               </a:rPr>
-              <a:t>🎯 AIに作ってもらいたいもの</a:t>
-            </a:r>
-            <a:endParaRPr lang="en-US" sz="1600" dirty="0"/>
-          </a:p>
-        </p:txBody>
-      </p:sp>
-      <p:sp>
-        <p:nvSpPr>
-          <p:cNvPr id="15" name="Text 13"/>
-          <p:cNvSpPr/>
-          <p:nvPr/>
-        </p:nvSpPr>
-        <p:spPr>
-          <a:xfrm>
-            <a:off x="4901184" y="1536192"/>
-            <a:ext cx="3703320" cy="3264408"/>
+              <a:t>🎯 今日やること</a:t>
+            </a:r>
+            <a:endParaRPr lang="en-US" sz="1400" dirty="0"/>
+          </a:p>
+        </p:txBody>
+      </p:sp>
+      <p:sp>
+        <p:nvSpPr>
+          <p:cNvPr id="14" name="Text 12"/>
+          <p:cNvSpPr/>
+          <p:nvPr/>
+        </p:nvSpPr>
+        <p:spPr>
+          <a:xfrm>
+            <a:off x="4288536" y="1874520"/>
+            <a:ext cx="4224528" cy="2834640"/>
           </a:xfrm>
           <a:prstGeom prst="rect">
             <a:avLst/>
@@ -5124,13 +5529,13 @@
           <a:p>
             <a:pPr marL="342900" indent="-342900">
               <a:spcAft>
-                <a:spcPts val="400"/>
+                <a:spcPts val="600"/>
               </a:spcAft>
               <a:buSzPct val="100000"/>
-              <a:buChar char="●"/>
-            </a:pPr>
-            <a:r>
-              <a:rPr lang="en-US" sz="1400" dirty="0">
+              <a:buChar char="■"/>
+            </a:pPr>
+            <a:r>
+              <a:rPr lang="en-US" sz="1200" dirty="0">
                 <a:solidFill>
                   <a:srgbClr val="1A1A1A"/>
                 </a:solidFill>
@@ -5138,20 +5543,20 @@
                 <a:ea typeface="Yu Gothic UI" pitchFamily="34" charset="-122"/>
                 <a:cs typeface="Yu Gothic UI" pitchFamily="34" charset="-120"/>
               </a:rPr>
-              <a:t>UI選択が A(サイドバー): 同梱 Sidebar.html を貼付、メニューから起動テスト</a:t>
-            </a:r>
-            <a:endParaRPr lang="en-US" sz="1400" dirty="0"/>
+              <a:t>ライフプラン入力テンプレをスプシで開く</a:t>
+            </a:r>
+            <a:endParaRPr lang="en-US" sz="1200" dirty="0"/>
           </a:p>
           <a:p>
             <a:pPr marL="342900" indent="-342900">
               <a:spcAft>
-                <a:spcPts val="400"/>
+                <a:spcPts val="600"/>
               </a:spcAft>
               <a:buSzPct val="100000"/>
-              <a:buChar char="●"/>
-            </a:pPr>
-            <a:r>
-              <a:rPr lang="en-US" sz="1400" dirty="0">
+              <a:buChar char="■"/>
+            </a:pPr>
+            <a:r>
+              <a:rPr lang="en-US" sz="1200" dirty="0">
                 <a:solidFill>
                   <a:srgbClr val="1A1A1A"/>
                 </a:solidFill>
@@ -5159,20 +5564,20 @@
                 <a:ea typeface="Yu Gothic UI" pitchFamily="34" charset="-122"/>
                 <a:cs typeface="Yu Gothic UI" pitchFamily="34" charset="-120"/>
               </a:rPr>
-              <a:t>UI選択が B(WebApp): 同梱 WebApp.html + W2_Code_WebApp追加.gs を貼付、W3 でデプロイ</a:t>
-            </a:r>
-            <a:endParaRPr lang="en-US" sz="1400" dirty="0"/>
+              <a:t>拡張機能 → Apps Script で「Code_ライフプランAI.gs」を貼付</a:t>
+            </a:r>
+            <a:endParaRPr lang="en-US" sz="1200" dirty="0"/>
           </a:p>
           <a:p>
             <a:pPr marL="342900" indent="-342900">
               <a:spcAft>
-                <a:spcPts val="400"/>
+                <a:spcPts val="600"/>
               </a:spcAft>
               <a:buSzPct val="100000"/>
-              <a:buChar char="●"/>
-            </a:pPr>
-            <a:r>
-              <a:rPr lang="en-US" sz="1400" dirty="0">
+              <a:buChar char="■"/>
+            </a:pPr>
+            <a:r>
+              <a:rPr lang="en-US" sz="1200" dirty="0">
                 <a:solidFill>
                   <a:srgbClr val="1A1A1A"/>
                 </a:solidFill>
@@ -5180,20 +5585,20 @@
                 <a:ea typeface="Yu Gothic UI" pitchFamily="34" charset="-122"/>
                 <a:cs typeface="Yu Gothic UI" pitchFamily="34" charset="-120"/>
               </a:rPr>
-              <a:t>顧客向けPDFレポート: 同梱 Code_レポート生成.gs を貼付、メニュー「📄 顧客向けレポート出力」で動作確認</a:t>
-            </a:r>
-            <a:endParaRPr lang="en-US" sz="1400" dirty="0"/>
+              <a:t>Google AI Studio で Gemini APIキーを発行 → スクリプトプロパティに登録</a:t>
+            </a:r>
+            <a:endParaRPr lang="en-US" sz="1200" dirty="0"/>
           </a:p>
           <a:p>
             <a:pPr marL="342900" indent="-342900">
               <a:spcAft>
-                <a:spcPts val="400"/>
+                <a:spcPts val="600"/>
               </a:spcAft>
               <a:buSzPct val="100000"/>
-              <a:buChar char="●"/>
-            </a:pPr>
-            <a:r>
-              <a:rPr lang="en-US" sz="1400" dirty="0">
+              <a:buChar char="■"/>
+            </a:pPr>
+            <a:r>
+              <a:rPr lang="en-US" sz="1200" dirty="0">
                 <a:solidFill>
                   <a:srgbClr val="1A1A1A"/>
                 </a:solidFill>
@@ -5201,20 +5606,20 @@
                 <a:ea typeface="Yu Gothic UI" pitchFamily="34" charset="-122"/>
                 <a:cs typeface="Yu Gothic UI" pitchFamily="34" charset="-120"/>
               </a:rPr>
-              <a:t>サイドバー/WebApp から 実行→結果表示→レポート出力 の一連が回ることを確認</a:t>
-            </a:r>
-            <a:endParaRPr lang="en-US" sz="1400" dirty="0"/>
+              <a:t>testSetup関数で権限承認 → メニュー「ライフプランAI」表示確認</a:t>
+            </a:r>
+            <a:endParaRPr lang="en-US" sz="1200" dirty="0"/>
           </a:p>
           <a:p>
             <a:pPr marL="342900" indent="-342900">
               <a:spcAft>
-                <a:spcPts val="400"/>
+                <a:spcPts val="600"/>
               </a:spcAft>
               <a:buSzPct val="100000"/>
-              <a:buChar char="●"/>
-            </a:pPr>
-            <a:r>
-              <a:rPr lang="en-US" sz="1400" dirty="0">
+              <a:buChar char="■"/>
+            </a:pPr>
+            <a:r>
+              <a:rPr lang="en-US" sz="1200" dirty="0">
                 <a:solidFill>
                   <a:srgbClr val="1A1A1A"/>
                 </a:solidFill>
@@ -5222,9 +5627,9 @@
                 <a:ea typeface="Yu Gothic UI" pitchFamily="34" charset="-122"/>
                 <a:cs typeface="Yu Gothic UI" pitchFamily="34" charset="-120"/>
               </a:rPr>
-              <a:t>ここまでで機能実装は完了、W3 でデプロイ・テストへ</a:t>
-            </a:r>
-            <a:endParaRPr lang="en-US" sz="1400" dirty="0"/>
+              <a:t>「▶ シミュレーション実行」で 40年家計表が出ることを確認</a:t>
+            </a:r>
+            <a:endParaRPr lang="en-US" sz="1200" dirty="0"/>
           </a:p>
         </p:txBody>
       </p:sp>
@@ -5288,8 +5693,8 @@
         </p:nvSpPr>
         <p:spPr>
           <a:xfrm>
-            <a:off x="411480" y="201168"/>
-            <a:ext cx="8412480" cy="594360"/>
+            <a:off x="411480" y="182880"/>
+            <a:ext cx="8412480" cy="548640"/>
           </a:xfrm>
           <a:prstGeom prst="rect">
             <a:avLst/>
@@ -5305,7 +5710,7 @@
               <a:buNone/>
             </a:pPr>
             <a:r>
-              <a:rPr lang="en-US" sz="2600" b="1" dirty="0">
+              <a:rPr lang="en-US" sz="2400" b="1" dirty="0">
                 <a:solidFill>
                   <a:srgbClr val="1F3A5F"/>
                 </a:solidFill>
@@ -5313,9 +5718,9 @@
                 <a:ea typeface="Yu Gothic UI Semibold" pitchFamily="34" charset="-122"/>
                 <a:cs typeface="Yu Gothic UI Semibold" pitchFamily="34" charset="-120"/>
               </a:rPr>
-              <a:t>演習2 UI と 顧客向けレポート出力 をバイブコーディング — 観点別チェック</a:t>
-            </a:r>
-            <a:endParaRPr lang="en-US" sz="2600" dirty="0"/>
+              <a:t>演習1 の 完了チェック</a:t>
+            </a:r>
+            <a:endParaRPr lang="en-US" sz="2400" dirty="0"/>
           </a:p>
         </p:txBody>
       </p:sp>
@@ -5327,7 +5732,7 @@
         </p:nvSpPr>
         <p:spPr>
           <a:xfrm>
-            <a:off x="411480" y="804672"/>
+            <a:off x="411480" y="749808"/>
             <a:ext cx="8412480" cy="365760"/>
           </a:xfrm>
           <a:prstGeom prst="rect">
@@ -5344,7 +5749,7 @@
               <a:buNone/>
             </a:pPr>
             <a:r>
-              <a:rPr lang="en-US" sz="1500" i="1" dirty="0">
+              <a:rPr lang="en-US" sz="1300" i="1" dirty="0">
                 <a:solidFill>
                   <a:srgbClr val="555555"/>
                 </a:solidFill>
@@ -5352,9 +5757,9 @@
                 <a:ea typeface="Yu Gothic UI" pitchFamily="34" charset="-122"/>
                 <a:cs typeface="Yu Gothic UI" pitchFamily="34" charset="-120"/>
               </a:rPr>
-              <a:t>プロンプトをさらにブラッシュアップ — 3観点でセルフチェック</a:t>
-            </a:r>
-            <a:endParaRPr lang="en-US" sz="1500" dirty="0"/>
+              <a:t>ここができていれば、演習2 に進めます</a:t>
+            </a:r>
+            <a:endParaRPr lang="en-US" sz="1300" dirty="0"/>
           </a:p>
         </p:txBody>
       </p:sp>
@@ -5366,18 +5771,18 @@
         </p:nvSpPr>
         <p:spPr>
           <a:xfrm>
-            <a:off x="411480" y="1325880"/>
-            <a:ext cx="2651760" cy="3474720"/>
+            <a:off x="411480" y="1280160"/>
+            <a:ext cx="4046220" cy="3017520"/>
           </a:xfrm>
           <a:prstGeom prst="roundRect">
             <a:avLst>
-              <a:gd name="adj" fmla="val 3448"/>
+              <a:gd name="adj" fmla="val 3030"/>
             </a:avLst>
           </a:prstGeom>
           <a:solidFill>
-            <a:srgbClr val="F4F6F9"/>
-          </a:solidFill>
-          <a:ln w="15240">
+            <a:srgbClr val="E6F4EA"/>
+          </a:solidFill>
+          <a:ln w="25400">
             <a:solidFill>
               <a:srgbClr val="0E7C86"/>
             </a:solidFill>
@@ -5393,8 +5798,8 @@
         </p:nvSpPr>
         <p:spPr>
           <a:xfrm>
-            <a:off x="411480" y="1325880"/>
-            <a:ext cx="2651760" cy="457200"/>
+            <a:off x="411480" y="1280160"/>
+            <a:ext cx="4046220" cy="502920"/>
           </a:xfrm>
           <a:prstGeom prst="rect">
             <a:avLst/>
@@ -5413,8 +5818,8 @@
         </p:nvSpPr>
         <p:spPr>
           <a:xfrm>
-            <a:off x="539496" y="1380744"/>
-            <a:ext cx="2395728" cy="365760"/>
+            <a:off x="411480" y="1280160"/>
+            <a:ext cx="4046220" cy="502920"/>
           </a:xfrm>
           <a:prstGeom prst="rect">
             <a:avLst/>
@@ -5426,11 +5831,11 @@
           <a:bodyPr wrap="square" rtlCol="0" anchor="ctr"/>
           <a:lstStyle/>
           <a:p>
-            <a:pPr indent="0" marL="0">
-              <a:buNone/>
-            </a:pPr>
-            <a:r>
-              <a:rPr lang="en-US" sz="1500" b="1" dirty="0">
+            <a:pPr algn="ctr" indent="0" marL="0">
+              <a:buNone/>
+            </a:pPr>
+            <a:r>
+              <a:rPr lang="en-US" sz="1400" b="1" dirty="0">
                 <a:solidFill>
                   <a:srgbClr val="FFFFFF"/>
                 </a:solidFill>
@@ -5438,9 +5843,9 @@
                 <a:ea typeface="Yu Gothic UI Semibold" pitchFamily="34" charset="-122"/>
                 <a:cs typeface="Yu Gothic UI Semibold" pitchFamily="34" charset="-120"/>
               </a:rPr>
-              <a:t>観点 A</a:t>
-            </a:r>
-            <a:endParaRPr lang="en-US" sz="1500" dirty="0"/>
+              <a:t>✅ できていればOK</a:t>
+            </a:r>
+            <a:endParaRPr lang="en-US" sz="1400" dirty="0"/>
           </a:p>
         </p:txBody>
       </p:sp>
@@ -5452,8 +5857,8 @@
         </p:nvSpPr>
         <p:spPr>
           <a:xfrm>
-            <a:off x="594360" y="1892808"/>
-            <a:ext cx="2359152" cy="548640"/>
+            <a:off x="594360" y="1938528"/>
+            <a:ext cx="3680460" cy="2240280"/>
           </a:xfrm>
           <a:prstGeom prst="rect">
             <a:avLst/>
@@ -5465,34 +5870,187 @@
           <a:bodyPr wrap="square" rtlCol="0" anchor="t"/>
           <a:lstStyle/>
           <a:p>
-            <a:pPr indent="0" marL="0">
-              <a:buNone/>
-            </a:pPr>
-            <a:r>
-              <a:rPr lang="en-US" sz="1500" b="1" dirty="0">
-                <a:solidFill>
-                  <a:srgbClr val="1F3A5F"/>
+            <a:pPr marL="342900" indent="-342900">
+              <a:spcAft>
+                <a:spcPts val="800"/>
+              </a:spcAft>
+              <a:buSzPct val="100000"/>
+              <a:buChar char="•"/>
+            </a:pPr>
+            <a:r>
+              <a:rPr lang="en-US" sz="1300" dirty="0">
+                <a:solidFill>
+                  <a:srgbClr val="1A1A1A"/>
+                </a:solidFill>
+                <a:latin typeface="Yu Gothic UI" pitchFamily="34" charset="0"/>
+                <a:ea typeface="Yu Gothic UI" pitchFamily="34" charset="-122"/>
+                <a:cs typeface="Yu Gothic UI" pitchFamily="34" charset="-120"/>
+              </a:rPr>
+              <a:t>testSetup が全項目 OK で通っている</a:t>
+            </a:r>
+            <a:endParaRPr lang="en-US" sz="1300" dirty="0"/>
+          </a:p>
+          <a:p>
+            <a:pPr marL="342900" indent="-342900">
+              <a:spcAft>
+                <a:spcPts val="800"/>
+              </a:spcAft>
+              <a:buSzPct val="100000"/>
+              <a:buChar char="•"/>
+            </a:pPr>
+            <a:r>
+              <a:rPr lang="en-US" sz="1300" dirty="0">
+                <a:solidFill>
+                  <a:srgbClr val="1A1A1A"/>
+                </a:solidFill>
+                <a:latin typeface="Yu Gothic UI" pitchFamily="34" charset="0"/>
+                <a:ea typeface="Yu Gothic UI" pitchFamily="34" charset="-122"/>
+                <a:cs typeface="Yu Gothic UI" pitchFamily="34" charset="-120"/>
+              </a:rPr>
+              <a:t>「▶ シミュレーション実行」で 40年家計表が出る</a:t>
+            </a:r>
+            <a:endParaRPr lang="en-US" sz="1300" dirty="0"/>
+          </a:p>
+          <a:p>
+            <a:pPr marL="342900" indent="-342900">
+              <a:spcAft>
+                <a:spcPts val="800"/>
+              </a:spcAft>
+              <a:buSzPct val="100000"/>
+              <a:buChar char="•"/>
+            </a:pPr>
+            <a:r>
+              <a:rPr lang="en-US" sz="1300" dirty="0">
+                <a:solidFill>
+                  <a:srgbClr val="1A1A1A"/>
+                </a:solidFill>
+                <a:latin typeface="Yu Gothic UI" pitchFamily="34" charset="0"/>
+                <a:ea typeface="Yu Gothic UI" pitchFamily="34" charset="-122"/>
+                <a:cs typeface="Yu Gothic UI" pitchFamily="34" charset="-120"/>
+              </a:rPr>
+              <a:t>貯蓄残高の折れ線グラフが自動生成されている</a:t>
+            </a:r>
+            <a:endParaRPr lang="en-US" sz="1300" dirty="0"/>
+          </a:p>
+          <a:p>
+            <a:pPr marL="342900" indent="-342900">
+              <a:spcAft>
+                <a:spcPts val="800"/>
+              </a:spcAft>
+              <a:buSzPct val="100000"/>
+              <a:buChar char="•"/>
+            </a:pPr>
+            <a:r>
+              <a:rPr lang="en-US" sz="1300" dirty="0">
+                <a:solidFill>
+                  <a:srgbClr val="1A1A1A"/>
+                </a:solidFill>
+                <a:latin typeface="Yu Gothic UI" pitchFamily="34" charset="0"/>
+                <a:ea typeface="Yu Gothic UI" pitchFamily="34" charset="-122"/>
+                <a:cs typeface="Yu Gothic UI" pitchFamily="34" charset="-120"/>
+              </a:rPr>
+              <a:t>独自アドバイスが 保険提案フックに反映されている</a:t>
+            </a:r>
+            <a:endParaRPr lang="en-US" sz="1300" dirty="0"/>
+          </a:p>
+        </p:txBody>
+      </p:sp>
+      <p:sp>
+        <p:nvSpPr>
+          <p:cNvPr id="9" name="Shape 7"/>
+          <p:cNvSpPr/>
+          <p:nvPr/>
+        </p:nvSpPr>
+        <p:spPr>
+          <a:xfrm>
+            <a:off x="4686300" y="1280160"/>
+            <a:ext cx="4046220" cy="3017520"/>
+          </a:xfrm>
+          <a:prstGeom prst="roundRect">
+            <a:avLst>
+              <a:gd name="adj" fmla="val 3030"/>
+            </a:avLst>
+          </a:prstGeom>
+          <a:solidFill>
+            <a:srgbClr val="FDECEA"/>
+          </a:solidFill>
+          <a:ln w="25400">
+            <a:solidFill>
+              <a:srgbClr val="C76B7A"/>
+            </a:solidFill>
+            <a:prstDash val="solid"/>
+          </a:ln>
+        </p:spPr>
+      </p:sp>
+      <p:sp>
+        <p:nvSpPr>
+          <p:cNvPr id="10" name="Shape 8"/>
+          <p:cNvSpPr/>
+          <p:nvPr/>
+        </p:nvSpPr>
+        <p:spPr>
+          <a:xfrm>
+            <a:off x="4686300" y="1280160"/>
+            <a:ext cx="4046220" cy="502920"/>
+          </a:xfrm>
+          <a:prstGeom prst="rect">
+            <a:avLst/>
+          </a:prstGeom>
+          <a:solidFill>
+            <a:srgbClr val="C76B7A"/>
+          </a:solidFill>
+          <a:ln/>
+        </p:spPr>
+      </p:sp>
+      <p:sp>
+        <p:nvSpPr>
+          <p:cNvPr id="11" name="Text 9"/>
+          <p:cNvSpPr/>
+          <p:nvPr/>
+        </p:nvSpPr>
+        <p:spPr>
+          <a:xfrm>
+            <a:off x="4686300" y="1280160"/>
+            <a:ext cx="4046220" cy="502920"/>
+          </a:xfrm>
+          <a:prstGeom prst="rect">
+            <a:avLst/>
+          </a:prstGeom>
+          <a:noFill/>
+          <a:ln/>
+        </p:spPr>
+        <p:txBody>
+          <a:bodyPr wrap="square" rtlCol="0" anchor="ctr"/>
+          <a:lstStyle/>
+          <a:p>
+            <a:pPr algn="ctr" indent="0" marL="0">
+              <a:buNone/>
+            </a:pPr>
+            <a:r>
+              <a:rPr lang="en-US" sz="1400" b="1" dirty="0">
+                <a:solidFill>
+                  <a:srgbClr val="FFFFFF"/>
                 </a:solidFill>
                 <a:latin typeface="Yu Gothic UI Semibold" pitchFamily="34" charset="0"/>
                 <a:ea typeface="Yu Gothic UI Semibold" pitchFamily="34" charset="-122"/>
                 <a:cs typeface="Yu Gothic UI Semibold" pitchFamily="34" charset="-120"/>
               </a:rPr>
-              <a:t>A. UI 動作</a:t>
-            </a:r>
-            <a:endParaRPr lang="en-US" sz="1500" dirty="0"/>
-          </a:p>
-        </p:txBody>
-      </p:sp>
-      <p:sp>
-        <p:nvSpPr>
-          <p:cNvPr id="9" name="Text 7"/>
-          <p:cNvSpPr/>
-          <p:nvPr/>
-        </p:nvSpPr>
-        <p:spPr>
-          <a:xfrm>
-            <a:off x="594360" y="2514600"/>
-            <a:ext cx="2359152" cy="1051560"/>
+              <a:t>⚠️ 漏れがあると</a:t>
+            </a:r>
+            <a:endParaRPr lang="en-US" sz="1400" dirty="0"/>
+          </a:p>
+        </p:txBody>
+      </p:sp>
+      <p:sp>
+        <p:nvSpPr>
+          <p:cNvPr id="12" name="Text 10"/>
+          <p:cNvSpPr/>
+          <p:nvPr/>
+        </p:nvSpPr>
+        <p:spPr>
+          <a:xfrm>
+            <a:off x="4869180" y="1938528"/>
+            <a:ext cx="3680460" cy="2240280"/>
           </a:xfrm>
           <a:prstGeom prst="rect">
             <a:avLst/>
@@ -5504,22 +6062,33 @@
           <a:bodyPr wrap="square" rtlCol="0" anchor="t"/>
           <a:lstStyle/>
           <a:p>
-            <a:pPr indent="0" marL="0">
-              <a:buNone/>
-            </a:pPr>
-            <a:r>
-              <a:rPr lang="en-US" sz="1400" b="1" dirty="0">
-                <a:solidFill>
-                  <a:srgbClr val="0E7C86"/>
+            <a:pPr marL="342900" indent="-342900">
+              <a:spcAft>
+                <a:spcPts val="800"/>
+              </a:spcAft>
+              <a:buSzPct val="100000"/>
+              <a:buChar char="•"/>
+            </a:pPr>
+            <a:r>
+              <a:rPr lang="en-US" sz="1300" dirty="0">
+                <a:solidFill>
+                  <a:srgbClr val="1A1A1A"/>
                 </a:solidFill>
                 <a:latin typeface="Yu Gothic UI" pitchFamily="34" charset="0"/>
                 <a:ea typeface="Yu Gothic UI" pitchFamily="34" charset="-122"/>
                 <a:cs typeface="Yu Gothic UI" pitchFamily="34" charset="-120"/>
               </a:rPr>
-              <a:t>✓  </a:t>
-            </a:r>
-            <a:pPr indent="0" marL="0">
-              <a:buNone/>
+              <a:t>APIキーが未設定 → シミュレーション動かない</a:t>
+            </a:r>
+            <a:endParaRPr lang="en-US" sz="1300" dirty="0"/>
+          </a:p>
+          <a:p>
+            <a:pPr marL="342900" indent="-342900">
+              <a:spcAft>
+                <a:spcPts val="800"/>
+              </a:spcAft>
+              <a:buSzPct val="100000"/>
+              <a:buChar char="•"/>
             </a:pPr>
             <a:r>
               <a:rPr lang="en-US" sz="1300" dirty="0">
@@ -5530,49 +6099,38 @@
                 <a:ea typeface="Yu Gothic UI" pitchFamily="34" charset="-122"/>
                 <a:cs typeface="Yu Gothic UI" pitchFamily="34" charset="-120"/>
               </a:rPr>
-              <a:t>選んだ UI が動く(実行ボタン→結果表示)</a:t>
+              <a:t>APIキーをコードに直書き → 漏洩リスク、絶対NG</a:t>
             </a:r>
             <a:endParaRPr lang="en-US" sz="1300" dirty="0"/>
           </a:p>
-        </p:txBody>
-      </p:sp>
-      <p:sp>
-        <p:nvSpPr>
-          <p:cNvPr id="10" name="Text 8"/>
-          <p:cNvSpPr/>
-          <p:nvPr/>
-        </p:nvSpPr>
-        <p:spPr>
-          <a:xfrm>
-            <a:off x="594360" y="3611880"/>
-            <a:ext cx="2359152" cy="1097280"/>
-          </a:xfrm>
-          <a:prstGeom prst="rect">
-            <a:avLst/>
-          </a:prstGeom>
-          <a:noFill/>
-          <a:ln/>
-        </p:spPr>
-        <p:txBody>
-          <a:bodyPr wrap="square" rtlCol="0" anchor="t"/>
-          <a:lstStyle/>
-          <a:p>
-            <a:pPr indent="0" marL="0">
-              <a:buNone/>
-            </a:pPr>
-            <a:r>
-              <a:rPr lang="en-US" sz="1400" b="1" dirty="0">
-                <a:solidFill>
-                  <a:srgbClr val="E8A33D"/>
+          <a:p>
+            <a:pPr marL="342900" indent="-342900">
+              <a:spcAft>
+                <a:spcPts val="800"/>
+              </a:spcAft>
+              <a:buSzPct val="100000"/>
+              <a:buChar char="•"/>
+            </a:pPr>
+            <a:r>
+              <a:rPr lang="en-US" sz="1300" dirty="0">
+                <a:solidFill>
+                  <a:srgbClr val="1A1A1A"/>
                 </a:solidFill>
                 <a:latin typeface="Yu Gothic UI" pitchFamily="34" charset="0"/>
                 <a:ea typeface="Yu Gothic UI" pitchFamily="34" charset="-122"/>
                 <a:cs typeface="Yu Gothic UI" pitchFamily="34" charset="-120"/>
               </a:rPr>
-              <a:t>💡  </a:t>
-            </a:r>
-            <a:pPr indent="0" marL="0">
-              <a:buNone/>
+              <a:t>独自アドバイスなしで実行 → 汎用的な提案しか出ない</a:t>
+            </a:r>
+            <a:endParaRPr lang="en-US" sz="1300" dirty="0"/>
+          </a:p>
+          <a:p>
+            <a:pPr marL="342900" indent="-342900">
+              <a:spcAft>
+                <a:spcPts val="800"/>
+              </a:spcAft>
+              <a:buSzPct val="100000"/>
+              <a:buChar char="•"/>
             </a:pPr>
             <a:r>
               <a:rPr lang="en-US" sz="1300" dirty="0">
@@ -5583,469 +6141,7 @@
                 <a:ea typeface="Yu Gothic UI" pitchFamily="34" charset="-122"/>
                 <a:cs typeface="Yu Gothic UI" pitchFamily="34" charset="-120"/>
               </a:rPr>
-              <a:t>エラーが出た時のユーザー通知が親切か</a:t>
-            </a:r>
-            <a:endParaRPr lang="en-US" sz="1300" dirty="0"/>
-          </a:p>
-        </p:txBody>
-      </p:sp>
-      <p:sp>
-        <p:nvSpPr>
-          <p:cNvPr id="11" name="Shape 9"/>
-          <p:cNvSpPr/>
-          <p:nvPr/>
-        </p:nvSpPr>
-        <p:spPr>
-          <a:xfrm>
-            <a:off x="3246120" y="1325880"/>
-            <a:ext cx="2651760" cy="3474720"/>
-          </a:xfrm>
-          <a:prstGeom prst="roundRect">
-            <a:avLst>
-              <a:gd name="adj" fmla="val 3448"/>
-            </a:avLst>
-          </a:prstGeom>
-          <a:solidFill>
-            <a:srgbClr val="F4F6F9"/>
-          </a:solidFill>
-          <a:ln w="15240">
-            <a:solidFill>
-              <a:srgbClr val="E8A33D"/>
-            </a:solidFill>
-            <a:prstDash val="solid"/>
-          </a:ln>
-        </p:spPr>
-      </p:sp>
-      <p:sp>
-        <p:nvSpPr>
-          <p:cNvPr id="12" name="Shape 10"/>
-          <p:cNvSpPr/>
-          <p:nvPr/>
-        </p:nvSpPr>
-        <p:spPr>
-          <a:xfrm>
-            <a:off x="3246120" y="1325880"/>
-            <a:ext cx="2651760" cy="457200"/>
-          </a:xfrm>
-          <a:prstGeom prst="rect">
-            <a:avLst/>
-          </a:prstGeom>
-          <a:solidFill>
-            <a:srgbClr val="E8A33D"/>
-          </a:solidFill>
-          <a:ln/>
-        </p:spPr>
-      </p:sp>
-      <p:sp>
-        <p:nvSpPr>
-          <p:cNvPr id="13" name="Text 11"/>
-          <p:cNvSpPr/>
-          <p:nvPr/>
-        </p:nvSpPr>
-        <p:spPr>
-          <a:xfrm>
-            <a:off x="3374136" y="1380744"/>
-            <a:ext cx="2395728" cy="365760"/>
-          </a:xfrm>
-          <a:prstGeom prst="rect">
-            <a:avLst/>
-          </a:prstGeom>
-          <a:noFill/>
-          <a:ln/>
-        </p:spPr>
-        <p:txBody>
-          <a:bodyPr wrap="square" rtlCol="0" anchor="ctr"/>
-          <a:lstStyle/>
-          <a:p>
-            <a:pPr indent="0" marL="0">
-              <a:buNone/>
-            </a:pPr>
-            <a:r>
-              <a:rPr lang="en-US" sz="1500" b="1" dirty="0">
-                <a:solidFill>
-                  <a:srgbClr val="FFFFFF"/>
-                </a:solidFill>
-                <a:latin typeface="Yu Gothic UI Semibold" pitchFamily="34" charset="0"/>
-                <a:ea typeface="Yu Gothic UI Semibold" pitchFamily="34" charset="-122"/>
-                <a:cs typeface="Yu Gothic UI Semibold" pitchFamily="34" charset="-120"/>
-              </a:rPr>
-              <a:t>観点 B</a:t>
-            </a:r>
-            <a:endParaRPr lang="en-US" sz="1500" dirty="0"/>
-          </a:p>
-        </p:txBody>
-      </p:sp>
-      <p:sp>
-        <p:nvSpPr>
-          <p:cNvPr id="14" name="Text 12"/>
-          <p:cNvSpPr/>
-          <p:nvPr/>
-        </p:nvSpPr>
-        <p:spPr>
-          <a:xfrm>
-            <a:off x="3429000" y="1892808"/>
-            <a:ext cx="2359152" cy="548640"/>
-          </a:xfrm>
-          <a:prstGeom prst="rect">
-            <a:avLst/>
-          </a:prstGeom>
-          <a:noFill/>
-          <a:ln/>
-        </p:spPr>
-        <p:txBody>
-          <a:bodyPr wrap="square" rtlCol="0" anchor="t"/>
-          <a:lstStyle/>
-          <a:p>
-            <a:pPr indent="0" marL="0">
-              <a:buNone/>
-            </a:pPr>
-            <a:r>
-              <a:rPr lang="en-US" sz="1500" b="1" dirty="0">
-                <a:solidFill>
-                  <a:srgbClr val="1F3A5F"/>
-                </a:solidFill>
-                <a:latin typeface="Yu Gothic UI Semibold" pitchFamily="34" charset="0"/>
-                <a:ea typeface="Yu Gothic UI Semibold" pitchFamily="34" charset="-122"/>
-                <a:cs typeface="Yu Gothic UI Semibold" pitchFamily="34" charset="-120"/>
-              </a:rPr>
-              <a:t>B. レポート品質</a:t>
-            </a:r>
-            <a:endParaRPr lang="en-US" sz="1500" dirty="0"/>
-          </a:p>
-        </p:txBody>
-      </p:sp>
-      <p:sp>
-        <p:nvSpPr>
-          <p:cNvPr id="15" name="Text 13"/>
-          <p:cNvSpPr/>
-          <p:nvPr/>
-        </p:nvSpPr>
-        <p:spPr>
-          <a:xfrm>
-            <a:off x="3429000" y="2514600"/>
-            <a:ext cx="2359152" cy="1051560"/>
-          </a:xfrm>
-          <a:prstGeom prst="rect">
-            <a:avLst/>
-          </a:prstGeom>
-          <a:noFill/>
-          <a:ln/>
-        </p:spPr>
-        <p:txBody>
-          <a:bodyPr wrap="square" rtlCol="0" anchor="t"/>
-          <a:lstStyle/>
-          <a:p>
-            <a:pPr indent="0" marL="0">
-              <a:buNone/>
-            </a:pPr>
-            <a:r>
-              <a:rPr lang="en-US" sz="1400" b="1" dirty="0">
-                <a:solidFill>
-                  <a:srgbClr val="0E7C86"/>
-                </a:solidFill>
-                <a:latin typeface="Yu Gothic UI" pitchFamily="34" charset="0"/>
-                <a:ea typeface="Yu Gothic UI" pitchFamily="34" charset="-122"/>
-                <a:cs typeface="Yu Gothic UI" pitchFamily="34" charset="-120"/>
-              </a:rPr>
-              <a:t>✓  </a:t>
-            </a:r>
-            <a:pPr indent="0" marL="0">
-              <a:buNone/>
-            </a:pPr>
-            <a:r>
-              <a:rPr lang="en-US" sz="1300" dirty="0">
-                <a:solidFill>
-                  <a:srgbClr val="1A1A1A"/>
-                </a:solidFill>
-                <a:latin typeface="Yu Gothic UI" pitchFamily="34" charset="0"/>
-                <a:ea typeface="Yu Gothic UI" pitchFamily="34" charset="-122"/>
-                <a:cs typeface="Yu Gothic UI" pitchFamily="34" charset="-120"/>
-              </a:rPr>
-              <a:t>PDF レポートが 7ページ構成で出るか、表紙〜免責まで揃っているか</a:t>
-            </a:r>
-            <a:endParaRPr lang="en-US" sz="1300" dirty="0"/>
-          </a:p>
-        </p:txBody>
-      </p:sp>
-      <p:sp>
-        <p:nvSpPr>
-          <p:cNvPr id="16" name="Text 14"/>
-          <p:cNvSpPr/>
-          <p:nvPr/>
-        </p:nvSpPr>
-        <p:spPr>
-          <a:xfrm>
-            <a:off x="3429000" y="3611880"/>
-            <a:ext cx="2359152" cy="1097280"/>
-          </a:xfrm>
-          <a:prstGeom prst="rect">
-            <a:avLst/>
-          </a:prstGeom>
-          <a:noFill/>
-          <a:ln/>
-        </p:spPr>
-        <p:txBody>
-          <a:bodyPr wrap="square" rtlCol="0" anchor="t"/>
-          <a:lstStyle/>
-          <a:p>
-            <a:pPr indent="0" marL="0">
-              <a:buNone/>
-            </a:pPr>
-            <a:r>
-              <a:rPr lang="en-US" sz="1400" b="1" dirty="0">
-                <a:solidFill>
-                  <a:srgbClr val="E8A33D"/>
-                </a:solidFill>
-                <a:latin typeface="Yu Gothic UI" pitchFamily="34" charset="0"/>
-                <a:ea typeface="Yu Gothic UI" pitchFamily="34" charset="-122"/>
-                <a:cs typeface="Yu Gothic UI" pitchFamily="34" charset="-120"/>
-              </a:rPr>
-              <a:t>💡  </a:t>
-            </a:r>
-            <a:pPr indent="0" marL="0">
-              <a:buNone/>
-            </a:pPr>
-            <a:r>
-              <a:rPr lang="en-US" sz="1300" dirty="0">
-                <a:solidFill>
-                  <a:srgbClr val="1A1A1A"/>
-                </a:solidFill>
-                <a:latin typeface="Yu Gothic UI" pitchFamily="34" charset="0"/>
-                <a:ea typeface="Yu Gothic UI" pitchFamily="34" charset="-122"/>
-                <a:cs typeface="Yu Gothic UI" pitchFamily="34" charset="-120"/>
-              </a:rPr>
-              <a:t>代理店名(AGENCY_NAME)が入っているか確認</a:t>
-            </a:r>
-            <a:endParaRPr lang="en-US" sz="1300" dirty="0"/>
-          </a:p>
-        </p:txBody>
-      </p:sp>
-      <p:sp>
-        <p:nvSpPr>
-          <p:cNvPr id="17" name="Shape 15"/>
-          <p:cNvSpPr/>
-          <p:nvPr/>
-        </p:nvSpPr>
-        <p:spPr>
-          <a:xfrm>
-            <a:off x="6080760" y="1325880"/>
-            <a:ext cx="2651760" cy="3474720"/>
-          </a:xfrm>
-          <a:prstGeom prst="roundRect">
-            <a:avLst>
-              <a:gd name="adj" fmla="val 3448"/>
-            </a:avLst>
-          </a:prstGeom>
-          <a:solidFill>
-            <a:srgbClr val="F4F6F9"/>
-          </a:solidFill>
-          <a:ln w="15240">
-            <a:solidFill>
-              <a:srgbClr val="7C5F8A"/>
-            </a:solidFill>
-            <a:prstDash val="solid"/>
-          </a:ln>
-        </p:spPr>
-      </p:sp>
-      <p:sp>
-        <p:nvSpPr>
-          <p:cNvPr id="18" name="Shape 16"/>
-          <p:cNvSpPr/>
-          <p:nvPr/>
-        </p:nvSpPr>
-        <p:spPr>
-          <a:xfrm>
-            <a:off x="6080760" y="1325880"/>
-            <a:ext cx="2651760" cy="457200"/>
-          </a:xfrm>
-          <a:prstGeom prst="rect">
-            <a:avLst/>
-          </a:prstGeom>
-          <a:solidFill>
-            <a:srgbClr val="7C5F8A"/>
-          </a:solidFill>
-          <a:ln/>
-        </p:spPr>
-      </p:sp>
-      <p:sp>
-        <p:nvSpPr>
-          <p:cNvPr id="19" name="Text 17"/>
-          <p:cNvSpPr/>
-          <p:nvPr/>
-        </p:nvSpPr>
-        <p:spPr>
-          <a:xfrm>
-            <a:off x="6208776" y="1380744"/>
-            <a:ext cx="2395728" cy="365760"/>
-          </a:xfrm>
-          <a:prstGeom prst="rect">
-            <a:avLst/>
-          </a:prstGeom>
-          <a:noFill/>
-          <a:ln/>
-        </p:spPr>
-        <p:txBody>
-          <a:bodyPr wrap="square" rtlCol="0" anchor="ctr"/>
-          <a:lstStyle/>
-          <a:p>
-            <a:pPr indent="0" marL="0">
-              <a:buNone/>
-            </a:pPr>
-            <a:r>
-              <a:rPr lang="en-US" sz="1500" b="1" dirty="0">
-                <a:solidFill>
-                  <a:srgbClr val="FFFFFF"/>
-                </a:solidFill>
-                <a:latin typeface="Yu Gothic UI Semibold" pitchFamily="34" charset="0"/>
-                <a:ea typeface="Yu Gothic UI Semibold" pitchFamily="34" charset="-122"/>
-                <a:cs typeface="Yu Gothic UI Semibold" pitchFamily="34" charset="-120"/>
-              </a:rPr>
-              <a:t>観点 C</a:t>
-            </a:r>
-            <a:endParaRPr lang="en-US" sz="1500" dirty="0"/>
-          </a:p>
-        </p:txBody>
-      </p:sp>
-      <p:sp>
-        <p:nvSpPr>
-          <p:cNvPr id="20" name="Text 18"/>
-          <p:cNvSpPr/>
-          <p:nvPr/>
-        </p:nvSpPr>
-        <p:spPr>
-          <a:xfrm>
-            <a:off x="6263640" y="1892808"/>
-            <a:ext cx="2359152" cy="548640"/>
-          </a:xfrm>
-          <a:prstGeom prst="rect">
-            <a:avLst/>
-          </a:prstGeom>
-          <a:noFill/>
-          <a:ln/>
-        </p:spPr>
-        <p:txBody>
-          <a:bodyPr wrap="square" rtlCol="0" anchor="t"/>
-          <a:lstStyle/>
-          <a:p>
-            <a:pPr indent="0" marL="0">
-              <a:buNone/>
-            </a:pPr>
-            <a:r>
-              <a:rPr lang="en-US" sz="1500" b="1" dirty="0">
-                <a:solidFill>
-                  <a:srgbClr val="1F3A5F"/>
-                </a:solidFill>
-                <a:latin typeface="Yu Gothic UI Semibold" pitchFamily="34" charset="0"/>
-                <a:ea typeface="Yu Gothic UI Semibold" pitchFamily="34" charset="-122"/>
-                <a:cs typeface="Yu Gothic UI Semibold" pitchFamily="34" charset="-120"/>
-              </a:rPr>
-              <a:t>C. 一連の流れ</a:t>
-            </a:r>
-            <a:endParaRPr lang="en-US" sz="1500" dirty="0"/>
-          </a:p>
-        </p:txBody>
-      </p:sp>
-      <p:sp>
-        <p:nvSpPr>
-          <p:cNvPr id="21" name="Text 19"/>
-          <p:cNvSpPr/>
-          <p:nvPr/>
-        </p:nvSpPr>
-        <p:spPr>
-          <a:xfrm>
-            <a:off x="6263640" y="2514600"/>
-            <a:ext cx="2359152" cy="1051560"/>
-          </a:xfrm>
-          <a:prstGeom prst="rect">
-            <a:avLst/>
-          </a:prstGeom>
-          <a:noFill/>
-          <a:ln/>
-        </p:spPr>
-        <p:txBody>
-          <a:bodyPr wrap="square" rtlCol="0" anchor="t"/>
-          <a:lstStyle/>
-          <a:p>
-            <a:pPr indent="0" marL="0">
-              <a:buNone/>
-            </a:pPr>
-            <a:r>
-              <a:rPr lang="en-US" sz="1400" b="1" dirty="0">
-                <a:solidFill>
-                  <a:srgbClr val="0E7C86"/>
-                </a:solidFill>
-                <a:latin typeface="Yu Gothic UI" pitchFamily="34" charset="0"/>
-                <a:ea typeface="Yu Gothic UI" pitchFamily="34" charset="-122"/>
-                <a:cs typeface="Yu Gothic UI" pitchFamily="34" charset="-120"/>
-              </a:rPr>
-              <a:t>✓  </a:t>
-            </a:r>
-            <a:pPr indent="0" marL="0">
-              <a:buNone/>
-            </a:pPr>
-            <a:r>
-              <a:rPr lang="en-US" sz="1300" dirty="0">
-                <a:solidFill>
-                  <a:srgbClr val="1A1A1A"/>
-                </a:solidFill>
-                <a:latin typeface="Yu Gothic UI" pitchFamily="34" charset="0"/>
-                <a:ea typeface="Yu Gothic UI" pitchFamily="34" charset="-122"/>
-                <a:cs typeface="Yu Gothic UI" pitchFamily="34" charset="-120"/>
-              </a:rPr>
-              <a:t>入力→実行→結果表示→PDF出力 が スムーズか</a:t>
-            </a:r>
-            <a:endParaRPr lang="en-US" sz="1300" dirty="0"/>
-          </a:p>
-        </p:txBody>
-      </p:sp>
-      <p:sp>
-        <p:nvSpPr>
-          <p:cNvPr id="22" name="Text 20"/>
-          <p:cNvSpPr/>
-          <p:nvPr/>
-        </p:nvSpPr>
-        <p:spPr>
-          <a:xfrm>
-            <a:off x="6263640" y="3611880"/>
-            <a:ext cx="2359152" cy="1097280"/>
-          </a:xfrm>
-          <a:prstGeom prst="rect">
-            <a:avLst/>
-          </a:prstGeom>
-          <a:noFill/>
-          <a:ln/>
-        </p:spPr>
-        <p:txBody>
-          <a:bodyPr wrap="square" rtlCol="0" anchor="t"/>
-          <a:lstStyle/>
-          <a:p>
-            <a:pPr indent="0" marL="0">
-              <a:buNone/>
-            </a:pPr>
-            <a:r>
-              <a:rPr lang="en-US" sz="1400" b="1" dirty="0">
-                <a:solidFill>
-                  <a:srgbClr val="E8A33D"/>
-                </a:solidFill>
-                <a:latin typeface="Yu Gothic UI" pitchFamily="34" charset="0"/>
-                <a:ea typeface="Yu Gothic UI" pitchFamily="34" charset="-122"/>
-                <a:cs typeface="Yu Gothic UI" pitchFamily="34" charset="-120"/>
-              </a:rPr>
-              <a:t>💡  </a:t>
-            </a:r>
-            <a:pPr indent="0" marL="0">
-              <a:buNone/>
-            </a:pPr>
-            <a:r>
-              <a:rPr lang="en-US" sz="1300" dirty="0">
-                <a:solidFill>
-                  <a:srgbClr val="1A1A1A"/>
-                </a:solidFill>
-                <a:latin typeface="Yu Gothic UI" pitchFamily="34" charset="0"/>
-                <a:ea typeface="Yu Gothic UI" pitchFamily="34" charset="-122"/>
-                <a:cs typeface="Yu Gothic UI" pitchFamily="34" charset="-120"/>
-              </a:rPr>
-              <a:t>途中で詰まる箇所があれば エラーハンドリング追加</a:t>
+              <a:t>エラーが出たまま次に進む → 後で原因不明のバグに悩む</a:t>
             </a:r>
             <a:endParaRPr lang="en-US" sz="1300" dirty="0"/>
           </a:p>
@@ -6065,7 +6161,7 @@
     <p:bg>
       <p:bgPr>
         <a:solidFill>
-          <a:srgbClr val="1F3A5F"/>
+          <a:srgbClr val="FFFFFF"/>
         </a:solidFill>
       </p:bgPr>
     </p:bg>
@@ -6085,14 +6181,34 @@
       </p:grpSpPr>
       <p:sp>
         <p:nvSpPr>
-          <p:cNvPr id="2" name="Text 0"/>
-          <p:cNvSpPr/>
-          <p:nvPr/>
-        </p:nvSpPr>
-        <p:spPr>
-          <a:xfrm>
-            <a:off x="457200" y="365760"/>
-            <a:ext cx="8229600" cy="777240"/>
+          <p:cNvPr id="2" name="Shape 0"/>
+          <p:cNvSpPr/>
+          <p:nvPr/>
+        </p:nvSpPr>
+        <p:spPr>
+          <a:xfrm>
+            <a:off x="0" y="0"/>
+            <a:ext cx="164592" cy="5143500"/>
+          </a:xfrm>
+          <a:prstGeom prst="rect">
+            <a:avLst/>
+          </a:prstGeom>
+          <a:solidFill>
+            <a:srgbClr val="0E7C86"/>
+          </a:solidFill>
+          <a:ln/>
+        </p:spPr>
+      </p:sp>
+      <p:sp>
+        <p:nvSpPr>
+          <p:cNvPr id="3" name="Text 1"/>
+          <p:cNvSpPr/>
+          <p:nvPr/>
+        </p:nvSpPr>
+        <p:spPr>
+          <a:xfrm>
+            <a:off x="411480" y="182880"/>
+            <a:ext cx="8412480" cy="548640"/>
           </a:xfrm>
           <a:prstGeom prst="rect">
             <a:avLst/>
@@ -6108,60 +6224,437 @@
               <a:buNone/>
             </a:pPr>
             <a:r>
-              <a:rPr lang="en-US" sz="3200" b="1" dirty="0">
-                <a:solidFill>
-                  <a:srgbClr val="FFFFFF"/>
+              <a:rPr lang="en-US" sz="2400" b="1" dirty="0">
+                <a:solidFill>
+                  <a:srgbClr val="1F3A5F"/>
                 </a:solidFill>
                 <a:latin typeface="Yu Gothic UI Semibold" pitchFamily="34" charset="0"/>
                 <a:ea typeface="Yu Gothic UI Semibold" pitchFamily="34" charset="-122"/>
                 <a:cs typeface="Yu Gothic UI Semibold" pitchFamily="34" charset="-120"/>
               </a:rPr>
-              <a:t>今日の持ち帰り</a:t>
-            </a:r>
-            <a:endParaRPr lang="en-US" sz="3200" dirty="0"/>
-          </a:p>
-        </p:txBody>
-      </p:sp>
-      <p:sp>
-        <p:nvSpPr>
-          <p:cNvPr id="3" name="Shape 1"/>
-          <p:cNvSpPr/>
-          <p:nvPr/>
-        </p:nvSpPr>
-        <p:spPr>
-          <a:xfrm>
-            <a:off x="457200" y="1188720"/>
-            <a:ext cx="1371600" cy="54864"/>
-          </a:xfrm>
-          <a:prstGeom prst="rect">
-            <a:avLst/>
-          </a:prstGeom>
-          <a:solidFill>
-            <a:srgbClr val="E8A33D"/>
-          </a:solidFill>
-          <a:ln/>
-        </p:spPr>
-      </p:sp>
-      <p:sp>
-        <p:nvSpPr>
-          <p:cNvPr id="4" name="Shape 2"/>
-          <p:cNvSpPr/>
-          <p:nvPr/>
-        </p:nvSpPr>
-        <p:spPr>
-          <a:xfrm>
-            <a:off x="457200" y="1554480"/>
-            <a:ext cx="8229600" cy="1051560"/>
+              <a:t>演習2 ─ 画面 と PDFレポート を追加</a:t>
+            </a:r>
+            <a:endParaRPr lang="en-US" sz="2400" dirty="0"/>
+          </a:p>
+        </p:txBody>
+      </p:sp>
+      <p:sp>
+        <p:nvSpPr>
+          <p:cNvPr id="4" name="Text 2"/>
+          <p:cNvSpPr/>
+          <p:nvPr/>
+        </p:nvSpPr>
+        <p:spPr>
+          <a:xfrm>
+            <a:off x="411480" y="749808"/>
+            <a:ext cx="8412480" cy="365760"/>
+          </a:xfrm>
+          <a:prstGeom prst="rect">
+            <a:avLst/>
+          </a:prstGeom>
+          <a:noFill/>
+          <a:ln/>
+        </p:spPr>
+        <p:txBody>
+          <a:bodyPr wrap="square" rtlCol="0" anchor="ctr"/>
+          <a:lstStyle/>
+          <a:p>
+            <a:pPr indent="0" marL="0">
+              <a:buNone/>
+            </a:pPr>
+            <a:r>
+              <a:rPr lang="en-US" sz="1300" i="1" dirty="0">
+                <a:solidFill>
+                  <a:srgbClr val="555555"/>
+                </a:solidFill>
+                <a:latin typeface="Yu Gothic UI" pitchFamily="34" charset="0"/>
+                <a:ea typeface="Yu Gothic UI" pitchFamily="34" charset="-122"/>
+                <a:cs typeface="Yu Gothic UI" pitchFamily="34" charset="-120"/>
+              </a:rPr>
+              <a:t>設計書で選んだ画面と、お客様に渡す PDF機能を実装します</a:t>
+            </a:r>
+            <a:endParaRPr lang="en-US" sz="1300" dirty="0"/>
+          </a:p>
+        </p:txBody>
+      </p:sp>
+      <p:sp>
+        <p:nvSpPr>
+          <p:cNvPr id="5" name="Shape 3"/>
+          <p:cNvSpPr/>
+          <p:nvPr/>
+        </p:nvSpPr>
+        <p:spPr>
+          <a:xfrm>
+            <a:off x="411480" y="1234440"/>
+            <a:ext cx="3429000" cy="1691640"/>
           </a:xfrm>
           <a:prstGeom prst="roundRect">
             <a:avLst>
-              <a:gd name="adj" fmla="val 6957"/>
+              <a:gd name="adj" fmla="val 4324"/>
             </a:avLst>
           </a:prstGeom>
           <a:solidFill>
-            <a:srgbClr val="2A4A75"/>
-          </a:solidFill>
-          <a:ln w="6350">
+            <a:srgbClr val="F4F6F9"/>
+          </a:solidFill>
+          <a:ln w="25400">
+            <a:solidFill>
+              <a:srgbClr val="1F3A5F"/>
+            </a:solidFill>
+            <a:prstDash val="solid"/>
+          </a:ln>
+        </p:spPr>
+      </p:sp>
+      <p:sp>
+        <p:nvSpPr>
+          <p:cNvPr id="6" name="Text 4"/>
+          <p:cNvSpPr/>
+          <p:nvPr/>
+        </p:nvSpPr>
+        <p:spPr>
+          <a:xfrm>
+            <a:off x="548640" y="1325880"/>
+            <a:ext cx="3154680" cy="365760"/>
+          </a:xfrm>
+          <a:prstGeom prst="rect">
+            <a:avLst/>
+          </a:prstGeom>
+          <a:noFill/>
+          <a:ln/>
+        </p:spPr>
+        <p:txBody>
+          <a:bodyPr wrap="square" rtlCol="0" anchor="ctr"/>
+          <a:lstStyle/>
+          <a:p>
+            <a:pPr indent="0" marL="0">
+              <a:buNone/>
+            </a:pPr>
+            <a:r>
+              <a:rPr lang="en-US" sz="1400" b="1" dirty="0">
+                <a:solidFill>
+                  <a:srgbClr val="1F3A5F"/>
+                </a:solidFill>
+                <a:latin typeface="Yu Gothic UI Semibold" pitchFamily="34" charset="0"/>
+                <a:ea typeface="Yu Gothic UI Semibold" pitchFamily="34" charset="-122"/>
+                <a:cs typeface="Yu Gothic UI Semibold" pitchFamily="34" charset="-120"/>
+              </a:rPr>
+              <a:t>📌 シチュエーション</a:t>
+            </a:r>
+            <a:endParaRPr lang="en-US" sz="1400" dirty="0"/>
+          </a:p>
+        </p:txBody>
+      </p:sp>
+      <p:sp>
+        <p:nvSpPr>
+          <p:cNvPr id="7" name="Text 5"/>
+          <p:cNvSpPr/>
+          <p:nvPr/>
+        </p:nvSpPr>
+        <p:spPr>
+          <a:xfrm>
+            <a:off x="548640" y="1709928"/>
+            <a:ext cx="3154680" cy="1143000"/>
+          </a:xfrm>
+          <a:prstGeom prst="rect">
+            <a:avLst/>
+          </a:prstGeom>
+          <a:noFill/>
+          <a:ln/>
+        </p:spPr>
+        <p:txBody>
+          <a:bodyPr wrap="square" rtlCol="0" anchor="t"/>
+          <a:lstStyle/>
+          <a:p>
+            <a:pPr indent="0" marL="0">
+              <a:spcAft>
+                <a:spcPts val="300"/>
+              </a:spcAft>
+              <a:buNone/>
+            </a:pPr>
+            <a:r>
+              <a:rPr lang="en-US" sz="1200" dirty="0">
+                <a:solidFill>
+                  <a:srgbClr val="1A1A1A"/>
+                </a:solidFill>
+                <a:latin typeface="Yu Gothic UI" pitchFamily="34" charset="0"/>
+                <a:ea typeface="Yu Gothic UI" pitchFamily="34" charset="-122"/>
+                <a:cs typeface="Yu Gothic UI" pitchFamily="34" charset="-120"/>
+              </a:rPr>
+              <a:t>設計書のW1で選んだ画面を作ります。</a:t>
+            </a:r>
+            <a:endParaRPr lang="en-US" sz="1200" dirty="0"/>
+          </a:p>
+          <a:p>
+            <a:pPr indent="0" marL="0">
+              <a:spcAft>
+                <a:spcPts val="300"/>
+              </a:spcAft>
+              <a:buNone/>
+            </a:pPr>
+            <a:endParaRPr lang="en-US" sz="1200" dirty="0"/>
+          </a:p>
+          <a:p>
+            <a:pPr indent="0" marL="0">
+              <a:spcAft>
+                <a:spcPts val="300"/>
+              </a:spcAft>
+              <a:buNone/>
+            </a:pPr>
+            <a:r>
+              <a:rPr lang="en-US" sz="1200" dirty="0">
+                <a:solidFill>
+                  <a:srgbClr val="1A1A1A"/>
+                </a:solidFill>
+                <a:latin typeface="Yu Gothic UI" pitchFamily="34" charset="0"/>
+                <a:ea typeface="Yu Gothic UI" pitchFamily="34" charset="-122"/>
+                <a:cs typeface="Yu Gothic UI" pitchFamily="34" charset="-120"/>
+              </a:rPr>
+              <a:t>同梱ファイルに 完成版の HTML が入っているので、</a:t>
+            </a:r>
+            <a:endParaRPr lang="en-US" sz="1200" dirty="0"/>
+          </a:p>
+          <a:p>
+            <a:pPr indent="0" marL="0">
+              <a:spcAft>
+                <a:spcPts val="300"/>
+              </a:spcAft>
+              <a:buNone/>
+            </a:pPr>
+            <a:r>
+              <a:rPr lang="en-US" sz="1200" dirty="0">
+                <a:solidFill>
+                  <a:srgbClr val="1A1A1A"/>
+                </a:solidFill>
+                <a:latin typeface="Yu Gothic UI" pitchFamily="34" charset="0"/>
+                <a:ea typeface="Yu Gothic UI" pitchFamily="34" charset="-122"/>
+                <a:cs typeface="Yu Gothic UI" pitchFamily="34" charset="-120"/>
+              </a:rPr>
+              <a:t>貼付けて動作確認するだけで OK です。</a:t>
+            </a:r>
+            <a:endParaRPr lang="en-US" sz="1200" dirty="0"/>
+          </a:p>
+          <a:p>
+            <a:pPr indent="0" marL="0">
+              <a:spcAft>
+                <a:spcPts val="300"/>
+              </a:spcAft>
+              <a:buNone/>
+            </a:pPr>
+            <a:endParaRPr lang="en-US" sz="1200" dirty="0"/>
+          </a:p>
+          <a:p>
+            <a:pPr indent="0" marL="0">
+              <a:spcAft>
+                <a:spcPts val="300"/>
+              </a:spcAft>
+              <a:buNone/>
+            </a:pPr>
+            <a:r>
+              <a:rPr lang="en-US" sz="1200" dirty="0">
+                <a:solidFill>
+                  <a:srgbClr val="1A1A1A"/>
+                </a:solidFill>
+                <a:latin typeface="Yu Gothic UI" pitchFamily="34" charset="0"/>
+                <a:ea typeface="Yu Gothic UI" pitchFamily="34" charset="-122"/>
+                <a:cs typeface="Yu Gothic UI" pitchFamily="34" charset="-120"/>
+              </a:rPr>
+              <a:t>さらに、お客様に渡せる PDF レポートを生成する機能も追加します。</a:t>
+            </a:r>
+            <a:endParaRPr lang="en-US" sz="1200" dirty="0"/>
+          </a:p>
+        </p:txBody>
+      </p:sp>
+      <p:sp>
+        <p:nvSpPr>
+          <p:cNvPr id="8" name="Shape 6"/>
+          <p:cNvSpPr/>
+          <p:nvPr/>
+        </p:nvSpPr>
+        <p:spPr>
+          <a:xfrm>
+            <a:off x="411480" y="3063240"/>
+            <a:ext cx="3429000" cy="1874520"/>
+          </a:xfrm>
+          <a:prstGeom prst="roundRect">
+            <a:avLst>
+              <a:gd name="adj" fmla="val 3902"/>
+            </a:avLst>
+          </a:prstGeom>
+          <a:solidFill>
+            <a:srgbClr val="FFF3E0"/>
+          </a:solidFill>
+          <a:ln w="19050">
+            <a:solidFill>
+              <a:srgbClr val="E8A33D"/>
+            </a:solidFill>
+            <a:prstDash val="solid"/>
+          </a:ln>
+        </p:spPr>
+      </p:sp>
+      <p:sp>
+        <p:nvSpPr>
+          <p:cNvPr id="9" name="Text 7"/>
+          <p:cNvSpPr/>
+          <p:nvPr/>
+        </p:nvSpPr>
+        <p:spPr>
+          <a:xfrm>
+            <a:off x="548640" y="3154680"/>
+            <a:ext cx="3154680" cy="365760"/>
+          </a:xfrm>
+          <a:prstGeom prst="rect">
+            <a:avLst/>
+          </a:prstGeom>
+          <a:noFill/>
+          <a:ln/>
+        </p:spPr>
+        <p:txBody>
+          <a:bodyPr wrap="square" rtlCol="0" anchor="ctr"/>
+          <a:lstStyle/>
+          <a:p>
+            <a:pPr indent="0" marL="0">
+              <a:buNone/>
+            </a:pPr>
+            <a:r>
+              <a:rPr lang="en-US" sz="1300" b="1" dirty="0">
+                <a:solidFill>
+                  <a:srgbClr val="E8A33D"/>
+                </a:solidFill>
+                <a:latin typeface="Yu Gothic UI Semibold" pitchFamily="34" charset="0"/>
+                <a:ea typeface="Yu Gothic UI Semibold" pitchFamily="34" charset="-122"/>
+                <a:cs typeface="Yu Gothic UI Semibold" pitchFamily="34" charset="-120"/>
+              </a:rPr>
+              <a:t>💬 AIとの壁打ちヒント</a:t>
+            </a:r>
+            <a:endParaRPr lang="en-US" sz="1300" dirty="0"/>
+          </a:p>
+        </p:txBody>
+      </p:sp>
+      <p:sp>
+        <p:nvSpPr>
+          <p:cNvPr id="10" name="Text 8"/>
+          <p:cNvSpPr/>
+          <p:nvPr/>
+        </p:nvSpPr>
+        <p:spPr>
+          <a:xfrm>
+            <a:off x="621792" y="3538728"/>
+            <a:ext cx="3081528" cy="1325880"/>
+          </a:xfrm>
+          <a:prstGeom prst="rect">
+            <a:avLst/>
+          </a:prstGeom>
+          <a:noFill/>
+          <a:ln/>
+        </p:spPr>
+        <p:txBody>
+          <a:bodyPr wrap="square" rtlCol="0" anchor="t"/>
+          <a:lstStyle/>
+          <a:p>
+            <a:pPr marL="342900" indent="-342900">
+              <a:spcAft>
+                <a:spcPts val="400"/>
+              </a:spcAft>
+              <a:buSzPct val="100000"/>
+              <a:buChar char="•"/>
+            </a:pPr>
+            <a:r>
+              <a:rPr lang="en-US" sz="1100" dirty="0">
+                <a:solidFill>
+                  <a:srgbClr val="1A1A1A"/>
+                </a:solidFill>
+                <a:latin typeface="Yu Gothic UI" pitchFamily="34" charset="0"/>
+                <a:ea typeface="Yu Gothic UI" pitchFamily="34" charset="-122"/>
+                <a:cs typeface="Yu Gothic UI" pitchFamily="34" charset="-120"/>
+              </a:rPr>
+              <a:t>画面は「選んだ方だけ」実装、両方はやらない(混乱の元)</a:t>
+            </a:r>
+            <a:endParaRPr lang="en-US" sz="1100" dirty="0"/>
+          </a:p>
+          <a:p>
+            <a:pPr marL="342900" indent="-342900">
+              <a:spcAft>
+                <a:spcPts val="400"/>
+              </a:spcAft>
+              <a:buSzPct val="100000"/>
+              <a:buChar char="•"/>
+            </a:pPr>
+            <a:r>
+              <a:rPr lang="en-US" sz="1100" dirty="0">
+                <a:solidFill>
+                  <a:srgbClr val="1A1A1A"/>
+                </a:solidFill>
+                <a:latin typeface="Yu Gothic UI" pitchFamily="34" charset="0"/>
+                <a:ea typeface="Yu Gothic UI" pitchFamily="34" charset="-122"/>
+                <a:cs typeface="Yu Gothic UI" pitchFamily="34" charset="-120"/>
+              </a:rPr>
+              <a:t>PDFの代理店ロゴ・色は 後で Google Docs 側で調整可能</a:t>
+            </a:r>
+            <a:endParaRPr lang="en-US" sz="1100" dirty="0"/>
+          </a:p>
+          <a:p>
+            <a:pPr marL="342900" indent="-342900">
+              <a:spcAft>
+                <a:spcPts val="400"/>
+              </a:spcAft>
+              <a:buSzPct val="100000"/>
+              <a:buChar char="•"/>
+            </a:pPr>
+            <a:r>
+              <a:rPr lang="en-US" sz="1100" dirty="0">
+                <a:solidFill>
+                  <a:srgbClr val="1A1A1A"/>
+                </a:solidFill>
+                <a:latin typeface="Yu Gothic UI" pitchFamily="34" charset="0"/>
+                <a:ea typeface="Yu Gothic UI" pitchFamily="34" charset="-122"/>
+                <a:cs typeface="Yu Gothic UI" pitchFamily="34" charset="-120"/>
+              </a:rPr>
+              <a:t>「これに顧客名を入れたい」等の要望は AI に相談して機能追加</a:t>
+            </a:r>
+            <a:endParaRPr lang="en-US" sz="1100" dirty="0"/>
+          </a:p>
+          <a:p>
+            <a:pPr marL="342900" indent="-342900">
+              <a:spcAft>
+                <a:spcPts val="400"/>
+              </a:spcAft>
+              <a:buSzPct val="100000"/>
+              <a:buChar char="•"/>
+            </a:pPr>
+            <a:r>
+              <a:rPr lang="en-US" sz="1100" dirty="0">
+                <a:solidFill>
+                  <a:srgbClr val="1A1A1A"/>
+                </a:solidFill>
+                <a:latin typeface="Yu Gothic UI" pitchFamily="34" charset="0"/>
+                <a:ea typeface="Yu Gothic UI" pitchFamily="34" charset="-122"/>
+                <a:cs typeface="Yu Gothic UI" pitchFamily="34" charset="-120"/>
+              </a:rPr>
+              <a:t>レポート生成は 数十秒かかる、ぼーっと待つ</a:t>
+            </a:r>
+            <a:endParaRPr lang="en-US" sz="1100" dirty="0"/>
+          </a:p>
+        </p:txBody>
+      </p:sp>
+      <p:sp>
+        <p:nvSpPr>
+          <p:cNvPr id="11" name="Shape 9"/>
+          <p:cNvSpPr/>
+          <p:nvPr/>
+        </p:nvSpPr>
+        <p:spPr>
+          <a:xfrm>
+            <a:off x="4069080" y="1234440"/>
+            <a:ext cx="4663440" cy="3566160"/>
+          </a:xfrm>
+          <a:prstGeom prst="roundRect">
+            <a:avLst>
+              <a:gd name="adj" fmla="val 2051"/>
+            </a:avLst>
+          </a:prstGeom>
+          <a:solidFill>
+            <a:srgbClr val="FFFFFF"/>
+          </a:solidFill>
+          <a:ln w="25400">
             <a:solidFill>
               <a:srgbClr val="0E7C86"/>
             </a:solidFill>
@@ -6171,14 +6664,34 @@
       </p:sp>
       <p:sp>
         <p:nvSpPr>
-          <p:cNvPr id="5" name="Text 3"/>
-          <p:cNvSpPr/>
-          <p:nvPr/>
-        </p:nvSpPr>
-        <p:spPr>
-          <a:xfrm>
-            <a:off x="658368" y="1719072"/>
-            <a:ext cx="777240" cy="777240"/>
+          <p:cNvPr id="12" name="Shape 10"/>
+          <p:cNvSpPr/>
+          <p:nvPr/>
+        </p:nvSpPr>
+        <p:spPr>
+          <a:xfrm>
+            <a:off x="4069080" y="1234440"/>
+            <a:ext cx="4663440" cy="502920"/>
+          </a:xfrm>
+          <a:prstGeom prst="rect">
+            <a:avLst/>
+          </a:prstGeom>
+          <a:solidFill>
+            <a:srgbClr val="0E7C86"/>
+          </a:solidFill>
+          <a:ln/>
+        </p:spPr>
+      </p:sp>
+      <p:sp>
+        <p:nvSpPr>
+          <p:cNvPr id="13" name="Text 11"/>
+          <p:cNvSpPr/>
+          <p:nvPr/>
+        </p:nvSpPr>
+        <p:spPr>
+          <a:xfrm>
+            <a:off x="4206240" y="1234440"/>
+            <a:ext cx="4389120" cy="502920"/>
           </a:xfrm>
           <a:prstGeom prst="rect">
             <a:avLst/>
@@ -6194,30 +6707,209 @@
               <a:buNone/>
             </a:pPr>
             <a:r>
-              <a:rPr lang="en-US" sz="3400" b="1" dirty="0">
-                <a:solidFill>
-                  <a:srgbClr val="E8A33D"/>
+              <a:rPr lang="en-US" sz="1400" b="1" dirty="0">
+                <a:solidFill>
+                  <a:srgbClr val="FFFFFF"/>
                 </a:solidFill>
                 <a:latin typeface="Yu Gothic UI Semibold" pitchFamily="34" charset="0"/>
                 <a:ea typeface="Yu Gothic UI Semibold" pitchFamily="34" charset="-122"/>
                 <a:cs typeface="Yu Gothic UI Semibold" pitchFamily="34" charset="-120"/>
               </a:rPr>
-              <a:t>01</a:t>
-            </a:r>
-            <a:endParaRPr lang="en-US" sz="3400" dirty="0"/>
-          </a:p>
-        </p:txBody>
-      </p:sp>
-      <p:sp>
-        <p:nvSpPr>
-          <p:cNvPr id="6" name="Text 4"/>
-          <p:cNvSpPr/>
-          <p:nvPr/>
-        </p:nvSpPr>
-        <p:spPr>
-          <a:xfrm>
-            <a:off x="1508760" y="1691640"/>
-            <a:ext cx="6949440" cy="411480"/>
+              <a:t>🎯 今日やること</a:t>
+            </a:r>
+            <a:endParaRPr lang="en-US" sz="1400" dirty="0"/>
+          </a:p>
+        </p:txBody>
+      </p:sp>
+      <p:sp>
+        <p:nvSpPr>
+          <p:cNvPr id="14" name="Text 12"/>
+          <p:cNvSpPr/>
+          <p:nvPr/>
+        </p:nvSpPr>
+        <p:spPr>
+          <a:xfrm>
+            <a:off x="4288536" y="1874520"/>
+            <a:ext cx="4224528" cy="2834640"/>
+          </a:xfrm>
+          <a:prstGeom prst="rect">
+            <a:avLst/>
+          </a:prstGeom>
+          <a:noFill/>
+          <a:ln/>
+        </p:spPr>
+        <p:txBody>
+          <a:bodyPr wrap="square" rtlCol="0" anchor="t"/>
+          <a:lstStyle/>
+          <a:p>
+            <a:pPr marL="342900" indent="-342900">
+              <a:spcAft>
+                <a:spcPts val="600"/>
+              </a:spcAft>
+              <a:buSzPct val="100000"/>
+              <a:buChar char="■"/>
+            </a:pPr>
+            <a:r>
+              <a:rPr lang="en-US" sz="1200" dirty="0">
+                <a:solidFill>
+                  <a:srgbClr val="1A1A1A"/>
+                </a:solidFill>
+                <a:latin typeface="Yu Gothic UI" pitchFamily="34" charset="0"/>
+                <a:ea typeface="Yu Gothic UI" pitchFamily="34" charset="-122"/>
+                <a:cs typeface="Yu Gothic UI" pitchFamily="34" charset="-120"/>
+              </a:rPr>
+              <a:t>サイドバー選択なら「Sidebar.html」を貼付、動作確認</a:t>
+            </a:r>
+            <a:endParaRPr lang="en-US" sz="1200" dirty="0"/>
+          </a:p>
+          <a:p>
+            <a:pPr marL="342900" indent="-342900">
+              <a:spcAft>
+                <a:spcPts val="600"/>
+              </a:spcAft>
+              <a:buSzPct val="100000"/>
+              <a:buChar char="■"/>
+            </a:pPr>
+            <a:r>
+              <a:rPr lang="en-US" sz="1200" dirty="0">
+                <a:solidFill>
+                  <a:srgbClr val="1A1A1A"/>
+                </a:solidFill>
+                <a:latin typeface="Yu Gothic UI" pitchFamily="34" charset="0"/>
+                <a:ea typeface="Yu Gothic UI" pitchFamily="34" charset="-122"/>
+                <a:cs typeface="Yu Gothic UI" pitchFamily="34" charset="-120"/>
+              </a:rPr>
+              <a:t>Webアプリ選択なら「WebApp.html」+「W2_Code_WebApp追加.gs」を貼付</a:t>
+            </a:r>
+            <a:endParaRPr lang="en-US" sz="1200" dirty="0"/>
+          </a:p>
+          <a:p>
+            <a:pPr marL="342900" indent="-342900">
+              <a:spcAft>
+                <a:spcPts val="600"/>
+              </a:spcAft>
+              <a:buSzPct val="100000"/>
+              <a:buChar char="■"/>
+            </a:pPr>
+            <a:r>
+              <a:rPr lang="en-US" sz="1200" dirty="0">
+                <a:solidFill>
+                  <a:srgbClr val="1A1A1A"/>
+                </a:solidFill>
+                <a:latin typeface="Yu Gothic UI" pitchFamily="34" charset="0"/>
+                <a:ea typeface="Yu Gothic UI" pitchFamily="34" charset="-122"/>
+                <a:cs typeface="Yu Gothic UI" pitchFamily="34" charset="-120"/>
+              </a:rPr>
+              <a:t>「Code_レポート生成.gs」を貼付、AGENCY_NAME に代理店名を書く</a:t>
+            </a:r>
+            <a:endParaRPr lang="en-US" sz="1200" dirty="0"/>
+          </a:p>
+          <a:p>
+            <a:pPr marL="342900" indent="-342900">
+              <a:spcAft>
+                <a:spcPts val="600"/>
+              </a:spcAft>
+              <a:buSzPct val="100000"/>
+              <a:buChar char="■"/>
+            </a:pPr>
+            <a:r>
+              <a:rPr lang="en-US" sz="1200" dirty="0">
+                <a:solidFill>
+                  <a:srgbClr val="1A1A1A"/>
+                </a:solidFill>
+                <a:latin typeface="Yu Gothic UI" pitchFamily="34" charset="0"/>
+                <a:ea typeface="Yu Gothic UI" pitchFamily="34" charset="-122"/>
+                <a:cs typeface="Yu Gothic UI" pitchFamily="34" charset="-120"/>
+              </a:rPr>
+              <a:t>メニュー「📄 顧客向けレポート出力」で PDF が Drive に保存されるか確認</a:t>
+            </a:r>
+            <a:endParaRPr lang="en-US" sz="1200" dirty="0"/>
+          </a:p>
+          <a:p>
+            <a:pPr marL="342900" indent="-342900">
+              <a:spcAft>
+                <a:spcPts val="600"/>
+              </a:spcAft>
+              <a:buSzPct val="100000"/>
+              <a:buChar char="■"/>
+            </a:pPr>
+            <a:r>
+              <a:rPr lang="en-US" sz="1200" dirty="0">
+                <a:solidFill>
+                  <a:srgbClr val="1A1A1A"/>
+                </a:solidFill>
+                <a:latin typeface="Yu Gothic UI" pitchFamily="34" charset="0"/>
+                <a:ea typeface="Yu Gothic UI" pitchFamily="34" charset="-122"/>
+                <a:cs typeface="Yu Gothic UI" pitchFamily="34" charset="-120"/>
+              </a:rPr>
+              <a:t>PDFを開いて 7ページ構成(表紙・情報・総評・グラフ・家計表・提案・免責)を確認</a:t>
+            </a:r>
+            <a:endParaRPr lang="en-US" sz="1200" dirty="0"/>
+          </a:p>
+        </p:txBody>
+      </p:sp>
+    </p:spTree>
+  </p:cSld>
+  <p:clrMapOvr>
+    <a:masterClrMapping/>
+  </p:clrMapOvr>
+</p:sld>
+</file>
+
+<file path=ppt/slides/slide9.xml><?xml version="1.0" encoding="utf-8"?>
+<p:sld xmlns:a="http://schemas.openxmlformats.org/drawingml/2006/main" xmlns:r="http://schemas.openxmlformats.org/officeDocument/2006/relationships" xmlns:p="http://schemas.openxmlformats.org/presentationml/2006/main">
+  <p:cSld name="Slide 9">
+    <p:bg>
+      <p:bgPr>
+        <a:solidFill>
+          <a:srgbClr val="FFFFFF"/>
+        </a:solidFill>
+      </p:bgPr>
+    </p:bg>
+    <p:spTree>
+      <p:nvGrpSpPr>
+        <p:cNvPr id="1" name=""/>
+        <p:cNvGrpSpPr/>
+        <p:nvPr/>
+      </p:nvGrpSpPr>
+      <p:grpSpPr>
+        <a:xfrm>
+          <a:off x="0" y="0"/>
+          <a:ext cx="0" cy="0"/>
+          <a:chOff x="0" y="0"/>
+          <a:chExt cx="0" cy="0"/>
+        </a:xfrm>
+      </p:grpSpPr>
+      <p:sp>
+        <p:nvSpPr>
+          <p:cNvPr id="2" name="Shape 0"/>
+          <p:cNvSpPr/>
+          <p:nvPr/>
+        </p:nvSpPr>
+        <p:spPr>
+          <a:xfrm>
+            <a:off x="0" y="0"/>
+            <a:ext cx="164592" cy="5143500"/>
+          </a:xfrm>
+          <a:prstGeom prst="rect">
+            <a:avLst/>
+          </a:prstGeom>
+          <a:solidFill>
+            <a:srgbClr val="0E7C86"/>
+          </a:solidFill>
+          <a:ln/>
+        </p:spPr>
+      </p:sp>
+      <p:sp>
+        <p:nvSpPr>
+          <p:cNvPr id="3" name="Text 1"/>
+          <p:cNvSpPr/>
+          <p:nvPr/>
+        </p:nvSpPr>
+        <p:spPr>
+          <a:xfrm>
+            <a:off x="411480" y="182880"/>
+            <a:ext cx="8412480" cy="548640"/>
           </a:xfrm>
           <a:prstGeom prst="rect">
             <a:avLst/>
@@ -6233,54 +6925,54 @@
               <a:buNone/>
             </a:pPr>
             <a:r>
-              <a:rPr lang="en-US" sz="1800" b="1" dirty="0">
-                <a:solidFill>
-                  <a:srgbClr val="FFFFFF"/>
+              <a:rPr lang="en-US" sz="2400" b="1" dirty="0">
+                <a:solidFill>
+                  <a:srgbClr val="1F3A5F"/>
                 </a:solidFill>
                 <a:latin typeface="Yu Gothic UI Semibold" pitchFamily="34" charset="0"/>
                 <a:ea typeface="Yu Gothic UI Semibold" pitchFamily="34" charset="-122"/>
                 <a:cs typeface="Yu Gothic UI Semibold" pitchFamily="34" charset="-120"/>
               </a:rPr>
-              <a:t>動くツールが完成</a:t>
-            </a:r>
-            <a:endParaRPr lang="en-US" sz="1800" dirty="0"/>
-          </a:p>
-        </p:txBody>
-      </p:sp>
-      <p:sp>
-        <p:nvSpPr>
-          <p:cNvPr id="7" name="Text 5"/>
-          <p:cNvSpPr/>
-          <p:nvPr/>
-        </p:nvSpPr>
-        <p:spPr>
-          <a:xfrm>
-            <a:off x="1508760" y="2121408"/>
-            <a:ext cx="6949440" cy="457200"/>
-          </a:xfrm>
-          <a:prstGeom prst="rect">
-            <a:avLst/>
-          </a:prstGeom>
-          <a:noFill/>
-          <a:ln/>
-        </p:spPr>
-        <p:txBody>
-          <a:bodyPr wrap="square" rtlCol="0" anchor="t"/>
+              <a:t>演習2 の 完了チェック</a:t>
+            </a:r>
+            <a:endParaRPr lang="en-US" sz="2400" dirty="0"/>
+          </a:p>
+        </p:txBody>
+      </p:sp>
+      <p:sp>
+        <p:nvSpPr>
+          <p:cNvPr id="4" name="Text 2"/>
+          <p:cNvSpPr/>
+          <p:nvPr/>
+        </p:nvSpPr>
+        <p:spPr>
+          <a:xfrm>
+            <a:off x="411480" y="749808"/>
+            <a:ext cx="8412480" cy="365760"/>
+          </a:xfrm>
+          <a:prstGeom prst="rect">
+            <a:avLst/>
+          </a:prstGeom>
+          <a:noFill/>
+          <a:ln/>
+        </p:spPr>
+        <p:txBody>
+          <a:bodyPr wrap="square" rtlCol="0" anchor="ctr"/>
           <a:lstStyle/>
           <a:p>
             <a:pPr indent="0" marL="0">
               <a:buNone/>
             </a:pPr>
             <a:r>
-              <a:rPr lang="en-US" sz="1300" dirty="0">
-                <a:solidFill>
-                  <a:srgbClr val="E6ECF3"/>
+              <a:rPr lang="en-US" sz="1300" i="1" dirty="0">
+                <a:solidFill>
+                  <a:srgbClr val="555555"/>
                 </a:solidFill>
                 <a:latin typeface="Yu Gothic UI" pitchFamily="34" charset="0"/>
                 <a:ea typeface="Yu Gothic UI" pitchFamily="34" charset="-122"/>
                 <a:cs typeface="Yu Gothic UI" pitchFamily="34" charset="-120"/>
               </a:rPr>
-              <a:t>W1 設計書通りに GAS が動き、シミュレーション+レポート出力が回る。</a:t>
+              <a:t>ここができれば、ステップ② は完了です</a:t>
             </a:r>
             <a:endParaRPr lang="en-US" sz="1300" dirty="0"/>
           </a:p>
@@ -6288,24 +6980,24 @@
       </p:sp>
       <p:sp>
         <p:nvSpPr>
-          <p:cNvPr id="8" name="Shape 6"/>
-          <p:cNvSpPr/>
-          <p:nvPr/>
-        </p:nvSpPr>
-        <p:spPr>
-          <a:xfrm>
-            <a:off x="457200" y="2807208"/>
-            <a:ext cx="8229600" cy="1051560"/>
+          <p:cNvPr id="5" name="Shape 3"/>
+          <p:cNvSpPr/>
+          <p:nvPr/>
+        </p:nvSpPr>
+        <p:spPr>
+          <a:xfrm>
+            <a:off x="411480" y="1280160"/>
+            <a:ext cx="4046220" cy="3017520"/>
           </a:xfrm>
           <a:prstGeom prst="roundRect">
             <a:avLst>
-              <a:gd name="adj" fmla="val 6957"/>
+              <a:gd name="adj" fmla="val 3030"/>
             </a:avLst>
           </a:prstGeom>
           <a:solidFill>
-            <a:srgbClr val="2A4A75"/>
-          </a:solidFill>
-          <a:ln w="6350">
+            <a:srgbClr val="E6F4EA"/>
+          </a:solidFill>
+          <a:ln w="25400">
             <a:solidFill>
               <a:srgbClr val="0E7C86"/>
             </a:solidFill>
@@ -6315,14 +7007,34 @@
       </p:sp>
       <p:sp>
         <p:nvSpPr>
-          <p:cNvPr id="9" name="Text 7"/>
-          <p:cNvSpPr/>
-          <p:nvPr/>
-        </p:nvSpPr>
-        <p:spPr>
-          <a:xfrm>
-            <a:off x="658368" y="2971800"/>
-            <a:ext cx="777240" cy="777240"/>
+          <p:cNvPr id="6" name="Shape 4"/>
+          <p:cNvSpPr/>
+          <p:nvPr/>
+        </p:nvSpPr>
+        <p:spPr>
+          <a:xfrm>
+            <a:off x="411480" y="1280160"/>
+            <a:ext cx="4046220" cy="502920"/>
+          </a:xfrm>
+          <a:prstGeom prst="rect">
+            <a:avLst/>
+          </a:prstGeom>
+          <a:solidFill>
+            <a:srgbClr val="0E7C86"/>
+          </a:solidFill>
+          <a:ln/>
+        </p:spPr>
+      </p:sp>
+      <p:sp>
+        <p:nvSpPr>
+          <p:cNvPr id="7" name="Text 5"/>
+          <p:cNvSpPr/>
+          <p:nvPr/>
+        </p:nvSpPr>
+        <p:spPr>
+          <a:xfrm>
+            <a:off x="411480" y="1280160"/>
+            <a:ext cx="4046220" cy="502920"/>
           </a:xfrm>
           <a:prstGeom prst="rect">
             <a:avLst/>
@@ -6334,34 +7046,187 @@
           <a:bodyPr wrap="square" rtlCol="0" anchor="ctr"/>
           <a:lstStyle/>
           <a:p>
-            <a:pPr indent="0" marL="0">
-              <a:buNone/>
-            </a:pPr>
-            <a:r>
-              <a:rPr lang="en-US" sz="3400" b="1" dirty="0">
-                <a:solidFill>
-                  <a:srgbClr val="E8A33D"/>
+            <a:pPr algn="ctr" indent="0" marL="0">
+              <a:buNone/>
+            </a:pPr>
+            <a:r>
+              <a:rPr lang="en-US" sz="1400" b="1" dirty="0">
+                <a:solidFill>
+                  <a:srgbClr val="FFFFFF"/>
                 </a:solidFill>
                 <a:latin typeface="Yu Gothic UI Semibold" pitchFamily="34" charset="0"/>
                 <a:ea typeface="Yu Gothic UI Semibold" pitchFamily="34" charset="-122"/>
                 <a:cs typeface="Yu Gothic UI Semibold" pitchFamily="34" charset="-120"/>
               </a:rPr>
-              <a:t>02</a:t>
-            </a:r>
-            <a:endParaRPr lang="en-US" sz="3400" dirty="0"/>
-          </a:p>
-        </p:txBody>
-      </p:sp>
-      <p:sp>
-        <p:nvSpPr>
-          <p:cNvPr id="10" name="Text 8"/>
-          <p:cNvSpPr/>
-          <p:nvPr/>
-        </p:nvSpPr>
-        <p:spPr>
-          <a:xfrm>
-            <a:off x="1508760" y="2944368"/>
-            <a:ext cx="6949440" cy="411480"/>
+              <a:t>✅ できていればOK</a:t>
+            </a:r>
+            <a:endParaRPr lang="en-US" sz="1400" dirty="0"/>
+          </a:p>
+        </p:txBody>
+      </p:sp>
+      <p:sp>
+        <p:nvSpPr>
+          <p:cNvPr id="8" name="Text 6"/>
+          <p:cNvSpPr/>
+          <p:nvPr/>
+        </p:nvSpPr>
+        <p:spPr>
+          <a:xfrm>
+            <a:off x="594360" y="1938528"/>
+            <a:ext cx="3680460" cy="2240280"/>
+          </a:xfrm>
+          <a:prstGeom prst="rect">
+            <a:avLst/>
+          </a:prstGeom>
+          <a:noFill/>
+          <a:ln/>
+        </p:spPr>
+        <p:txBody>
+          <a:bodyPr wrap="square" rtlCol="0" anchor="t"/>
+          <a:lstStyle/>
+          <a:p>
+            <a:pPr marL="342900" indent="-342900">
+              <a:spcAft>
+                <a:spcPts val="800"/>
+              </a:spcAft>
+              <a:buSzPct val="100000"/>
+              <a:buChar char="•"/>
+            </a:pPr>
+            <a:r>
+              <a:rPr lang="en-US" sz="1300" dirty="0">
+                <a:solidFill>
+                  <a:srgbClr val="1A1A1A"/>
+                </a:solidFill>
+                <a:latin typeface="Yu Gothic UI" pitchFamily="34" charset="0"/>
+                <a:ea typeface="Yu Gothic UI" pitchFamily="34" charset="-122"/>
+                <a:cs typeface="Yu Gothic UI" pitchFamily="34" charset="-120"/>
+              </a:rPr>
+              <a:t>選んだ画面から実行できる</a:t>
+            </a:r>
+            <a:endParaRPr lang="en-US" sz="1300" dirty="0"/>
+          </a:p>
+          <a:p>
+            <a:pPr marL="342900" indent="-342900">
+              <a:spcAft>
+                <a:spcPts val="800"/>
+              </a:spcAft>
+              <a:buSzPct val="100000"/>
+              <a:buChar char="•"/>
+            </a:pPr>
+            <a:r>
+              <a:rPr lang="en-US" sz="1300" dirty="0">
+                <a:solidFill>
+                  <a:srgbClr val="1A1A1A"/>
+                </a:solidFill>
+                <a:latin typeface="Yu Gothic UI" pitchFamily="34" charset="0"/>
+                <a:ea typeface="Yu Gothic UI" pitchFamily="34" charset="-122"/>
+                <a:cs typeface="Yu Gothic UI" pitchFamily="34" charset="-120"/>
+              </a:rPr>
+              <a:t>実行 → 結果表示 → PDFが Drive に保存 が全部つながる</a:t>
+            </a:r>
+            <a:endParaRPr lang="en-US" sz="1300" dirty="0"/>
+          </a:p>
+          <a:p>
+            <a:pPr marL="342900" indent="-342900">
+              <a:spcAft>
+                <a:spcPts val="800"/>
+              </a:spcAft>
+              <a:buSzPct val="100000"/>
+              <a:buChar char="•"/>
+            </a:pPr>
+            <a:r>
+              <a:rPr lang="en-US" sz="1300" dirty="0">
+                <a:solidFill>
+                  <a:srgbClr val="1A1A1A"/>
+                </a:solidFill>
+                <a:latin typeface="Yu Gothic UI" pitchFamily="34" charset="0"/>
+                <a:ea typeface="Yu Gothic UI" pitchFamily="34" charset="-122"/>
+                <a:cs typeface="Yu Gothic UI" pitchFamily="34" charset="-120"/>
+              </a:rPr>
+              <a:t>PDFに 代理店名(AGENCY_NAME)が入っている</a:t>
+            </a:r>
+            <a:endParaRPr lang="en-US" sz="1300" dirty="0"/>
+          </a:p>
+          <a:p>
+            <a:pPr marL="342900" indent="-342900">
+              <a:spcAft>
+                <a:spcPts val="800"/>
+              </a:spcAft>
+              <a:buSzPct val="100000"/>
+              <a:buChar char="•"/>
+            </a:pPr>
+            <a:r>
+              <a:rPr lang="en-US" sz="1300" dirty="0">
+                <a:solidFill>
+                  <a:srgbClr val="1A1A1A"/>
+                </a:solidFill>
+                <a:latin typeface="Yu Gothic UI" pitchFamily="34" charset="0"/>
+                <a:ea typeface="Yu Gothic UI" pitchFamily="34" charset="-122"/>
+                <a:cs typeface="Yu Gothic UI" pitchFamily="34" charset="-120"/>
+              </a:rPr>
+              <a:t>PDFが 7ページ構成で 顧客に渡せる品質</a:t>
+            </a:r>
+            <a:endParaRPr lang="en-US" sz="1300" dirty="0"/>
+          </a:p>
+        </p:txBody>
+      </p:sp>
+      <p:sp>
+        <p:nvSpPr>
+          <p:cNvPr id="9" name="Shape 7"/>
+          <p:cNvSpPr/>
+          <p:nvPr/>
+        </p:nvSpPr>
+        <p:spPr>
+          <a:xfrm>
+            <a:off x="4686300" y="1280160"/>
+            <a:ext cx="4046220" cy="3017520"/>
+          </a:xfrm>
+          <a:prstGeom prst="roundRect">
+            <a:avLst>
+              <a:gd name="adj" fmla="val 3030"/>
+            </a:avLst>
+          </a:prstGeom>
+          <a:solidFill>
+            <a:srgbClr val="FDECEA"/>
+          </a:solidFill>
+          <a:ln w="25400">
+            <a:solidFill>
+              <a:srgbClr val="C76B7A"/>
+            </a:solidFill>
+            <a:prstDash val="solid"/>
+          </a:ln>
+        </p:spPr>
+      </p:sp>
+      <p:sp>
+        <p:nvSpPr>
+          <p:cNvPr id="10" name="Shape 8"/>
+          <p:cNvSpPr/>
+          <p:nvPr/>
+        </p:nvSpPr>
+        <p:spPr>
+          <a:xfrm>
+            <a:off x="4686300" y="1280160"/>
+            <a:ext cx="4046220" cy="502920"/>
+          </a:xfrm>
+          <a:prstGeom prst="rect">
+            <a:avLst/>
+          </a:prstGeom>
+          <a:solidFill>
+            <a:srgbClr val="C76B7A"/>
+          </a:solidFill>
+          <a:ln/>
+        </p:spPr>
+      </p:sp>
+      <p:sp>
+        <p:nvSpPr>
+          <p:cNvPr id="11" name="Text 9"/>
+          <p:cNvSpPr/>
+          <p:nvPr/>
+        </p:nvSpPr>
+        <p:spPr>
+          <a:xfrm>
+            <a:off x="4686300" y="1280160"/>
+            <a:ext cx="4046220" cy="502920"/>
           </a:xfrm>
           <a:prstGeom prst="rect">
             <a:avLst/>
@@ -6373,11 +7238,11 @@
           <a:bodyPr wrap="square" rtlCol="0" anchor="ctr"/>
           <a:lstStyle/>
           <a:p>
-            <a:pPr indent="0" marL="0">
-              <a:buNone/>
-            </a:pPr>
-            <a:r>
-              <a:rPr lang="en-US" sz="1800" b="1" dirty="0">
+            <a:pPr algn="ctr" indent="0" marL="0">
+              <a:buNone/>
+            </a:pPr>
+            <a:r>
+              <a:rPr lang="en-US" sz="1400" b="1" dirty="0">
                 <a:solidFill>
                   <a:srgbClr val="FFFFFF"/>
                 </a:solidFill>
@@ -6385,22 +7250,22 @@
                 <a:ea typeface="Yu Gothic UI Semibold" pitchFamily="34" charset="-122"/>
                 <a:cs typeface="Yu Gothic UI Semibold" pitchFamily="34" charset="-120"/>
               </a:rPr>
-              <a:t>バイブコーディングの体験</a:t>
-            </a:r>
-            <a:endParaRPr lang="en-US" sz="1800" dirty="0"/>
-          </a:p>
-        </p:txBody>
-      </p:sp>
-      <p:sp>
-        <p:nvSpPr>
-          <p:cNvPr id="11" name="Text 9"/>
-          <p:cNvSpPr/>
-          <p:nvPr/>
-        </p:nvSpPr>
-        <p:spPr>
-          <a:xfrm>
-            <a:off x="1508760" y="3374136"/>
-            <a:ext cx="6949440" cy="457200"/>
+              <a:t>⚠️ 漏れがあると</a:t>
+            </a:r>
+            <a:endParaRPr lang="en-US" sz="1400" dirty="0"/>
+          </a:p>
+        </p:txBody>
+      </p:sp>
+      <p:sp>
+        <p:nvSpPr>
+          <p:cNvPr id="12" name="Text 10"/>
+          <p:cNvSpPr/>
+          <p:nvPr/>
+        </p:nvSpPr>
+        <p:spPr>
+          <a:xfrm>
+            <a:off x="4869180" y="1938528"/>
+            <a:ext cx="3680460" cy="2240280"/>
           </a:xfrm>
           <a:prstGeom prst="rect">
             <a:avLst/>
@@ -6412,163 +7277,86 @@
           <a:bodyPr wrap="square" rtlCol="0" anchor="t"/>
           <a:lstStyle/>
           <a:p>
-            <a:pPr indent="0" marL="0">
-              <a:buNone/>
+            <a:pPr marL="342900" indent="-342900">
+              <a:spcAft>
+                <a:spcPts val="800"/>
+              </a:spcAft>
+              <a:buSzPct val="100000"/>
+              <a:buChar char="•"/>
             </a:pPr>
             <a:r>
               <a:rPr lang="en-US" sz="1300" dirty="0">
                 <a:solidFill>
-                  <a:srgbClr val="E6ECF3"/>
+                  <a:srgbClr val="1A1A1A"/>
                 </a:solidFill>
                 <a:latin typeface="Yu Gothic UI" pitchFamily="34" charset="0"/>
                 <a:ea typeface="Yu Gothic UI" pitchFamily="34" charset="-122"/>
                 <a:cs typeface="Yu Gothic UI" pitchFamily="34" charset="-120"/>
               </a:rPr>
-              <a:t>「AI に頼んで貼付」の作り方に慣れる。詳細理解より "動かして直す" 姿勢に。</a:t>
+              <a:t>画面が動かない → 実際の面談で使えない</a:t>
             </a:r>
             <a:endParaRPr lang="en-US" sz="1300" dirty="0"/>
           </a:p>
-        </p:txBody>
-      </p:sp>
-      <p:sp>
-        <p:nvSpPr>
-          <p:cNvPr id="12" name="Shape 10"/>
-          <p:cNvSpPr/>
-          <p:nvPr/>
-        </p:nvSpPr>
-        <p:spPr>
-          <a:xfrm>
-            <a:off x="457200" y="4059936"/>
-            <a:ext cx="8229600" cy="1051560"/>
-          </a:xfrm>
-          <a:prstGeom prst="roundRect">
-            <a:avLst>
-              <a:gd name="adj" fmla="val 6957"/>
-            </a:avLst>
-          </a:prstGeom>
-          <a:solidFill>
-            <a:srgbClr val="2A4A75"/>
-          </a:solidFill>
-          <a:ln w="6350">
-            <a:solidFill>
-              <a:srgbClr val="0E7C86"/>
-            </a:solidFill>
-            <a:prstDash val="solid"/>
-          </a:ln>
-        </p:spPr>
-      </p:sp>
-      <p:sp>
-        <p:nvSpPr>
-          <p:cNvPr id="13" name="Text 11"/>
-          <p:cNvSpPr/>
-          <p:nvPr/>
-        </p:nvSpPr>
-        <p:spPr>
-          <a:xfrm>
-            <a:off x="658368" y="4224528"/>
-            <a:ext cx="777240" cy="777240"/>
-          </a:xfrm>
-          <a:prstGeom prst="rect">
-            <a:avLst/>
-          </a:prstGeom>
-          <a:noFill/>
-          <a:ln/>
-        </p:spPr>
-        <p:txBody>
-          <a:bodyPr wrap="square" rtlCol="0" anchor="ctr"/>
-          <a:lstStyle/>
-          <a:p>
-            <a:pPr indent="0" marL="0">
-              <a:buNone/>
-            </a:pPr>
-            <a:r>
-              <a:rPr lang="en-US" sz="3400" b="1" dirty="0">
-                <a:solidFill>
-                  <a:srgbClr val="E8A33D"/>
-                </a:solidFill>
-                <a:latin typeface="Yu Gothic UI Semibold" pitchFamily="34" charset="0"/>
-                <a:ea typeface="Yu Gothic UI Semibold" pitchFamily="34" charset="-122"/>
-                <a:cs typeface="Yu Gothic UI Semibold" pitchFamily="34" charset="-120"/>
-              </a:rPr>
-              <a:t>03</a:t>
-            </a:r>
-            <a:endParaRPr lang="en-US" sz="3400" dirty="0"/>
-          </a:p>
-        </p:txBody>
-      </p:sp>
-      <p:sp>
-        <p:nvSpPr>
-          <p:cNvPr id="14" name="Text 12"/>
-          <p:cNvSpPr/>
-          <p:nvPr/>
-        </p:nvSpPr>
-        <p:spPr>
-          <a:xfrm>
-            <a:off x="1508760" y="4197096"/>
-            <a:ext cx="6949440" cy="411480"/>
-          </a:xfrm>
-          <a:prstGeom prst="rect">
-            <a:avLst/>
-          </a:prstGeom>
-          <a:noFill/>
-          <a:ln/>
-        </p:spPr>
-        <p:txBody>
-          <a:bodyPr wrap="square" rtlCol="0" anchor="ctr"/>
-          <a:lstStyle/>
-          <a:p>
-            <a:pPr indent="0" marL="0">
-              <a:buNone/>
-            </a:pPr>
-            <a:r>
-              <a:rPr lang="en-US" sz="1800" b="1" dirty="0">
-                <a:solidFill>
-                  <a:srgbClr val="FFFFFF"/>
-                </a:solidFill>
-                <a:latin typeface="Yu Gothic UI Semibold" pitchFamily="34" charset="0"/>
-                <a:ea typeface="Yu Gothic UI Semibold" pitchFamily="34" charset="-122"/>
-                <a:cs typeface="Yu Gothic UI Semibold" pitchFamily="34" charset="-120"/>
-              </a:rPr>
-              <a:t>次はデプロイ+テスト</a:t>
-            </a:r>
-            <a:endParaRPr lang="en-US" sz="1800" dirty="0"/>
-          </a:p>
-        </p:txBody>
-      </p:sp>
-      <p:sp>
-        <p:nvSpPr>
-          <p:cNvPr id="15" name="Text 13"/>
-          <p:cNvSpPr/>
-          <p:nvPr/>
-        </p:nvSpPr>
-        <p:spPr>
-          <a:xfrm>
-            <a:off x="1508760" y="4626864"/>
-            <a:ext cx="6949440" cy="457200"/>
-          </a:xfrm>
-          <a:prstGeom prst="rect">
-            <a:avLst/>
-          </a:prstGeom>
-          <a:noFill/>
-          <a:ln/>
-        </p:spPr>
-        <p:txBody>
-          <a:bodyPr wrap="square" rtlCol="0" anchor="t"/>
-          <a:lstStyle/>
-          <a:p>
-            <a:pPr indent="0" marL="0">
-              <a:buNone/>
+          <a:p>
+            <a:pPr marL="342900" indent="-342900">
+              <a:spcAft>
+                <a:spcPts val="800"/>
+              </a:spcAft>
+              <a:buSzPct val="100000"/>
+              <a:buChar char="•"/>
             </a:pPr>
             <a:r>
               <a:rPr lang="en-US" sz="1300" dirty="0">
                 <a:solidFill>
-                  <a:srgbClr val="E6ECF3"/>
+                  <a:srgbClr val="1A1A1A"/>
                 </a:solidFill>
                 <a:latin typeface="Yu Gothic UI" pitchFamily="34" charset="0"/>
                 <a:ea typeface="Yu Gothic UI" pitchFamily="34" charset="-122"/>
                 <a:cs typeface="Yu Gothic UI" pitchFamily="34" charset="-120"/>
               </a:rPr>
-              <a:t>W3 で 使える形にデプロイ、5シナリオでテストして精度を検証する。</a:t>
+              <a:t>PDF出力なし → 顧客への説明資料が手作りに戻る</a:t>
+            </a:r>
+            <a:endParaRPr lang="en-US" sz="1300" dirty="0"/>
+          </a:p>
+          <a:p>
+            <a:pPr marL="342900" indent="-342900">
+              <a:spcAft>
+                <a:spcPts val="800"/>
+              </a:spcAft>
+              <a:buSzPct val="100000"/>
+              <a:buChar char="•"/>
+            </a:pPr>
+            <a:r>
+              <a:rPr lang="en-US" sz="1300" dirty="0">
+                <a:solidFill>
+                  <a:srgbClr val="1A1A1A"/>
+                </a:solidFill>
+                <a:latin typeface="Yu Gothic UI" pitchFamily="34" charset="0"/>
+                <a:ea typeface="Yu Gothic UI" pitchFamily="34" charset="-122"/>
+                <a:cs typeface="Yu Gothic UI" pitchFamily="34" charset="-120"/>
+              </a:rPr>
+              <a:t>代理店名が入っていない → プロっぽくない、"AI感" 丸出し</a:t>
+            </a:r>
+            <a:endParaRPr lang="en-US" sz="1300" dirty="0"/>
+          </a:p>
+          <a:p>
+            <a:pPr marL="342900" indent="-342900">
+              <a:spcAft>
+                <a:spcPts val="800"/>
+              </a:spcAft>
+              <a:buSzPct val="100000"/>
+              <a:buChar char="•"/>
+            </a:pPr>
+            <a:r>
+              <a:rPr lang="en-US" sz="1300" dirty="0">
+                <a:solidFill>
+                  <a:srgbClr val="1A1A1A"/>
+                </a:solidFill>
+                <a:latin typeface="Yu Gothic UI" pitchFamily="34" charset="0"/>
+                <a:ea typeface="Yu Gothic UI" pitchFamily="34" charset="-122"/>
+                <a:cs typeface="Yu Gothic UI" pitchFamily="34" charset="-120"/>
+              </a:rPr>
+              <a:t>PDFレイアウトが崩れている → 顧客に渡す前に必ず確認</a:t>
             </a:r>
             <a:endParaRPr lang="en-US" sz="1300" dirty="0"/>
           </a:p>
